--- a/dba/coursework/GEB7911_Qualitative_Research_Methods/Malik_GEB7911_ProposalPoster_DRAFT.pptx
+++ b/dba/coursework/GEB7911_Qualitative_Research_Methods/Malik_GEB7911_ProposalPoster_DRAFT.pptx
@@ -4882,7 +4882,7 @@
         <p:spPr>
           <a:xfrm>
             <a:off x="3298825" y="3054934"/>
-            <a:ext cx="2740025" cy="437388"/>
+            <a:ext cx="2740025" cy="563118"/>
           </a:xfrm>
           <a:prstGeom prst="rect">
             <a:avLst/>
@@ -4912,7 +4912,7 @@
                 <a:latin typeface="Times New Roman"/>
                 <a:cs typeface="Times New Roman"/>
               </a:rPr>
-              <a:t>Fifteen years in audit and risk, and prior bank examination work.</a:t>
+              <a:t>A career in bank examination, regulatory reporting and internal</a:t>
             </a:r>
           </a:p>
           <a:p>
@@ -4935,7 +4935,7 @@
                 <a:latin typeface="Times New Roman"/>
                 <a:cs typeface="Times New Roman"/>
               </a:rPr>
-              <a:t>Insider access and insider bias at once. Every occasion of feeling</a:t>
+              <a:t>audit, including building an AI review tool. Insider access and</a:t>
             </a:r>
           </a:p>
           <a:p>
@@ -4958,7 +4958,30 @@
                 <a:latin typeface="Times New Roman"/>
                 <a:cs typeface="Times New Roman"/>
               </a:rPr>
-              <a:t>confirmed is entered in a confirmation hazard log.</a:t>
+              <a:t>insider bias at once. Every occasion of feeling confirmed is entered</a:t>
+            </a:r>
+          </a:p>
+          <a:p>
+            <a:pPr algn="l">
+              <a:lnSpc>
+                <a:spcPts val="990"/>
+              </a:lnSpc>
+              <a:spcBef>
+                <a:spcPts val="0"/>
+              </a:spcBef>
+              <a:spcAft>
+                <a:spcPts val="0"/>
+              </a:spcAft>
+            </a:pPr>
+            <a:r>
+              <a:rPr sz="790" b="0" i="0">
+                <a:solidFill>
+                  <a:srgbClr val="3A4048"/>
+                </a:solidFill>
+                <a:latin typeface="Times New Roman"/>
+                <a:cs typeface="Times New Roman"/>
+              </a:rPr>
+              <a:t>in a confirmation hazard log.</a:t>
             </a:r>
           </a:p>
         </p:txBody>
@@ -4971,7 +4994,7 @@
         </p:nvSpPr>
         <p:spPr>
           <a:xfrm>
-            <a:off x="3298825" y="3485896"/>
+            <a:off x="3298825" y="3611626"/>
             <a:ext cx="982980" cy="133350"/>
           </a:xfrm>
           <a:prstGeom prst="rect">
@@ -5015,7 +5038,7 @@
         </p:nvSpPr>
         <p:spPr>
           <a:xfrm>
-            <a:off x="3298825" y="3597224"/>
+            <a:off x="3298825" y="3722954"/>
             <a:ext cx="2740025" cy="311658"/>
           </a:xfrm>
           <a:prstGeom prst="rect">
@@ -5082,7 +5105,7 @@
         </p:nvSpPr>
         <p:spPr>
           <a:xfrm>
-            <a:off x="3298825" y="3938270"/>
+            <a:off x="3298825" y="4064000"/>
             <a:ext cx="2727325" cy="177800"/>
           </a:xfrm>
           <a:prstGeom prst="roundRect">
@@ -5114,7 +5137,7 @@
         </p:nvSpPr>
         <p:spPr>
           <a:xfrm>
-            <a:off x="3400425" y="3952595"/>
+            <a:off x="3400425" y="4078325"/>
             <a:ext cx="1740408" cy="137160"/>
           </a:xfrm>
           <a:prstGeom prst="rect">
@@ -5158,7 +5181,7 @@
         </p:nvSpPr>
         <p:spPr>
           <a:xfrm>
-            <a:off x="3298825" y="4153154"/>
+            <a:off x="3298825" y="4278884"/>
             <a:ext cx="2740025" cy="445769"/>
           </a:xfrm>
           <a:prstGeom prst="rect">
@@ -5248,7 +5271,7 @@
         </p:nvSpPr>
         <p:spPr>
           <a:xfrm>
-            <a:off x="3311525" y="4653280"/>
+            <a:off x="3311525" y="4779010"/>
             <a:ext cx="40640" cy="40640"/>
           </a:xfrm>
           <a:prstGeom prst="roundRect">
@@ -5280,7 +5303,7 @@
         </p:nvSpPr>
         <p:spPr>
           <a:xfrm>
-            <a:off x="3413125" y="4588764"/>
+            <a:off x="3413125" y="4714494"/>
             <a:ext cx="2625725" cy="317500"/>
           </a:xfrm>
           <a:prstGeom prst="rect">
@@ -5347,7 +5370,7 @@
         </p:nvSpPr>
         <p:spPr>
           <a:xfrm>
-            <a:off x="3311525" y="4947920"/>
+            <a:off x="3311525" y="5073650"/>
             <a:ext cx="40640" cy="40640"/>
           </a:xfrm>
           <a:prstGeom prst="roundRect">
@@ -5379,7 +5402,7 @@
         </p:nvSpPr>
         <p:spPr>
           <a:xfrm>
-            <a:off x="3413125" y="4883404"/>
+            <a:off x="3413125" y="5009134"/>
             <a:ext cx="2625725" cy="317500"/>
           </a:xfrm>
           <a:prstGeom prst="rect">
@@ -5446,7 +5469,7 @@
         </p:nvSpPr>
         <p:spPr>
           <a:xfrm>
-            <a:off x="3311525" y="5242560"/>
+            <a:off x="3311525" y="5368290"/>
             <a:ext cx="40640" cy="40640"/>
           </a:xfrm>
           <a:prstGeom prst="roundRect">
@@ -5478,7 +5501,7 @@
         </p:nvSpPr>
         <p:spPr>
           <a:xfrm>
-            <a:off x="3413125" y="5178044"/>
+            <a:off x="3413125" y="5303774"/>
             <a:ext cx="2625725" cy="189229"/>
           </a:xfrm>
           <a:prstGeom prst="rect">

--- a/dba/coursework/GEB7911_Qualitative_Research_Methods/Malik_GEB7911_ProposalPoster_DRAFT.pptx
+++ b/dba/coursework/GEB7911_Qualitative_Research_Methods/Malik_GEB7911_ProposalPoster_DRAFT.pptx
@@ -5818,7 +5818,7 @@
                 <a:latin typeface="Times New Roman"/>
                 <a:cs typeface="Times New Roman"/>
               </a:rPr>
-              <a:t>Eight or more years internal audit, recurring engagement</a:t>
+              <a:t>Five or more years in audit or risk assurance, with recurring</a:t>
             </a:r>
           </a:p>
           <a:p>
@@ -5841,7 +5841,7 @@
                 <a:latin typeface="Times New Roman"/>
                 <a:cs typeface="Times New Roman"/>
               </a:rPr>
-              <a:t>responsibility</a:t>
+              <a:t>engagement responsibility</a:t>
             </a:r>
           </a:p>
         </p:txBody>

--- a/dba/coursework/GEB7911_Qualitative_Research_Methods/Malik_GEB7911_ProposalPoster_DRAFT.pptx
+++ b/dba/coursework/GEB7911_Qualitative_Research_Methods/Malik_GEB7911_ProposalPoster_DRAFT.pptx
@@ -3370,8 +3370,8 @@
         </p:nvSpPr>
         <p:spPr>
           <a:xfrm>
-            <a:off x="10053447" y="424180"/>
-            <a:ext cx="1706753" cy="190500"/>
+            <a:off x="8783701" y="424180"/>
+            <a:ext cx="2976499" cy="190500"/>
           </a:xfrm>
           <a:prstGeom prst="rect">
             <a:avLst/>
@@ -3401,7 +3401,7 @@
                 <a:latin typeface="Times New Roman"/>
                 <a:cs typeface="Times New Roman"/>
               </a:rPr>
-              <a:t>DBA Cohort 8.14  ·  GEB 7911</a:t>
+              <a:t>DBA Cohort 8.14  ·  GEB 7911  ·  Dr. Cristina Gonzalez</a:t>
             </a:r>
           </a:p>
         </p:txBody>
@@ -3414,8 +3414,8 @@
         </p:nvSpPr>
         <p:spPr>
           <a:xfrm>
-            <a:off x="8851011" y="627380"/>
-            <a:ext cx="2909189" cy="190500"/>
+            <a:off x="9294876" y="660704"/>
+            <a:ext cx="2465324" cy="144779"/>
           </a:xfrm>
           <a:prstGeom prst="rect">
             <a:avLst/>
@@ -3438,14 +3438,14 @@
               </a:spcAft>
             </a:pPr>
             <a:r>
-              <a:rPr sz="1000" b="0" i="0">
-                <a:solidFill>
-                  <a:srgbClr val="8FA3BC"/>
-                </a:solidFill>
-                <a:latin typeface="Times New Roman"/>
-                <a:cs typeface="Times New Roman"/>
-              </a:rPr>
-              <a:t>Qualitative Research Proposal  ·  Dr. Cristina Gonzalez</a:t>
+              <a:rPr sz="760" b="1" i="0" spc="100">
+                <a:solidFill>
+                  <a:srgbClr val="B6862C"/>
+                </a:solidFill>
+                <a:latin typeface="Consolas"/>
+                <a:cs typeface="Consolas"/>
+              </a:rPr>
+              <a:t>DRAFT FOR FEEDBACK  ·  29 SEP 2026</a:t>
             </a:r>
           </a:p>
         </p:txBody>
@@ -3523,7 +3523,7 @@
         <p:spPr>
           <a:xfrm>
             <a:off x="660400" y="1169035"/>
-            <a:ext cx="1962150" cy="142875"/>
+            <a:ext cx="1352550" cy="142875"/>
           </a:xfrm>
           <a:prstGeom prst="rect">
             <a:avLst/>
@@ -3553,7 +3553,7 @@
                 <a:latin typeface="Consolas"/>
                 <a:cs typeface="Consolas"/>
               </a:rPr>
-              <a:t>CENTRAL RESEARCH QUESTION</a:t>
+              <a:t>RESEARCH QUESTION</a:t>
             </a:r>
           </a:p>
         </p:txBody>
@@ -3643,7 +3643,7 @@
         <p:spPr>
           <a:xfrm>
             <a:off x="533400" y="1766925"/>
-            <a:ext cx="2161031" cy="137160"/>
+            <a:ext cx="1530096" cy="137160"/>
           </a:xfrm>
           <a:prstGeom prst="rect">
             <a:avLst/>
@@ -3673,7 +3673,7 @@
                 <a:latin typeface="Consolas"/>
                 <a:cs typeface="Consolas"/>
               </a:rPr>
-              <a:t>1 · FOCUS AND RESEARCH PROBLEM</a:t>
+              <a:t>1 · PROBLEM STATEMENT</a:t>
             </a:r>
           </a:p>
         </p:txBody>
@@ -4102,7 +4102,7 @@
         <p:spPr>
           <a:xfrm>
             <a:off x="533400" y="3904335"/>
-            <a:ext cx="1459992" cy="137160"/>
+            <a:ext cx="1530096" cy="137160"/>
           </a:xfrm>
           <a:prstGeom prst="rect">
             <a:avLst/>
@@ -4132,7 +4132,7 @@
                 <a:latin typeface="Consolas"/>
                 <a:cs typeface="Consolas"/>
               </a:rPr>
-              <a:t>2 · RESEARCH PURPOSE</a:t>
+              <a:t>2 · PURPOSE STATEMENT</a:t>
             </a:r>
           </a:p>
         </p:txBody>
@@ -4558,7 +4558,7 @@
                 <a:latin typeface="Consolas"/>
                 <a:cs typeface="Consolas"/>
               </a:rPr>
-              <a:t>3 · FRAMEWORK AND ASSUMPTIONS</a:t>
+              <a:t>3 · PHILOSOPHICAL ASSUMPTIONS</a:t>
             </a:r>
           </a:p>
         </p:txBody>
@@ -5138,7 +5138,7 @@
         <p:spPr>
           <a:xfrm>
             <a:off x="3400425" y="4078325"/>
-            <a:ext cx="1740408" cy="137160"/>
+            <a:ext cx="1810512" cy="137160"/>
           </a:xfrm>
           <a:prstGeom prst="rect">
             <a:avLst/>
@@ -5168,7 +5168,7 @@
                 <a:latin typeface="Consolas"/>
                 <a:cs typeface="Consolas"/>
               </a:rPr>
-              <a:t>4 · QUALITATIVE APPROACH</a:t>
+              <a:t>4 · METHODOLOGY: APPROACH</a:t>
             </a:r>
           </a:p>
         </p:txBody>
@@ -5578,7 +5578,7 @@
         <p:spPr>
           <a:xfrm>
             <a:off x="6267450" y="1766925"/>
-            <a:ext cx="1389888" cy="137160"/>
+            <a:ext cx="2301240" cy="137160"/>
           </a:xfrm>
           <a:prstGeom prst="rect">
             <a:avLst/>
@@ -5608,7 +5608,7 @@
                 <a:latin typeface="Consolas"/>
                 <a:cs typeface="Consolas"/>
               </a:rPr>
-              <a:t>5 · DATA COLLECTION</a:t>
+              <a:t>5 · METHODOLOGY: DATA COLLECTION</a:t>
             </a:r>
           </a:p>
         </p:txBody>
@@ -6306,7 +6306,7 @@
         <p:spPr>
           <a:xfrm>
             <a:off x="6267450" y="4197705"/>
-            <a:ext cx="1249680" cy="137160"/>
+            <a:ext cx="2161031" cy="137160"/>
           </a:xfrm>
           <a:prstGeom prst="rect">
             <a:avLst/>
@@ -6336,7 +6336,7 @@
                 <a:latin typeface="Consolas"/>
                 <a:cs typeface="Consolas"/>
               </a:rPr>
-              <a:t>6 · DATA ANALYSIS</a:t>
+              <a:t>6 · METHODOLOGY: DATA ANALYSIS</a:t>
             </a:r>
           </a:p>
         </p:txBody>
@@ -6958,7 +6958,7 @@
         <p:spPr>
           <a:xfrm>
             <a:off x="9134475" y="1766925"/>
-            <a:ext cx="1880615" cy="137160"/>
+            <a:ext cx="1810512" cy="137160"/>
           </a:xfrm>
           <a:prstGeom prst="rect">
             <a:avLst/>
@@ -6988,7 +6988,7 @@
                 <a:latin typeface="Consolas"/>
                 <a:cs typeface="Consolas"/>
               </a:rPr>
-              <a:t>7 · ETHICAL CONSIDERATIONS</a:t>
+              <a:t>7 · ETHICS AND VALIDATION</a:t>
             </a:r>
           </a:p>
         </p:txBody>
@@ -7391,7 +7391,7 @@
                 <a:latin typeface="Times New Roman"/>
                 <a:cs typeface="Times New Roman"/>
               </a:rPr>
-              <a:t>Member checking of the composite description offered to every</a:t>
+              <a:t>Validation: confirmation hazard log, disconfirming cases,</a:t>
             </a:r>
           </a:p>
           <a:p>
@@ -7414,7 +7414,7 @@
                 <a:latin typeface="Times New Roman"/>
                 <a:cs typeface="Times New Roman"/>
               </a:rPr>
-              <a:t>participant</a:t>
+              <a:t>member checking, audit trail</a:t>
             </a:r>
           </a:p>
         </p:txBody>
@@ -7589,7 +7589,7 @@
                 <a:latin typeface="Consolas"/>
                 <a:cs typeface="Consolas"/>
               </a:rPr>
-              <a:t>8 · EXPECTED CONTRIBUTION</a:t>
+              <a:t>8 · DESIRED CONTRIBUTIONS</a:t>
             </a:r>
           </a:p>
         </p:txBody>

--- a/dba/coursework/GEB7911_Qualitative_Research_Methods/Malik_GEB7911_ProposalPoster_DRAFT.pptx
+++ b/dba/coursework/GEB7911_Qualitative_Research_Methods/Malik_GEB7911_ProposalPoster_DRAFT.pptx
@@ -3830,7 +3830,7 @@
                 <a:latin typeface="Times New Roman"/>
                 <a:cs typeface="Times New Roman"/>
               </a:rPr>
-              <a:t>extent of reliance, which a survey can measure. What remains</a:t>
+              <a:t>extent of reliance, which a survey can measure. The lived</a:t>
             </a:r>
           </a:p>
           <a:p>
@@ -3853,7 +3853,7 @@
                 <a:latin typeface="Times New Roman"/>
                 <a:cs typeface="Times New Roman"/>
               </a:rPr>
-              <a:t>unexplored is the lived experience of receiving machine agreement</a:t>
+              <a:t>experience of receiving machine agreement with a judgment</a:t>
             </a:r>
           </a:p>
           <a:p>
@@ -3876,7 +3876,7 @@
                 <a:latin typeface="Times New Roman"/>
                 <a:cs typeface="Times New Roman"/>
               </a:rPr>
-              <a:t>with a judgment already formed.</a:t>
+              <a:t>already formed remains unexplored.</a:t>
             </a:r>
           </a:p>
         </p:txBody>
@@ -3890,7 +3890,7 @@
         <p:spPr>
           <a:xfrm>
             <a:off x="431800" y="2966974"/>
-            <a:ext cx="2740025" cy="445769"/>
+            <a:ext cx="2740025" cy="317500"/>
           </a:xfrm>
           <a:prstGeom prst="rect">
             <a:avLst/>
@@ -3920,7 +3920,7 @@
                 <a:latin typeface="Times New Roman"/>
                 <a:cs typeface="Times New Roman"/>
               </a:rPr>
-              <a:t>Two things are being conflated: automation bias, a human</a:t>
+              <a:t>Firms and regulators are writing AI-use policy on the assumption</a:t>
             </a:r>
           </a:p>
           <a:p>
@@ -3943,133 +3943,20 @@
                 <a:latin typeface="Times New Roman"/>
                 <a:cs typeface="Times New Roman"/>
               </a:rPr>
-              <a:t>tendency, and sycophancy, a property of the system. A</a:t>
-            </a:r>
-          </a:p>
-          <a:p>
-            <a:pPr algn="l">
-              <a:lnSpc>
-                <a:spcPts val="1010"/>
-              </a:lnSpc>
-              <a:spcBef>
-                <a:spcPts val="0"/>
-              </a:spcBef>
-              <a:spcAft>
-                <a:spcPts val="0"/>
-              </a:spcAft>
-            </a:pPr>
-            <a:r>
-              <a:rPr sz="800" b="0" i="0">
-                <a:solidFill>
-                  <a:srgbClr val="3A4048"/>
-                </a:solidFill>
-                <a:latin typeface="Times New Roman"/>
-                <a:cs typeface="Times New Roman"/>
-              </a:rPr>
-              <a:t>magnitude-of-reliance measure cannot tell them apart.</a:t>
-            </a:r>
-          </a:p>
-        </p:txBody>
-      </p:sp>
-      <p:sp>
-        <p:nvSpPr>
-          <p:cNvPr id="20" name="TextBox 19"/>
-          <p:cNvSpPr txBox="1"/>
-          <p:nvPr/>
-        </p:nvSpPr>
-        <p:spPr>
-          <a:xfrm>
-            <a:off x="431800" y="3402584"/>
-            <a:ext cx="2740025" cy="445769"/>
-          </a:xfrm>
-          <a:prstGeom prst="rect">
-            <a:avLst/>
-          </a:prstGeom>
-          <a:noFill/>
-        </p:spPr>
-        <p:txBody>
-          <a:bodyPr wrap="square" lIns="0" rIns="0" tIns="0" bIns="0"/>
-          <a:lstStyle/>
-          <a:p>
-            <a:pPr algn="l">
-              <a:lnSpc>
-                <a:spcPts val="1010"/>
-              </a:lnSpc>
-              <a:spcBef>
-                <a:spcPts val="0"/>
-              </a:spcBef>
-              <a:spcAft>
-                <a:spcPts val="0"/>
-              </a:spcAft>
-            </a:pPr>
-            <a:r>
-              <a:rPr sz="800" b="0" i="0">
-                <a:solidFill>
-                  <a:srgbClr val="3A4048"/>
-                </a:solidFill>
-                <a:latin typeface="Times New Roman"/>
-                <a:cs typeface="Times New Roman"/>
-              </a:rPr>
-              <a:t>Standards assume a competent human reviewer sits above the</a:t>
-            </a:r>
-          </a:p>
-          <a:p>
-            <a:pPr algn="l">
-              <a:lnSpc>
-                <a:spcPts val="1010"/>
-              </a:lnSpc>
-              <a:spcBef>
-                <a:spcPts val="0"/>
-              </a:spcBef>
-              <a:spcAft>
-                <a:spcPts val="0"/>
-              </a:spcAft>
-            </a:pPr>
-            <a:r>
-              <a:rPr sz="800" b="0" i="0">
-                <a:solidFill>
-                  <a:srgbClr val="3A4048"/>
-                </a:solidFill>
-                <a:latin typeface="Times New Roman"/>
-                <a:cs typeface="Times New Roman"/>
-              </a:rPr>
-              <a:t>system. Firms and regulators are writing AI-use policy on that</a:t>
-            </a:r>
-          </a:p>
-          <a:p>
-            <a:pPr algn="l">
-              <a:lnSpc>
-                <a:spcPts val="1010"/>
-              </a:lnSpc>
-              <a:spcBef>
-                <a:spcPts val="0"/>
-              </a:spcBef>
-              <a:spcAft>
-                <a:spcPts val="0"/>
-              </a:spcAft>
-            </a:pPr>
-            <a:r>
-              <a:rPr sz="800" b="0" i="0">
-                <a:solidFill>
-                  <a:srgbClr val="3A4048"/>
-                </a:solidFill>
-                <a:latin typeface="Times New Roman"/>
-                <a:cs typeface="Times New Roman"/>
-              </a:rPr>
-              <a:t>assumption now.</a:t>
-            </a:r>
-          </a:p>
-        </p:txBody>
-      </p:sp>
-      <p:sp>
-        <p:nvSpPr>
-          <p:cNvPr id="21" name="Rounded Rectangle 20"/>
+              <a:t>that a human reviewer still exercises independent judgment.</a:t>
+            </a:r>
+          </a:p>
+        </p:txBody>
+      </p:sp>
+      <p:sp>
+        <p:nvSpPr>
+          <p:cNvPr id="20" name="Rounded Rectangle 19"/>
           <p:cNvSpPr/>
           <p:nvPr/>
         </p:nvSpPr>
         <p:spPr>
           <a:xfrm>
-            <a:off x="431800" y="3890010"/>
+            <a:off x="431800" y="3326129"/>
             <a:ext cx="2727325" cy="177800"/>
           </a:xfrm>
           <a:prstGeom prst="roundRect">
@@ -4095,14 +3982,58 @@
       </p:sp>
       <p:sp>
         <p:nvSpPr>
+          <p:cNvPr id="21" name="TextBox 20"/>
+          <p:cNvSpPr txBox="1"/>
+          <p:nvPr/>
+        </p:nvSpPr>
+        <p:spPr>
+          <a:xfrm>
+            <a:off x="533400" y="3340455"/>
+            <a:ext cx="1530096" cy="137160"/>
+          </a:xfrm>
+          <a:prstGeom prst="rect">
+            <a:avLst/>
+          </a:prstGeom>
+          <a:noFill/>
+        </p:spPr>
+        <p:txBody>
+          <a:bodyPr wrap="none" lIns="0" rIns="0" tIns="0" bIns="0"/>
+          <a:lstStyle/>
+          <a:p>
+            <a:pPr algn="l">
+              <a:lnSpc>
+                <a:spcPct val="100000"/>
+              </a:lnSpc>
+              <a:spcBef>
+                <a:spcPts val="0"/>
+              </a:spcBef>
+              <a:spcAft>
+                <a:spcPts val="0"/>
+              </a:spcAft>
+            </a:pPr>
+            <a:r>
+              <a:rPr sz="720" b="1" i="0" spc="120">
+                <a:solidFill>
+                  <a:srgbClr val="FFFFFF"/>
+                </a:solidFill>
+                <a:latin typeface="Consolas"/>
+                <a:cs typeface="Consolas"/>
+              </a:rPr>
+              <a:t>2 · PURPOSE STATEMENT</a:t>
+            </a:r>
+          </a:p>
+        </p:txBody>
+      </p:sp>
+      <p:sp>
+        <p:nvSpPr>
           <p:cNvPr id="22" name="TextBox 21"/>
           <p:cNvSpPr txBox="1"/>
           <p:nvPr/>
         </p:nvSpPr>
         <p:spPr>
           <a:xfrm>
-            <a:off x="533400" y="3904335"/>
-            <a:ext cx="1530096" cy="137160"/>
+            <a:off x="533400" y="3604514"/>
+            <a:ext cx="2536825" cy="574040"/>
           </a:xfrm>
           <a:prstGeom prst="rect">
             <a:avLst/>
@@ -4110,50 +4041,6 @@
           <a:noFill/>
         </p:spPr>
         <p:txBody>
-          <a:bodyPr wrap="none" lIns="0" rIns="0" tIns="0" bIns="0"/>
-          <a:lstStyle/>
-          <a:p>
-            <a:pPr algn="l">
-              <a:lnSpc>
-                <a:spcPct val="100000"/>
-              </a:lnSpc>
-              <a:spcBef>
-                <a:spcPts val="0"/>
-              </a:spcBef>
-              <a:spcAft>
-                <a:spcPts val="0"/>
-              </a:spcAft>
-            </a:pPr>
-            <a:r>
-              <a:rPr sz="720" b="1" i="0" spc="120">
-                <a:solidFill>
-                  <a:srgbClr val="FFFFFF"/>
-                </a:solidFill>
-                <a:latin typeface="Consolas"/>
-                <a:cs typeface="Consolas"/>
-              </a:rPr>
-              <a:t>2 · PURPOSE STATEMENT</a:t>
-            </a:r>
-          </a:p>
-        </p:txBody>
-      </p:sp>
-      <p:sp>
-        <p:nvSpPr>
-          <p:cNvPr id="23" name="TextBox 22"/>
-          <p:cNvSpPr txBox="1"/>
-          <p:nvPr/>
-        </p:nvSpPr>
-        <p:spPr>
-          <a:xfrm>
-            <a:off x="533400" y="4168394"/>
-            <a:ext cx="2536825" cy="830579"/>
-          </a:xfrm>
-          <a:prstGeom prst="rect">
-            <a:avLst/>
-          </a:prstGeom>
-          <a:noFill/>
-        </p:spPr>
-        <p:txBody>
           <a:bodyPr wrap="square" lIns="0" rIns="0" tIns="0" bIns="0"/>
           <a:lstStyle/>
           <a:p>
@@ -4245,71 +4132,25 @@
                 <a:latin typeface="Times New Roman"/>
                 <a:cs typeface="Times New Roman"/>
               </a:rPr>
-              <a:t>judgment they had already formed. The phenomenon under</a:t>
-            </a:r>
-          </a:p>
-          <a:p>
-            <a:pPr algn="l">
-              <a:lnSpc>
-                <a:spcPts val="1010"/>
-              </a:lnSpc>
-              <a:spcBef>
-                <a:spcPts val="0"/>
-              </a:spcBef>
-              <a:spcAft>
-                <a:spcPts val="0"/>
-              </a:spcAft>
-            </a:pPr>
-            <a:r>
-              <a:rPr sz="800" b="0" i="0">
-                <a:solidFill>
-                  <a:srgbClr val="14171C"/>
-                </a:solidFill>
-                <a:latin typeface="Times New Roman"/>
-                <a:cs typeface="Times New Roman"/>
-              </a:rPr>
-              <a:t>study is the experience of encountering machine-generated</a:t>
-            </a:r>
-          </a:p>
-          <a:p>
-            <a:pPr algn="l">
-              <a:lnSpc>
-                <a:spcPts val="1010"/>
-              </a:lnSpc>
-              <a:spcBef>
-                <a:spcPts val="0"/>
-              </a:spcBef>
-              <a:spcAft>
-                <a:spcPts val="0"/>
-              </a:spcAft>
-            </a:pPr>
-            <a:r>
-              <a:rPr sz="800" b="0" i="0">
-                <a:solidFill>
-                  <a:srgbClr val="14171C"/>
-                </a:solidFill>
-                <a:latin typeface="Times New Roman"/>
-                <a:cs typeface="Times New Roman"/>
-              </a:rPr>
-              <a:t>confirmation of a prior professional judgment.</a:t>
-            </a:r>
-          </a:p>
-        </p:txBody>
-      </p:sp>
-      <p:sp>
-        <p:nvSpPr>
-          <p:cNvPr id="24" name="Rounded Rectangle 23"/>
+              <a:t>judgment they had already formed.</a:t>
+            </a:r>
+          </a:p>
+        </p:txBody>
+      </p:sp>
+      <p:sp>
+        <p:nvSpPr>
+          <p:cNvPr id="23" name="Rounded Rectangle 22"/>
           <p:cNvSpPr/>
           <p:nvPr/>
         </p:nvSpPr>
         <p:spPr>
           <a:xfrm>
-            <a:off x="431800" y="4105910"/>
-            <a:ext cx="2727325" cy="934719"/>
+            <a:off x="431800" y="3542029"/>
+            <a:ext cx="2727325" cy="678179"/>
           </a:xfrm>
           <a:prstGeom prst="roundRect">
             <a:avLst>
-              <a:gd name="adj" fmla="val 4076"/>
+              <a:gd name="adj" fmla="val 5617"/>
             </a:avLst>
           </a:prstGeom>
           <a:solidFill>
@@ -4330,14 +4171,14 @@
       </p:sp>
       <p:sp>
         <p:nvSpPr>
-          <p:cNvPr id="25" name="TextBox 24"/>
+          <p:cNvPr id="24" name="TextBox 23"/>
           <p:cNvSpPr txBox="1"/>
           <p:nvPr/>
         </p:nvSpPr>
         <p:spPr>
           <a:xfrm>
-            <a:off x="533400" y="4168394"/>
-            <a:ext cx="2536825" cy="830579"/>
+            <a:off x="533400" y="3604514"/>
+            <a:ext cx="2536825" cy="574040"/>
           </a:xfrm>
           <a:prstGeom prst="rect">
             <a:avLst/>
@@ -4436,60 +4277,14 @@
                 <a:latin typeface="Times New Roman"/>
                 <a:cs typeface="Times New Roman"/>
               </a:rPr>
-              <a:t>judgment they had already formed. The phenomenon under</a:t>
-            </a:r>
-          </a:p>
-          <a:p>
-            <a:pPr algn="l">
-              <a:lnSpc>
-                <a:spcPts val="1010"/>
-              </a:lnSpc>
-              <a:spcBef>
-                <a:spcPts val="0"/>
-              </a:spcBef>
-              <a:spcAft>
-                <a:spcPts val="0"/>
-              </a:spcAft>
-            </a:pPr>
-            <a:r>
-              <a:rPr sz="800" b="0" i="0">
-                <a:solidFill>
-                  <a:srgbClr val="14171C"/>
-                </a:solidFill>
-                <a:latin typeface="Times New Roman"/>
-                <a:cs typeface="Times New Roman"/>
-              </a:rPr>
-              <a:t>study is the experience of encountering machine-generated</a:t>
-            </a:r>
-          </a:p>
-          <a:p>
-            <a:pPr algn="l">
-              <a:lnSpc>
-                <a:spcPts val="1010"/>
-              </a:lnSpc>
-              <a:spcBef>
-                <a:spcPts val="0"/>
-              </a:spcBef>
-              <a:spcAft>
-                <a:spcPts val="0"/>
-              </a:spcAft>
-            </a:pPr>
-            <a:r>
-              <a:rPr sz="800" b="0" i="0">
-                <a:solidFill>
-                  <a:srgbClr val="14171C"/>
-                </a:solidFill>
-                <a:latin typeface="Times New Roman"/>
-                <a:cs typeface="Times New Roman"/>
-              </a:rPr>
-              <a:t>confirmation of a prior professional judgment.</a:t>
-            </a:r>
-          </a:p>
-        </p:txBody>
-      </p:sp>
-      <p:sp>
-        <p:nvSpPr>
-          <p:cNvPr id="26" name="Rounded Rectangle 25"/>
+              <a:t>judgment they had already formed.</a:t>
+            </a:r>
+          </a:p>
+        </p:txBody>
+      </p:sp>
+      <p:sp>
+        <p:nvSpPr>
+          <p:cNvPr id="25" name="Rounded Rectangle 24"/>
           <p:cNvSpPr/>
           <p:nvPr/>
         </p:nvSpPr>
@@ -4521,14 +4316,58 @@
       </p:sp>
       <p:sp>
         <p:nvSpPr>
+          <p:cNvPr id="26" name="TextBox 25"/>
+          <p:cNvSpPr txBox="1"/>
+          <p:nvPr/>
+        </p:nvSpPr>
+        <p:spPr>
+          <a:xfrm>
+            <a:off x="3400425" y="1766925"/>
+            <a:ext cx="2090928" cy="137160"/>
+          </a:xfrm>
+          <a:prstGeom prst="rect">
+            <a:avLst/>
+          </a:prstGeom>
+          <a:noFill/>
+        </p:spPr>
+        <p:txBody>
+          <a:bodyPr wrap="none" lIns="0" rIns="0" tIns="0" bIns="0"/>
+          <a:lstStyle/>
+          <a:p>
+            <a:pPr algn="l">
+              <a:lnSpc>
+                <a:spcPct val="100000"/>
+              </a:lnSpc>
+              <a:spcBef>
+                <a:spcPts val="0"/>
+              </a:spcBef>
+              <a:spcAft>
+                <a:spcPts val="0"/>
+              </a:spcAft>
+            </a:pPr>
+            <a:r>
+              <a:rPr sz="720" b="1" i="0" spc="120">
+                <a:solidFill>
+                  <a:srgbClr val="FFFFFF"/>
+                </a:solidFill>
+                <a:latin typeface="Consolas"/>
+                <a:cs typeface="Consolas"/>
+              </a:rPr>
+              <a:t>3 · PHILOSOPHICAL ASSUMPTIONS</a:t>
+            </a:r>
+          </a:p>
+        </p:txBody>
+      </p:sp>
+      <p:sp>
+        <p:nvSpPr>
           <p:cNvPr id="27" name="TextBox 26"/>
           <p:cNvSpPr txBox="1"/>
           <p:nvPr/>
         </p:nvSpPr>
         <p:spPr>
           <a:xfrm>
-            <a:off x="3400425" y="1766925"/>
-            <a:ext cx="2090928" cy="137160"/>
+            <a:off x="3298825" y="1943735"/>
+            <a:ext cx="2551430" cy="142875"/>
           </a:xfrm>
           <a:prstGeom prst="rect">
             <a:avLst/>
@@ -4551,14 +4390,14 @@
               </a:spcAft>
             </a:pPr>
             <a:r>
-              <a:rPr sz="720" b="1" i="0" spc="120">
-                <a:solidFill>
-                  <a:srgbClr val="FFFFFF"/>
+              <a:rPr sz="750" b="1" i="0" spc="110">
+                <a:solidFill>
+                  <a:srgbClr val="1C6B63"/>
                 </a:solidFill>
                 <a:latin typeface="Consolas"/>
                 <a:cs typeface="Consolas"/>
               </a:rPr>
-              <a:t>3 · PHILOSOPHICAL ASSUMPTIONS</a:t>
+              <a:t>SOCIAL CONSTRUCTIVIST  ·  INDUCTIVE</a:t>
             </a:r>
           </a:p>
         </p:txBody>
@@ -4571,8 +4410,8 @@
         </p:nvSpPr>
         <p:spPr>
           <a:xfrm>
-            <a:off x="3298825" y="1943735"/>
-            <a:ext cx="2551430" cy="142875"/>
+            <a:off x="3298825" y="2110486"/>
+            <a:ext cx="784860" cy="133350"/>
           </a:xfrm>
           <a:prstGeom prst="rect">
             <a:avLst/>
@@ -4595,14 +4434,14 @@
               </a:spcAft>
             </a:pPr>
             <a:r>
-              <a:rPr sz="750" b="1" i="0" spc="110">
-                <a:solidFill>
-                  <a:srgbClr val="1C6B63"/>
+              <a:rPr sz="700" b="1" i="0" spc="100">
+                <a:solidFill>
+                  <a:srgbClr val="8A6A1F"/>
                 </a:solidFill>
                 <a:latin typeface="Consolas"/>
                 <a:cs typeface="Consolas"/>
               </a:rPr>
-              <a:t>SOCIAL CONSTRUCTIVIST  ·  INDUCTIVE</a:t>
+              <a:t>ONTOLOGICAL</a:t>
             </a:r>
           </a:p>
         </p:txBody>
@@ -4615,8 +4454,8 @@
         </p:nvSpPr>
         <p:spPr>
           <a:xfrm>
-            <a:off x="3298825" y="2110486"/>
-            <a:ext cx="784860" cy="133350"/>
+            <a:off x="3298825" y="2221814"/>
+            <a:ext cx="2740025" cy="311658"/>
           </a:xfrm>
           <a:prstGeom prst="rect">
             <a:avLst/>
@@ -4624,6 +4463,73 @@
           <a:noFill/>
         </p:spPr>
         <p:txBody>
+          <a:bodyPr wrap="square" lIns="0" rIns="0" tIns="0" bIns="0"/>
+          <a:lstStyle/>
+          <a:p>
+            <a:pPr algn="l">
+              <a:lnSpc>
+                <a:spcPts val="990"/>
+              </a:lnSpc>
+              <a:spcBef>
+                <a:spcPts val="0"/>
+              </a:spcBef>
+              <a:spcAft>
+                <a:spcPts val="0"/>
+              </a:spcAft>
+            </a:pPr>
+            <a:r>
+              <a:rPr sz="790" b="0" i="0">
+                <a:solidFill>
+                  <a:srgbClr val="3A4048"/>
+                </a:solidFill>
+                <a:latin typeface="Times New Roman"/>
+                <a:cs typeface="Times New Roman"/>
+              </a:rPr>
+              <a:t>Multiple realities. Auditors' accounts of the experience are the data,</a:t>
+            </a:r>
+          </a:p>
+          <a:p>
+            <a:pPr algn="l">
+              <a:lnSpc>
+                <a:spcPts val="990"/>
+              </a:lnSpc>
+              <a:spcBef>
+                <a:spcPts val="0"/>
+              </a:spcBef>
+              <a:spcAft>
+                <a:spcPts val="0"/>
+              </a:spcAft>
+            </a:pPr>
+            <a:r>
+              <a:rPr sz="790" b="0" i="0">
+                <a:solidFill>
+                  <a:srgbClr val="3A4048"/>
+                </a:solidFill>
+                <a:latin typeface="Times New Roman"/>
+                <a:cs typeface="Times New Roman"/>
+              </a:rPr>
+              <a:t>not a proxy for one correct account.</a:t>
+            </a:r>
+          </a:p>
+        </p:txBody>
+      </p:sp>
+      <p:sp>
+        <p:nvSpPr>
+          <p:cNvPr id="30" name="TextBox 29"/>
+          <p:cNvSpPr txBox="1"/>
+          <p:nvPr/>
+        </p:nvSpPr>
+        <p:spPr>
+          <a:xfrm>
+            <a:off x="3298825" y="2527046"/>
+            <a:ext cx="1049020" cy="133350"/>
+          </a:xfrm>
+          <a:prstGeom prst="rect">
+            <a:avLst/>
+          </a:prstGeom>
+          <a:noFill/>
+        </p:spPr>
+        <p:txBody>
           <a:bodyPr wrap="none" lIns="0" rIns="0" tIns="0" bIns="0"/>
           <a:lstStyle/>
           <a:p>
@@ -4646,20 +4552,20 @@
                 <a:latin typeface="Consolas"/>
                 <a:cs typeface="Consolas"/>
               </a:rPr>
-              <a:t>ONTOLOGICAL</a:t>
-            </a:r>
-          </a:p>
-        </p:txBody>
-      </p:sp>
-      <p:sp>
-        <p:nvSpPr>
-          <p:cNvPr id="30" name="TextBox 29"/>
+              <a:t>EPISTEMOLOGICAL</a:t>
+            </a:r>
+          </a:p>
+        </p:txBody>
+      </p:sp>
+      <p:sp>
+        <p:nvSpPr>
+          <p:cNvPr id="31" name="TextBox 30"/>
           <p:cNvSpPr txBox="1"/>
           <p:nvPr/>
         </p:nvSpPr>
         <p:spPr>
           <a:xfrm>
-            <a:off x="3298825" y="2221814"/>
+            <a:off x="3298825" y="2638374"/>
             <a:ext cx="2740025" cy="311658"/>
           </a:xfrm>
           <a:prstGeom prst="rect">
@@ -4690,7 +4596,7 @@
                 <a:latin typeface="Times New Roman"/>
                 <a:cs typeface="Times New Roman"/>
               </a:rPr>
-              <a:t>Multiple realities. Auditors' accounts of the experience are the data,</a:t>
+              <a:t>Knowledge comes from first-person accounts in semi-structured</a:t>
             </a:r>
           </a:p>
           <a:p>
@@ -4713,21 +4619,21 @@
                 <a:latin typeface="Times New Roman"/>
                 <a:cs typeface="Times New Roman"/>
               </a:rPr>
-              <a:t>not a proxy for one correct account.</a:t>
-            </a:r>
-          </a:p>
-        </p:txBody>
-      </p:sp>
-      <p:sp>
-        <p:nvSpPr>
-          <p:cNvPr id="31" name="TextBox 30"/>
+              <a:t>interviews.</a:t>
+            </a:r>
+          </a:p>
+        </p:txBody>
+      </p:sp>
+      <p:sp>
+        <p:nvSpPr>
+          <p:cNvPr id="32" name="TextBox 31"/>
           <p:cNvSpPr txBox="1"/>
           <p:nvPr/>
         </p:nvSpPr>
         <p:spPr>
           <a:xfrm>
-            <a:off x="3298825" y="2527046"/>
-            <a:ext cx="1049020" cy="133350"/>
+            <a:off x="3298825" y="2943606"/>
+            <a:ext cx="784860" cy="133350"/>
           </a:xfrm>
           <a:prstGeom prst="rect">
             <a:avLst/>
@@ -4757,21 +4663,21 @@
                 <a:latin typeface="Consolas"/>
                 <a:cs typeface="Consolas"/>
               </a:rPr>
-              <a:t>EPISTEMOLOGICAL</a:t>
-            </a:r>
-          </a:p>
-        </p:txBody>
-      </p:sp>
-      <p:sp>
-        <p:nvSpPr>
-          <p:cNvPr id="32" name="TextBox 31"/>
+              <a:t>AXIOLOGICAL</a:t>
+            </a:r>
+          </a:p>
+        </p:txBody>
+      </p:sp>
+      <p:sp>
+        <p:nvSpPr>
+          <p:cNvPr id="33" name="TextBox 32"/>
           <p:cNvSpPr txBox="1"/>
           <p:nvPr/>
         </p:nvSpPr>
         <p:spPr>
           <a:xfrm>
-            <a:off x="3298825" y="2638374"/>
-            <a:ext cx="2740025" cy="311658"/>
+            <a:off x="3298825" y="3054934"/>
+            <a:ext cx="2740025" cy="437388"/>
           </a:xfrm>
           <a:prstGeom prst="rect">
             <a:avLst/>
@@ -4801,7 +4707,7 @@
                 <a:latin typeface="Times New Roman"/>
                 <a:cs typeface="Times New Roman"/>
               </a:rPr>
-              <a:t>First-person accounts, gathered in semi-structured audio-recorded</a:t>
+              <a:t>The researcher is a career auditor who built an AI review tool:</a:t>
             </a:r>
           </a:p>
           <a:p>
@@ -4824,21 +4730,44 @@
                 <a:latin typeface="Times New Roman"/>
                 <a:cs typeface="Times New Roman"/>
               </a:rPr>
-              <a:t>interviews and read in the participant's own words before coding.</a:t>
-            </a:r>
-          </a:p>
-        </p:txBody>
-      </p:sp>
-      <p:sp>
-        <p:nvSpPr>
-          <p:cNvPr id="33" name="TextBox 32"/>
+              <a:t>insider access and insider bias, managed through reflexive memos</a:t>
+            </a:r>
+          </a:p>
+          <a:p>
+            <a:pPr algn="l">
+              <a:lnSpc>
+                <a:spcPts val="990"/>
+              </a:lnSpc>
+              <a:spcBef>
+                <a:spcPts val="0"/>
+              </a:spcBef>
+              <a:spcAft>
+                <a:spcPts val="0"/>
+              </a:spcAft>
+            </a:pPr>
+            <a:r>
+              <a:rPr sz="790" b="0" i="0">
+                <a:solidFill>
+                  <a:srgbClr val="3A4048"/>
+                </a:solidFill>
+                <a:latin typeface="Times New Roman"/>
+                <a:cs typeface="Times New Roman"/>
+              </a:rPr>
+              <a:t>and a confirmation hazard log.</a:t>
+            </a:r>
+          </a:p>
+        </p:txBody>
+      </p:sp>
+      <p:sp>
+        <p:nvSpPr>
+          <p:cNvPr id="34" name="TextBox 33"/>
           <p:cNvSpPr txBox="1"/>
           <p:nvPr/>
         </p:nvSpPr>
         <p:spPr>
           <a:xfrm>
-            <a:off x="3298825" y="2943606"/>
-            <a:ext cx="784860" cy="133350"/>
+            <a:off x="3298825" y="3485896"/>
+            <a:ext cx="982980" cy="133350"/>
           </a:xfrm>
           <a:prstGeom prst="rect">
             <a:avLst/>
@@ -4868,21 +4797,21 @@
                 <a:latin typeface="Consolas"/>
                 <a:cs typeface="Consolas"/>
               </a:rPr>
-              <a:t>AXIOLOGICAL</a:t>
-            </a:r>
-          </a:p>
-        </p:txBody>
-      </p:sp>
-      <p:sp>
-        <p:nvSpPr>
-          <p:cNvPr id="34" name="TextBox 33"/>
+              <a:t>METHODOLOGICAL</a:t>
+            </a:r>
+          </a:p>
+        </p:txBody>
+      </p:sp>
+      <p:sp>
+        <p:nvSpPr>
+          <p:cNvPr id="35" name="TextBox 34"/>
           <p:cNvSpPr txBox="1"/>
           <p:nvPr/>
         </p:nvSpPr>
         <p:spPr>
           <a:xfrm>
-            <a:off x="3298825" y="3054934"/>
-            <a:ext cx="2740025" cy="563118"/>
+            <a:off x="3298825" y="3597224"/>
+            <a:ext cx="2740025" cy="185928"/>
           </a:xfrm>
           <a:prstGeom prst="rect">
             <a:avLst/>
@@ -4912,200 +4841,20 @@
                 <a:latin typeface="Times New Roman"/>
                 <a:cs typeface="Times New Roman"/>
               </a:rPr>
-              <a:t>A career in bank examination, regulatory reporting and internal</a:t>
-            </a:r>
-          </a:p>
-          <a:p>
-            <a:pPr algn="l">
-              <a:lnSpc>
-                <a:spcPts val="990"/>
-              </a:lnSpc>
-              <a:spcBef>
-                <a:spcPts val="0"/>
-              </a:spcBef>
-              <a:spcAft>
-                <a:spcPts val="0"/>
-              </a:spcAft>
-            </a:pPr>
-            <a:r>
-              <a:rPr sz="790" b="0" i="0">
-                <a:solidFill>
-                  <a:srgbClr val="3A4048"/>
-                </a:solidFill>
-                <a:latin typeface="Times New Roman"/>
-                <a:cs typeface="Times New Roman"/>
-              </a:rPr>
-              <a:t>audit, including building an AI review tool. Insider access and</a:t>
-            </a:r>
-          </a:p>
-          <a:p>
-            <a:pPr algn="l">
-              <a:lnSpc>
-                <a:spcPts val="990"/>
-              </a:lnSpc>
-              <a:spcBef>
-                <a:spcPts val="0"/>
-              </a:spcBef>
-              <a:spcAft>
-                <a:spcPts val="0"/>
-              </a:spcAft>
-            </a:pPr>
-            <a:r>
-              <a:rPr sz="790" b="0" i="0">
-                <a:solidFill>
-                  <a:srgbClr val="3A4048"/>
-                </a:solidFill>
-                <a:latin typeface="Times New Roman"/>
-                <a:cs typeface="Times New Roman"/>
-              </a:rPr>
-              <a:t>insider bias at once. Every occasion of feeling confirmed is entered</a:t>
-            </a:r>
-          </a:p>
-          <a:p>
-            <a:pPr algn="l">
-              <a:lnSpc>
-                <a:spcPts val="990"/>
-              </a:lnSpc>
-              <a:spcBef>
-                <a:spcPts val="0"/>
-              </a:spcBef>
-              <a:spcAft>
-                <a:spcPts val="0"/>
-              </a:spcAft>
-            </a:pPr>
-            <a:r>
-              <a:rPr sz="790" b="0" i="0">
-                <a:solidFill>
-                  <a:srgbClr val="3A4048"/>
-                </a:solidFill>
-                <a:latin typeface="Times New Roman"/>
-                <a:cs typeface="Times New Roman"/>
-              </a:rPr>
-              <a:t>in a confirmation hazard log.</a:t>
-            </a:r>
-          </a:p>
-        </p:txBody>
-      </p:sp>
-      <p:sp>
-        <p:nvSpPr>
-          <p:cNvPr id="35" name="TextBox 34"/>
-          <p:cNvSpPr txBox="1"/>
-          <p:nvPr/>
-        </p:nvSpPr>
-        <p:spPr>
-          <a:xfrm>
-            <a:off x="3298825" y="3611626"/>
-            <a:ext cx="982980" cy="133350"/>
-          </a:xfrm>
-          <a:prstGeom prst="rect">
-            <a:avLst/>
-          </a:prstGeom>
-          <a:noFill/>
-        </p:spPr>
-        <p:txBody>
-          <a:bodyPr wrap="none" lIns="0" rIns="0" tIns="0" bIns="0"/>
-          <a:lstStyle/>
-          <a:p>
-            <a:pPr algn="l">
-              <a:lnSpc>
-                <a:spcPct val="100000"/>
-              </a:lnSpc>
-              <a:spcBef>
-                <a:spcPts val="0"/>
-              </a:spcBef>
-              <a:spcAft>
-                <a:spcPts val="0"/>
-              </a:spcAft>
-            </a:pPr>
-            <a:r>
-              <a:rPr sz="700" b="1" i="0" spc="100">
-                <a:solidFill>
-                  <a:srgbClr val="8A6A1F"/>
-                </a:solidFill>
-                <a:latin typeface="Consolas"/>
-                <a:cs typeface="Consolas"/>
-              </a:rPr>
-              <a:t>METHODOLOGICAL</a:t>
-            </a:r>
-          </a:p>
-        </p:txBody>
-      </p:sp>
-      <p:sp>
-        <p:nvSpPr>
-          <p:cNvPr id="36" name="TextBox 35"/>
-          <p:cNvSpPr txBox="1"/>
-          <p:nvPr/>
-        </p:nvSpPr>
-        <p:spPr>
-          <a:xfrm>
-            <a:off x="3298825" y="3722954"/>
-            <a:ext cx="2740025" cy="311658"/>
-          </a:xfrm>
-          <a:prstGeom prst="rect">
-            <a:avLst/>
-          </a:prstGeom>
-          <a:noFill/>
-        </p:spPr>
-        <p:txBody>
-          <a:bodyPr wrap="square" lIns="0" rIns="0" tIns="0" bIns="0"/>
-          <a:lstStyle/>
-          <a:p>
-            <a:pPr algn="l">
-              <a:lnSpc>
-                <a:spcPts val="990"/>
-              </a:lnSpc>
-              <a:spcBef>
-                <a:spcPts val="0"/>
-              </a:spcBef>
-              <a:spcAft>
-                <a:spcPts val="0"/>
-              </a:spcAft>
-            </a:pPr>
-            <a:r>
-              <a:rPr sz="790" b="0" i="0">
-                <a:solidFill>
-                  <a:srgbClr val="3A4048"/>
-                </a:solidFill>
-                <a:latin typeface="Times New Roman"/>
-                <a:cs typeface="Times New Roman"/>
-              </a:rPr>
-              <a:t>Phenomenology. A phenomenon shared across individuals at</a:t>
-            </a:r>
-          </a:p>
-          <a:p>
-            <a:pPr algn="l">
-              <a:lnSpc>
-                <a:spcPts val="990"/>
-              </a:lnSpc>
-              <a:spcBef>
-                <a:spcPts val="0"/>
-              </a:spcBef>
-              <a:spcAft>
-                <a:spcPts val="0"/>
-              </a:spcAft>
-            </a:pPr>
-            <a:r>
-              <a:rPr sz="790" b="0" i="0">
-                <a:solidFill>
-                  <a:srgbClr val="3A4048"/>
-                </a:solidFill>
-                <a:latin typeface="Times New Roman"/>
-                <a:cs typeface="Times New Roman"/>
-              </a:rPr>
-              <a:t>different firms, with no single site to enter.</a:t>
-            </a:r>
-          </a:p>
-        </p:txBody>
-      </p:sp>
-      <p:sp>
-        <p:nvSpPr>
-          <p:cNvPr id="37" name="Rounded Rectangle 36"/>
+              <a:t>Inductive phenomenology across individuals at different firms.</a:t>
+            </a:r>
+          </a:p>
+        </p:txBody>
+      </p:sp>
+      <p:sp>
+        <p:nvSpPr>
+          <p:cNvPr id="36" name="Rounded Rectangle 35"/>
           <p:cNvSpPr/>
           <p:nvPr/>
         </p:nvSpPr>
         <p:spPr>
           <a:xfrm>
-            <a:off x="3298825" y="4064000"/>
+            <a:off x="3298825" y="3812540"/>
             <a:ext cx="2727325" cy="177800"/>
           </a:xfrm>
           <a:prstGeom prst="roundRect">
@@ -5131,14 +4880,58 @@
       </p:sp>
       <p:sp>
         <p:nvSpPr>
+          <p:cNvPr id="37" name="TextBox 36"/>
+          <p:cNvSpPr txBox="1"/>
+          <p:nvPr/>
+        </p:nvSpPr>
+        <p:spPr>
+          <a:xfrm>
+            <a:off x="3400425" y="3826865"/>
+            <a:ext cx="1810512" cy="137160"/>
+          </a:xfrm>
+          <a:prstGeom prst="rect">
+            <a:avLst/>
+          </a:prstGeom>
+          <a:noFill/>
+        </p:spPr>
+        <p:txBody>
+          <a:bodyPr wrap="none" lIns="0" rIns="0" tIns="0" bIns="0"/>
+          <a:lstStyle/>
+          <a:p>
+            <a:pPr algn="l">
+              <a:lnSpc>
+                <a:spcPct val="100000"/>
+              </a:lnSpc>
+              <a:spcBef>
+                <a:spcPts val="0"/>
+              </a:spcBef>
+              <a:spcAft>
+                <a:spcPts val="0"/>
+              </a:spcAft>
+            </a:pPr>
+            <a:r>
+              <a:rPr sz="720" b="1" i="0" spc="120">
+                <a:solidFill>
+                  <a:srgbClr val="FFFFFF"/>
+                </a:solidFill>
+                <a:latin typeface="Consolas"/>
+                <a:cs typeface="Consolas"/>
+              </a:rPr>
+              <a:t>4 · METHODOLOGY: APPROACH</a:t>
+            </a:r>
+          </a:p>
+        </p:txBody>
+      </p:sp>
+      <p:sp>
+        <p:nvSpPr>
           <p:cNvPr id="38" name="TextBox 37"/>
           <p:cNvSpPr txBox="1"/>
           <p:nvPr/>
         </p:nvSpPr>
         <p:spPr>
           <a:xfrm>
-            <a:off x="3400425" y="4078325"/>
-            <a:ext cx="1810512" cy="137160"/>
+            <a:off x="3298825" y="4027424"/>
+            <a:ext cx="2740025" cy="445769"/>
           </a:xfrm>
           <a:prstGeom prst="rect">
             <a:avLst/>
@@ -5146,50 +4939,6 @@
           <a:noFill/>
         </p:spPr>
         <p:txBody>
-          <a:bodyPr wrap="none" lIns="0" rIns="0" tIns="0" bIns="0"/>
-          <a:lstStyle/>
-          <a:p>
-            <a:pPr algn="l">
-              <a:lnSpc>
-                <a:spcPct val="100000"/>
-              </a:lnSpc>
-              <a:spcBef>
-                <a:spcPts val="0"/>
-              </a:spcBef>
-              <a:spcAft>
-                <a:spcPts val="0"/>
-              </a:spcAft>
-            </a:pPr>
-            <a:r>
-              <a:rPr sz="720" b="1" i="0" spc="120">
-                <a:solidFill>
-                  <a:srgbClr val="FFFFFF"/>
-                </a:solidFill>
-                <a:latin typeface="Consolas"/>
-                <a:cs typeface="Consolas"/>
-              </a:rPr>
-              <a:t>4 · METHODOLOGY: APPROACH</a:t>
-            </a:r>
-          </a:p>
-        </p:txBody>
-      </p:sp>
-      <p:sp>
-        <p:nvSpPr>
-          <p:cNvPr id="39" name="TextBox 38"/>
-          <p:cNvSpPr txBox="1"/>
-          <p:nvPr/>
-        </p:nvSpPr>
-        <p:spPr>
-          <a:xfrm>
-            <a:off x="3298825" y="4278884"/>
-            <a:ext cx="2740025" cy="445769"/>
-          </a:xfrm>
-          <a:prstGeom prst="rect">
-            <a:avLst/>
-          </a:prstGeom>
-          <a:noFill/>
-        </p:spPr>
-        <p:txBody>
           <a:bodyPr wrap="square" lIns="0" rIns="0" tIns="0" bIns="0"/>
           <a:lstStyle/>
           <a:p>
@@ -5265,13 +5014,13 @@
       </p:sp>
       <p:sp>
         <p:nvSpPr>
-          <p:cNvPr id="40" name="Rounded Rectangle 39"/>
+          <p:cNvPr id="39" name="Rounded Rectangle 38"/>
           <p:cNvSpPr/>
           <p:nvPr/>
         </p:nvSpPr>
         <p:spPr>
           <a:xfrm>
-            <a:off x="3311525" y="4779010"/>
+            <a:off x="3311525" y="4527550"/>
             <a:ext cx="40640" cy="40640"/>
           </a:xfrm>
           <a:prstGeom prst="roundRect">
@@ -5297,13 +5046,13 @@
       </p:sp>
       <p:sp>
         <p:nvSpPr>
-          <p:cNvPr id="41" name="TextBox 40"/>
+          <p:cNvPr id="40" name="TextBox 39"/>
           <p:cNvSpPr txBox="1"/>
           <p:nvPr/>
         </p:nvSpPr>
         <p:spPr>
           <a:xfrm>
-            <a:off x="3413125" y="4714494"/>
+            <a:off x="3413125" y="4463034"/>
             <a:ext cx="2625725" cy="317500"/>
           </a:xfrm>
           <a:prstGeom prst="rect">
@@ -5334,7 +5083,7 @@
                 <a:latin typeface="Times New Roman"/>
                 <a:cs typeface="Times New Roman"/>
               </a:rPr>
-              <a:t>Case study needs a bounded site; this phenomenon crosses</a:t>
+              <a:t>Not case study: the phenomenon crosses firms, with no</a:t>
             </a:r>
           </a:p>
           <a:p>
@@ -5357,20 +5106,20 @@
                 <a:latin typeface="Times New Roman"/>
                 <a:cs typeface="Times New Roman"/>
               </a:rPr>
-              <a:t>firms</a:t>
-            </a:r>
-          </a:p>
-        </p:txBody>
-      </p:sp>
-      <p:sp>
-        <p:nvSpPr>
-          <p:cNvPr id="42" name="Rounded Rectangle 41"/>
+              <a:t>bounded site</a:t>
+            </a:r>
+          </a:p>
+        </p:txBody>
+      </p:sp>
+      <p:sp>
+        <p:nvSpPr>
+          <p:cNvPr id="41" name="Rounded Rectangle 40"/>
           <p:cNvSpPr/>
           <p:nvPr/>
         </p:nvSpPr>
         <p:spPr>
           <a:xfrm>
-            <a:off x="3311525" y="5073650"/>
+            <a:off x="3311525" y="4822190"/>
             <a:ext cx="40640" cy="40640"/>
           </a:xfrm>
           <a:prstGeom prst="roundRect">
@@ -5396,13 +5145,13 @@
       </p:sp>
       <p:sp>
         <p:nvSpPr>
-          <p:cNvPr id="43" name="TextBox 42"/>
+          <p:cNvPr id="42" name="TextBox 41"/>
           <p:cNvSpPr txBox="1"/>
           <p:nvPr/>
         </p:nvSpPr>
         <p:spPr>
           <a:xfrm>
-            <a:off x="3413125" y="5009134"/>
+            <a:off x="3413125" y="4757674"/>
             <a:ext cx="2625725" cy="317500"/>
           </a:xfrm>
           <a:prstGeom prst="rect">
@@ -5433,7 +5182,7 @@
                 <a:latin typeface="Times New Roman"/>
                 <a:cs typeface="Times New Roman"/>
               </a:rPr>
-              <a:t>Grounded theory studies process; this study asks about</a:t>
+              <a:t>Not grounded theory: the question is about experience, not</a:t>
             </a:r>
           </a:p>
           <a:p>
@@ -5456,20 +5205,1308 @@
                 <a:latin typeface="Times New Roman"/>
                 <a:cs typeface="Times New Roman"/>
               </a:rPr>
-              <a:t>experience</a:t>
-            </a:r>
-          </a:p>
-        </p:txBody>
-      </p:sp>
-      <p:sp>
-        <p:nvSpPr>
-          <p:cNvPr id="44" name="Rounded Rectangle 43"/>
+              <a:t>process</a:t>
+            </a:r>
+          </a:p>
+        </p:txBody>
+      </p:sp>
+      <p:sp>
+        <p:nvSpPr>
+          <p:cNvPr id="43" name="Rounded Rectangle 42"/>
           <p:cNvSpPr/>
           <p:nvPr/>
         </p:nvSpPr>
         <p:spPr>
           <a:xfrm>
-            <a:off x="3311525" y="5368290"/>
+            <a:off x="6165850" y="1752600"/>
+            <a:ext cx="2727325" cy="177800"/>
+          </a:xfrm>
+          <a:prstGeom prst="roundRect">
+            <a:avLst>
+              <a:gd name="adj" fmla="val 14285"/>
+            </a:avLst>
+          </a:prstGeom>
+          <a:solidFill>
+            <a:srgbClr val="081E3F"/>
+          </a:solidFill>
+          <a:ln>
+            <a:noFill/>
+          </a:ln>
+          <a:effectLst/>
+        </p:spPr>
+        <p:txBody>
+          <a:bodyPr rtlCol="0" anchor="ctr"/>
+          <a:lstStyle/>
+          <a:p>
+            <a:pPr algn="ctr"/>
+          </a:p>
+        </p:txBody>
+      </p:sp>
+      <p:sp>
+        <p:nvSpPr>
+          <p:cNvPr id="44" name="TextBox 43"/>
+          <p:cNvSpPr txBox="1"/>
+          <p:nvPr/>
+        </p:nvSpPr>
+        <p:spPr>
+          <a:xfrm>
+            <a:off x="6267450" y="1766925"/>
+            <a:ext cx="2301240" cy="137160"/>
+          </a:xfrm>
+          <a:prstGeom prst="rect">
+            <a:avLst/>
+          </a:prstGeom>
+          <a:noFill/>
+        </p:spPr>
+        <p:txBody>
+          <a:bodyPr wrap="none" lIns="0" rIns="0" tIns="0" bIns="0"/>
+          <a:lstStyle/>
+          <a:p>
+            <a:pPr algn="l">
+              <a:lnSpc>
+                <a:spcPct val="100000"/>
+              </a:lnSpc>
+              <a:spcBef>
+                <a:spcPts val="0"/>
+              </a:spcBef>
+              <a:spcAft>
+                <a:spcPts val="0"/>
+              </a:spcAft>
+            </a:pPr>
+            <a:r>
+              <a:rPr sz="720" b="1" i="0" spc="120">
+                <a:solidFill>
+                  <a:srgbClr val="FFFFFF"/>
+                </a:solidFill>
+                <a:latin typeface="Consolas"/>
+                <a:cs typeface="Consolas"/>
+              </a:rPr>
+              <a:t>5 · METHODOLOGY: DATA COLLECTION</a:t>
+            </a:r>
+          </a:p>
+        </p:txBody>
+      </p:sp>
+      <p:sp>
+        <p:nvSpPr>
+          <p:cNvPr id="45" name="TextBox 44"/>
+          <p:cNvSpPr txBox="1"/>
+          <p:nvPr/>
+        </p:nvSpPr>
+        <p:spPr>
+          <a:xfrm>
+            <a:off x="6165850" y="1944725"/>
+            <a:ext cx="2019808" cy="137160"/>
+          </a:xfrm>
+          <a:prstGeom prst="rect">
+            <a:avLst/>
+          </a:prstGeom>
+          <a:noFill/>
+        </p:spPr>
+        <p:txBody>
+          <a:bodyPr wrap="none" lIns="0" rIns="0" tIns="0" bIns="0"/>
+          <a:lstStyle/>
+          <a:p>
+            <a:pPr algn="l">
+              <a:lnSpc>
+                <a:spcPct val="100000"/>
+              </a:lnSpc>
+              <a:spcBef>
+                <a:spcPts val="0"/>
+              </a:spcBef>
+              <a:spcAft>
+                <a:spcPts val="0"/>
+              </a:spcAft>
+            </a:pPr>
+            <a:r>
+              <a:rPr sz="720" b="1" i="0" spc="100">
+                <a:solidFill>
+                  <a:srgbClr val="8C3A1B"/>
+                </a:solidFill>
+                <a:latin typeface="Consolas"/>
+                <a:cs typeface="Consolas"/>
+              </a:rPr>
+              <a:t>ELIGIBILITY IS THE PHENOMENON</a:t>
+            </a:r>
+          </a:p>
+        </p:txBody>
+      </p:sp>
+      <p:sp>
+        <p:nvSpPr>
+          <p:cNvPr id="46" name="TextBox 45"/>
+          <p:cNvSpPr txBox="1"/>
+          <p:nvPr/>
+        </p:nvSpPr>
+        <p:spPr>
+          <a:xfrm>
+            <a:off x="6165850" y="2094483"/>
+            <a:ext cx="2740025" cy="445769"/>
+          </a:xfrm>
+          <a:prstGeom prst="rect">
+            <a:avLst/>
+          </a:prstGeom>
+          <a:noFill/>
+        </p:spPr>
+        <p:txBody>
+          <a:bodyPr wrap="square" lIns="0" rIns="0" tIns="0" bIns="0"/>
+          <a:lstStyle/>
+          <a:p>
+            <a:pPr algn="l">
+              <a:lnSpc>
+                <a:spcPts val="1010"/>
+              </a:lnSpc>
+              <a:spcBef>
+                <a:spcPts val="0"/>
+              </a:spcBef>
+              <a:spcAft>
+                <a:spcPts val="0"/>
+              </a:spcAft>
+            </a:pPr>
+            <a:r>
+              <a:rPr sz="800" b="0" i="0">
+                <a:solidFill>
+                  <a:srgbClr val="14171C"/>
+                </a:solidFill>
+                <a:latin typeface="Times New Roman"/>
+                <a:cs typeface="Times New Roman"/>
+              </a:rPr>
+              <a:t>Participants can recall a specific time AI output agreed with a</a:t>
+            </a:r>
+          </a:p>
+          <a:p>
+            <a:pPr algn="l">
+              <a:lnSpc>
+                <a:spcPts val="1010"/>
+              </a:lnSpc>
+              <a:spcBef>
+                <a:spcPts val="0"/>
+              </a:spcBef>
+              <a:spcAft>
+                <a:spcPts val="0"/>
+              </a:spcAft>
+            </a:pPr>
+            <a:r>
+              <a:rPr sz="800" b="0" i="0">
+                <a:solidFill>
+                  <a:srgbClr val="14171C"/>
+                </a:solidFill>
+                <a:latin typeface="Times New Roman"/>
+                <a:cs typeface="Times New Roman"/>
+              </a:rPr>
+              <a:t>judgment they had already formed. They do not need to have</a:t>
+            </a:r>
+          </a:p>
+          <a:p>
+            <a:pPr algn="l">
+              <a:lnSpc>
+                <a:spcPts val="1010"/>
+              </a:lnSpc>
+              <a:spcBef>
+                <a:spcPts val="0"/>
+              </a:spcBef>
+              <a:spcAft>
+                <a:spcPts val="0"/>
+              </a:spcAft>
+            </a:pPr>
+            <a:r>
+              <a:rPr sz="800" b="0" i="0">
+                <a:solidFill>
+                  <a:srgbClr val="14171C"/>
+                </a:solidFill>
+                <a:latin typeface="Times New Roman"/>
+                <a:cs typeface="Times New Roman"/>
+              </a:rPr>
+              <a:t>interpreted it in any particular way.</a:t>
+            </a:r>
+          </a:p>
+        </p:txBody>
+      </p:sp>
+      <p:sp>
+        <p:nvSpPr>
+          <p:cNvPr id="47" name="Rounded Rectangle 46"/>
+          <p:cNvSpPr/>
+          <p:nvPr/>
+        </p:nvSpPr>
+        <p:spPr>
+          <a:xfrm>
+            <a:off x="6178550" y="2594610"/>
+            <a:ext cx="40640" cy="40640"/>
+          </a:xfrm>
+          <a:prstGeom prst="roundRect">
+            <a:avLst>
+              <a:gd name="adj" fmla="val 50000"/>
+            </a:avLst>
+          </a:prstGeom>
+          <a:solidFill>
+            <a:srgbClr val="1C6B63"/>
+          </a:solidFill>
+          <a:ln>
+            <a:noFill/>
+          </a:ln>
+          <a:effectLst/>
+        </p:spPr>
+        <p:txBody>
+          <a:bodyPr rtlCol="0" anchor="ctr"/>
+          <a:lstStyle/>
+          <a:p>
+            <a:pPr algn="ctr"/>
+          </a:p>
+        </p:txBody>
+      </p:sp>
+      <p:sp>
+        <p:nvSpPr>
+          <p:cNvPr id="48" name="TextBox 47"/>
+          <p:cNvSpPr txBox="1"/>
+          <p:nvPr/>
+        </p:nvSpPr>
+        <p:spPr>
+          <a:xfrm>
+            <a:off x="6280150" y="2530094"/>
+            <a:ext cx="2625725" cy="317500"/>
+          </a:xfrm>
+          <a:prstGeom prst="rect">
+            <a:avLst/>
+          </a:prstGeom>
+          <a:noFill/>
+        </p:spPr>
+        <p:txBody>
+          <a:bodyPr wrap="square" lIns="0" rIns="0" tIns="0" bIns="0"/>
+          <a:lstStyle/>
+          <a:p>
+            <a:pPr algn="l">
+              <a:lnSpc>
+                <a:spcPts val="1010"/>
+              </a:lnSpc>
+              <a:spcBef>
+                <a:spcPts val="0"/>
+              </a:spcBef>
+              <a:spcAft>
+                <a:spcPts val="0"/>
+              </a:spcAft>
+            </a:pPr>
+            <a:r>
+              <a:rPr sz="800" b="0" i="0">
+                <a:solidFill>
+                  <a:srgbClr val="3A4048"/>
+                </a:solidFill>
+                <a:latin typeface="Times New Roman"/>
+                <a:cs typeface="Times New Roman"/>
+              </a:rPr>
+              <a:t>Five or more years in audit or risk assurance, recurring</a:t>
+            </a:r>
+          </a:p>
+          <a:p>
+            <a:pPr algn="l">
+              <a:lnSpc>
+                <a:spcPts val="1010"/>
+              </a:lnSpc>
+              <a:spcBef>
+                <a:spcPts val="0"/>
+              </a:spcBef>
+              <a:spcAft>
+                <a:spcPts val="0"/>
+              </a:spcAft>
+            </a:pPr>
+            <a:r>
+              <a:rPr sz="800" b="0" i="0">
+                <a:solidFill>
+                  <a:srgbClr val="3A4048"/>
+                </a:solidFill>
+                <a:latin typeface="Times New Roman"/>
+                <a:cs typeface="Times New Roman"/>
+              </a:rPr>
+              <a:t>engagements</a:t>
+            </a:r>
+          </a:p>
+        </p:txBody>
+      </p:sp>
+      <p:sp>
+        <p:nvSpPr>
+          <p:cNvPr id="49" name="Rounded Rectangle 48"/>
+          <p:cNvSpPr/>
+          <p:nvPr/>
+        </p:nvSpPr>
+        <p:spPr>
+          <a:xfrm>
+            <a:off x="6178550" y="2889250"/>
+            <a:ext cx="40640" cy="40640"/>
+          </a:xfrm>
+          <a:prstGeom prst="roundRect">
+            <a:avLst>
+              <a:gd name="adj" fmla="val 50000"/>
+            </a:avLst>
+          </a:prstGeom>
+          <a:solidFill>
+            <a:srgbClr val="1C6B63"/>
+          </a:solidFill>
+          <a:ln>
+            <a:noFill/>
+          </a:ln>
+          <a:effectLst/>
+        </p:spPr>
+        <p:txBody>
+          <a:bodyPr rtlCol="0" anchor="ctr"/>
+          <a:lstStyle/>
+          <a:p>
+            <a:pPr algn="ctr"/>
+          </a:p>
+        </p:txBody>
+      </p:sp>
+      <p:sp>
+        <p:nvSpPr>
+          <p:cNvPr id="50" name="TextBox 49"/>
+          <p:cNvSpPr txBox="1"/>
+          <p:nvPr/>
+        </p:nvSpPr>
+        <p:spPr>
+          <a:xfrm>
+            <a:off x="6280150" y="2824734"/>
+            <a:ext cx="2625725" cy="317500"/>
+          </a:xfrm>
+          <a:prstGeom prst="rect">
+            <a:avLst/>
+          </a:prstGeom>
+          <a:noFill/>
+        </p:spPr>
+        <p:txBody>
+          <a:bodyPr wrap="square" lIns="0" rIns="0" tIns="0" bIns="0"/>
+          <a:lstStyle/>
+          <a:p>
+            <a:pPr algn="l">
+              <a:lnSpc>
+                <a:spcPts val="1010"/>
+              </a:lnSpc>
+              <a:spcBef>
+                <a:spcPts val="0"/>
+              </a:spcBef>
+              <a:spcAft>
+                <a:spcPts val="0"/>
+              </a:spcAft>
+            </a:pPr>
+            <a:r>
+              <a:rPr sz="800" b="0" i="0">
+                <a:solidFill>
+                  <a:srgbClr val="3A4048"/>
+                </a:solidFill>
+                <a:latin typeface="Times New Roman"/>
+                <a:cs typeface="Times New Roman"/>
+              </a:rPr>
+              <a:t>Criterion sampling plus referrals, all screened the same way; a</a:t>
+            </a:r>
+          </a:p>
+          <a:p>
+            <a:pPr algn="l">
+              <a:lnSpc>
+                <a:spcPts val="1010"/>
+              </a:lnSpc>
+              <a:spcBef>
+                <a:spcPts val="0"/>
+              </a:spcBef>
+              <a:spcAft>
+                <a:spcPts val="0"/>
+              </a:spcAft>
+            </a:pPr>
+            <a:r>
+              <a:rPr sz="800" b="0" i="0">
+                <a:solidFill>
+                  <a:srgbClr val="3A4048"/>
+                </a:solidFill>
+                <a:latin typeface="Times New Roman"/>
+                <a:cs typeface="Times New Roman"/>
+              </a:rPr>
+              <a:t>short screening question tested first</a:t>
+            </a:r>
+          </a:p>
+        </p:txBody>
+      </p:sp>
+      <p:sp>
+        <p:nvSpPr>
+          <p:cNvPr id="51" name="Rounded Rectangle 50"/>
+          <p:cNvSpPr/>
+          <p:nvPr/>
+        </p:nvSpPr>
+        <p:spPr>
+          <a:xfrm>
+            <a:off x="6178550" y="3183890"/>
+            <a:ext cx="40640" cy="40640"/>
+          </a:xfrm>
+          <a:prstGeom prst="roundRect">
+            <a:avLst>
+              <a:gd name="adj" fmla="val 50000"/>
+            </a:avLst>
+          </a:prstGeom>
+          <a:solidFill>
+            <a:srgbClr val="1C6B63"/>
+          </a:solidFill>
+          <a:ln>
+            <a:noFill/>
+          </a:ln>
+          <a:effectLst/>
+        </p:spPr>
+        <p:txBody>
+          <a:bodyPr rtlCol="0" anchor="ctr"/>
+          <a:lstStyle/>
+          <a:p>
+            <a:pPr algn="ctr"/>
+          </a:p>
+        </p:txBody>
+      </p:sp>
+      <p:sp>
+        <p:nvSpPr>
+          <p:cNvPr id="52" name="TextBox 51"/>
+          <p:cNvSpPr txBox="1"/>
+          <p:nvPr/>
+        </p:nvSpPr>
+        <p:spPr>
+          <a:xfrm>
+            <a:off x="6280150" y="3119373"/>
+            <a:ext cx="2625725" cy="189229"/>
+          </a:xfrm>
+          <a:prstGeom prst="rect">
+            <a:avLst/>
+          </a:prstGeom>
+          <a:noFill/>
+        </p:spPr>
+        <p:txBody>
+          <a:bodyPr wrap="square" lIns="0" rIns="0" tIns="0" bIns="0"/>
+          <a:lstStyle/>
+          <a:p>
+            <a:pPr algn="l">
+              <a:lnSpc>
+                <a:spcPts val="1010"/>
+              </a:lnSpc>
+              <a:spcBef>
+                <a:spcPts val="0"/>
+              </a:spcBef>
+              <a:spcAft>
+                <a:spcPts val="0"/>
+              </a:spcAft>
+            </a:pPr>
+            <a:r>
+              <a:rPr sz="800" b="0" i="0">
+                <a:solidFill>
+                  <a:srgbClr val="3A4048"/>
+                </a:solidFill>
+                <a:latin typeface="Times New Roman"/>
+                <a:cs typeface="Times New Roman"/>
+              </a:rPr>
+              <a:t>About 10 to 15, guided by the depth and richness of accounts</a:t>
+            </a:r>
+          </a:p>
+        </p:txBody>
+      </p:sp>
+      <p:sp>
+        <p:nvSpPr>
+          <p:cNvPr id="53" name="Rounded Rectangle 52"/>
+          <p:cNvSpPr/>
+          <p:nvPr/>
+        </p:nvSpPr>
+        <p:spPr>
+          <a:xfrm>
+            <a:off x="6178550" y="3350260"/>
+            <a:ext cx="40640" cy="40640"/>
+          </a:xfrm>
+          <a:prstGeom prst="roundRect">
+            <a:avLst>
+              <a:gd name="adj" fmla="val 50000"/>
+            </a:avLst>
+          </a:prstGeom>
+          <a:solidFill>
+            <a:srgbClr val="1C6B63"/>
+          </a:solidFill>
+          <a:ln>
+            <a:noFill/>
+          </a:ln>
+          <a:effectLst/>
+        </p:spPr>
+        <p:txBody>
+          <a:bodyPr rtlCol="0" anchor="ctr"/>
+          <a:lstStyle/>
+          <a:p>
+            <a:pPr algn="ctr"/>
+          </a:p>
+        </p:txBody>
+      </p:sp>
+      <p:sp>
+        <p:nvSpPr>
+          <p:cNvPr id="54" name="TextBox 53"/>
+          <p:cNvSpPr txBox="1"/>
+          <p:nvPr/>
+        </p:nvSpPr>
+        <p:spPr>
+          <a:xfrm>
+            <a:off x="6280150" y="3285744"/>
+            <a:ext cx="2625725" cy="189229"/>
+          </a:xfrm>
+          <a:prstGeom prst="rect">
+            <a:avLst/>
+          </a:prstGeom>
+          <a:noFill/>
+        </p:spPr>
+        <p:txBody>
+          <a:bodyPr wrap="square" lIns="0" rIns="0" tIns="0" bIns="0"/>
+          <a:lstStyle/>
+          <a:p>
+            <a:pPr algn="l">
+              <a:lnSpc>
+                <a:spcPts val="1010"/>
+              </a:lnSpc>
+              <a:spcBef>
+                <a:spcPts val="0"/>
+              </a:spcBef>
+              <a:spcAft>
+                <a:spcPts val="0"/>
+              </a:spcAft>
+            </a:pPr>
+            <a:r>
+              <a:rPr sz="800" b="0" i="0">
+                <a:solidFill>
+                  <a:srgbClr val="3A4048"/>
+                </a:solidFill>
+                <a:latin typeface="Times New Roman"/>
+                <a:cs typeface="Times New Roman"/>
+              </a:rPr>
+              <a:t>Semi-structured, recorded interviews; protocol piloted first</a:t>
+            </a:r>
+          </a:p>
+        </p:txBody>
+      </p:sp>
+      <p:sp>
+        <p:nvSpPr>
+          <p:cNvPr id="55" name="Rounded Rectangle 54"/>
+          <p:cNvSpPr/>
+          <p:nvPr/>
+        </p:nvSpPr>
+        <p:spPr>
+          <a:xfrm>
+            <a:off x="6165850" y="3503930"/>
+            <a:ext cx="2727325" cy="177800"/>
+          </a:xfrm>
+          <a:prstGeom prst="roundRect">
+            <a:avLst>
+              <a:gd name="adj" fmla="val 14285"/>
+            </a:avLst>
+          </a:prstGeom>
+          <a:solidFill>
+            <a:srgbClr val="081E3F"/>
+          </a:solidFill>
+          <a:ln>
+            <a:noFill/>
+          </a:ln>
+          <a:effectLst/>
+        </p:spPr>
+        <p:txBody>
+          <a:bodyPr rtlCol="0" anchor="ctr"/>
+          <a:lstStyle/>
+          <a:p>
+            <a:pPr algn="ctr"/>
+          </a:p>
+        </p:txBody>
+      </p:sp>
+      <p:sp>
+        <p:nvSpPr>
+          <p:cNvPr id="56" name="TextBox 55"/>
+          <p:cNvSpPr txBox="1"/>
+          <p:nvPr/>
+        </p:nvSpPr>
+        <p:spPr>
+          <a:xfrm>
+            <a:off x="6267450" y="3518255"/>
+            <a:ext cx="2161031" cy="137160"/>
+          </a:xfrm>
+          <a:prstGeom prst="rect">
+            <a:avLst/>
+          </a:prstGeom>
+          <a:noFill/>
+        </p:spPr>
+        <p:txBody>
+          <a:bodyPr wrap="none" lIns="0" rIns="0" tIns="0" bIns="0"/>
+          <a:lstStyle/>
+          <a:p>
+            <a:pPr algn="l">
+              <a:lnSpc>
+                <a:spcPct val="100000"/>
+              </a:lnSpc>
+              <a:spcBef>
+                <a:spcPts val="0"/>
+              </a:spcBef>
+              <a:spcAft>
+                <a:spcPts val="0"/>
+              </a:spcAft>
+            </a:pPr>
+            <a:r>
+              <a:rPr sz="720" b="1" i="0" spc="120">
+                <a:solidFill>
+                  <a:srgbClr val="FFFFFF"/>
+                </a:solidFill>
+                <a:latin typeface="Consolas"/>
+                <a:cs typeface="Consolas"/>
+              </a:rPr>
+              <a:t>6 · METHODOLOGY: DATA ANALYSIS</a:t>
+            </a:r>
+          </a:p>
+        </p:txBody>
+      </p:sp>
+      <p:sp>
+        <p:nvSpPr>
+          <p:cNvPr id="57" name="TextBox 56"/>
+          <p:cNvSpPr txBox="1"/>
+          <p:nvPr/>
+        </p:nvSpPr>
+        <p:spPr>
+          <a:xfrm>
+            <a:off x="6165850" y="3696716"/>
+            <a:ext cx="1678939" cy="133350"/>
+          </a:xfrm>
+          <a:prstGeom prst="rect">
+            <a:avLst/>
+          </a:prstGeom>
+          <a:noFill/>
+        </p:spPr>
+        <p:txBody>
+          <a:bodyPr wrap="none" lIns="0" rIns="0" tIns="0" bIns="0"/>
+          <a:lstStyle/>
+          <a:p>
+            <a:pPr algn="l">
+              <a:lnSpc>
+                <a:spcPct val="100000"/>
+              </a:lnSpc>
+              <a:spcBef>
+                <a:spcPts val="0"/>
+              </a:spcBef>
+              <a:spcAft>
+                <a:spcPts val="0"/>
+              </a:spcAft>
+            </a:pPr>
+            <a:r>
+              <a:rPr sz="700" b="1" i="0" spc="90">
+                <a:solidFill>
+                  <a:srgbClr val="1C6B63"/>
+                </a:solidFill>
+                <a:latin typeface="Consolas"/>
+                <a:cs typeface="Consolas"/>
+              </a:rPr>
+              <a:t>FIVE ACTIVITIES  ·  NVIVO</a:t>
+            </a:r>
+          </a:p>
+        </p:txBody>
+      </p:sp>
+      <p:sp>
+        <p:nvSpPr>
+          <p:cNvPr id="58" name="TextBox 57"/>
+          <p:cNvSpPr txBox="1"/>
+          <p:nvPr/>
+        </p:nvSpPr>
+        <p:spPr>
+          <a:xfrm>
+            <a:off x="6191250" y="3845814"/>
+            <a:ext cx="142240" cy="152400"/>
+          </a:xfrm>
+          <a:prstGeom prst="rect">
+            <a:avLst/>
+          </a:prstGeom>
+          <a:noFill/>
+        </p:spPr>
+        <p:txBody>
+          <a:bodyPr wrap="none" lIns="0" rIns="0" tIns="0" bIns="0"/>
+          <a:lstStyle/>
+          <a:p>
+            <a:pPr algn="l">
+              <a:lnSpc>
+                <a:spcPct val="100000"/>
+              </a:lnSpc>
+              <a:spcBef>
+                <a:spcPts val="0"/>
+              </a:spcBef>
+              <a:spcAft>
+                <a:spcPts val="0"/>
+              </a:spcAft>
+            </a:pPr>
+            <a:r>
+              <a:rPr sz="800" b="1" i="0">
+                <a:solidFill>
+                  <a:srgbClr val="B6862C"/>
+                </a:solidFill>
+                <a:latin typeface="Consolas"/>
+                <a:cs typeface="Consolas"/>
+              </a:rPr>
+              <a:t>1</a:t>
+            </a:r>
+          </a:p>
+        </p:txBody>
+      </p:sp>
+      <p:sp>
+        <p:nvSpPr>
+          <p:cNvPr id="59" name="TextBox 58"/>
+          <p:cNvSpPr txBox="1"/>
+          <p:nvPr/>
+        </p:nvSpPr>
+        <p:spPr>
+          <a:xfrm>
+            <a:off x="6305550" y="3846144"/>
+            <a:ext cx="2600325" cy="311658"/>
+          </a:xfrm>
+          <a:prstGeom prst="rect">
+            <a:avLst/>
+          </a:prstGeom>
+          <a:noFill/>
+        </p:spPr>
+        <p:txBody>
+          <a:bodyPr wrap="square" lIns="0" rIns="0" tIns="0" bIns="0"/>
+          <a:lstStyle/>
+          <a:p>
+            <a:pPr algn="l">
+              <a:lnSpc>
+                <a:spcPts val="990"/>
+              </a:lnSpc>
+              <a:spcBef>
+                <a:spcPts val="0"/>
+              </a:spcBef>
+              <a:spcAft>
+                <a:spcPts val="0"/>
+              </a:spcAft>
+            </a:pPr>
+            <a:r>
+              <a:rPr sz="790" b="0" i="0">
+                <a:solidFill>
+                  <a:srgbClr val="3A4048"/>
+                </a:solidFill>
+                <a:latin typeface="Times New Roman"/>
+                <a:cs typeface="Times New Roman"/>
+              </a:rPr>
+              <a:t>Managing and organising. NVivo, named file plan, secure</a:t>
+            </a:r>
+          </a:p>
+          <a:p>
+            <a:pPr algn="l">
+              <a:lnSpc>
+                <a:spcPts val="990"/>
+              </a:lnSpc>
+              <a:spcBef>
+                <a:spcPts val="0"/>
+              </a:spcBef>
+              <a:spcAft>
+                <a:spcPts val="0"/>
+              </a:spcAft>
+            </a:pPr>
+            <a:r>
+              <a:rPr sz="790" b="0" i="0">
+                <a:solidFill>
+                  <a:srgbClr val="3A4048"/>
+                </a:solidFill>
+                <a:latin typeface="Times New Roman"/>
+                <a:cs typeface="Times New Roman"/>
+              </a:rPr>
+              <a:t>storage.</a:t>
+            </a:r>
+          </a:p>
+        </p:txBody>
+      </p:sp>
+      <p:sp>
+        <p:nvSpPr>
+          <p:cNvPr id="60" name="TextBox 59"/>
+          <p:cNvSpPr txBox="1"/>
+          <p:nvPr/>
+        </p:nvSpPr>
+        <p:spPr>
+          <a:xfrm>
+            <a:off x="6191250" y="4122674"/>
+            <a:ext cx="142240" cy="152400"/>
+          </a:xfrm>
+          <a:prstGeom prst="rect">
+            <a:avLst/>
+          </a:prstGeom>
+          <a:noFill/>
+        </p:spPr>
+        <p:txBody>
+          <a:bodyPr wrap="none" lIns="0" rIns="0" tIns="0" bIns="0"/>
+          <a:lstStyle/>
+          <a:p>
+            <a:pPr algn="l">
+              <a:lnSpc>
+                <a:spcPct val="100000"/>
+              </a:lnSpc>
+              <a:spcBef>
+                <a:spcPts val="0"/>
+              </a:spcBef>
+              <a:spcAft>
+                <a:spcPts val="0"/>
+              </a:spcAft>
+            </a:pPr>
+            <a:r>
+              <a:rPr sz="800" b="1" i="0">
+                <a:solidFill>
+                  <a:srgbClr val="B6862C"/>
+                </a:solidFill>
+                <a:latin typeface="Consolas"/>
+                <a:cs typeface="Consolas"/>
+              </a:rPr>
+              <a:t>2</a:t>
+            </a:r>
+          </a:p>
+        </p:txBody>
+      </p:sp>
+      <p:sp>
+        <p:nvSpPr>
+          <p:cNvPr id="61" name="TextBox 60"/>
+          <p:cNvSpPr txBox="1"/>
+          <p:nvPr/>
+        </p:nvSpPr>
+        <p:spPr>
+          <a:xfrm>
+            <a:off x="6305550" y="4123004"/>
+            <a:ext cx="2600325" cy="311658"/>
+          </a:xfrm>
+          <a:prstGeom prst="rect">
+            <a:avLst/>
+          </a:prstGeom>
+          <a:noFill/>
+        </p:spPr>
+        <p:txBody>
+          <a:bodyPr wrap="square" lIns="0" rIns="0" tIns="0" bIns="0"/>
+          <a:lstStyle/>
+          <a:p>
+            <a:pPr algn="l">
+              <a:lnSpc>
+                <a:spcPts val="990"/>
+              </a:lnSpc>
+              <a:spcBef>
+                <a:spcPts val="0"/>
+              </a:spcBef>
+              <a:spcAft>
+                <a:spcPts val="0"/>
+              </a:spcAft>
+            </a:pPr>
+            <a:r>
+              <a:rPr sz="790" b="0" i="0">
+                <a:solidFill>
+                  <a:srgbClr val="3A4048"/>
+                </a:solidFill>
+                <a:latin typeface="Times New Roman"/>
+                <a:cs typeface="Times New Roman"/>
+              </a:rPr>
+              <a:t>Reading and memoing. A dated reflexive journal, kept as</a:t>
+            </a:r>
+          </a:p>
+          <a:p>
+            <a:pPr algn="l">
+              <a:lnSpc>
+                <a:spcPts val="990"/>
+              </a:lnSpc>
+              <a:spcBef>
+                <a:spcPts val="0"/>
+              </a:spcBef>
+              <a:spcAft>
+                <a:spcPts val="0"/>
+              </a:spcAft>
+            </a:pPr>
+            <a:r>
+              <a:rPr sz="790" b="0" i="0">
+                <a:solidFill>
+                  <a:srgbClr val="3A4048"/>
+                </a:solidFill>
+                <a:latin typeface="Times New Roman"/>
+                <a:cs typeface="Times New Roman"/>
+              </a:rPr>
+              <a:t>evidence.</a:t>
+            </a:r>
+          </a:p>
+        </p:txBody>
+      </p:sp>
+      <p:sp>
+        <p:nvSpPr>
+          <p:cNvPr id="62" name="TextBox 61"/>
+          <p:cNvSpPr txBox="1"/>
+          <p:nvPr/>
+        </p:nvSpPr>
+        <p:spPr>
+          <a:xfrm>
+            <a:off x="6191250" y="4399534"/>
+            <a:ext cx="142240" cy="152400"/>
+          </a:xfrm>
+          <a:prstGeom prst="rect">
+            <a:avLst/>
+          </a:prstGeom>
+          <a:noFill/>
+        </p:spPr>
+        <p:txBody>
+          <a:bodyPr wrap="none" lIns="0" rIns="0" tIns="0" bIns="0"/>
+          <a:lstStyle/>
+          <a:p>
+            <a:pPr algn="l">
+              <a:lnSpc>
+                <a:spcPct val="100000"/>
+              </a:lnSpc>
+              <a:spcBef>
+                <a:spcPts val="0"/>
+              </a:spcBef>
+              <a:spcAft>
+                <a:spcPts val="0"/>
+              </a:spcAft>
+            </a:pPr>
+            <a:r>
+              <a:rPr sz="800" b="1" i="0">
+                <a:solidFill>
+                  <a:srgbClr val="B6862C"/>
+                </a:solidFill>
+                <a:latin typeface="Consolas"/>
+                <a:cs typeface="Consolas"/>
+              </a:rPr>
+              <a:t>3</a:t>
+            </a:r>
+          </a:p>
+        </p:txBody>
+      </p:sp>
+      <p:sp>
+        <p:nvSpPr>
+          <p:cNvPr id="63" name="TextBox 62"/>
+          <p:cNvSpPr txBox="1"/>
+          <p:nvPr/>
+        </p:nvSpPr>
+        <p:spPr>
+          <a:xfrm>
+            <a:off x="6305550" y="4399864"/>
+            <a:ext cx="2600325" cy="311658"/>
+          </a:xfrm>
+          <a:prstGeom prst="rect">
+            <a:avLst/>
+          </a:prstGeom>
+          <a:noFill/>
+        </p:spPr>
+        <p:txBody>
+          <a:bodyPr wrap="square" lIns="0" rIns="0" tIns="0" bIns="0"/>
+          <a:lstStyle/>
+          <a:p>
+            <a:pPr algn="l">
+              <a:lnSpc>
+                <a:spcPts val="990"/>
+              </a:lnSpc>
+              <a:spcBef>
+                <a:spcPts val="0"/>
+              </a:spcBef>
+              <a:spcAft>
+                <a:spcPts val="0"/>
+              </a:spcAft>
+            </a:pPr>
+            <a:r>
+              <a:rPr sz="790" b="0" i="0">
+                <a:solidFill>
+                  <a:srgbClr val="3A4048"/>
+                </a:solidFill>
+                <a:latin typeface="Times New Roman"/>
+                <a:cs typeface="Times New Roman"/>
+              </a:rPr>
+              <a:t>Describing and classifying. Horizontalisation, meaning units,</a:t>
+            </a:r>
+          </a:p>
+          <a:p>
+            <a:pPr algn="l">
+              <a:lnSpc>
+                <a:spcPts val="990"/>
+              </a:lnSpc>
+              <a:spcBef>
+                <a:spcPts val="0"/>
+              </a:spcBef>
+              <a:spcAft>
+                <a:spcPts val="0"/>
+              </a:spcAft>
+            </a:pPr>
+            <a:r>
+              <a:rPr sz="790" b="0" i="0">
+                <a:solidFill>
+                  <a:srgbClr val="3A4048"/>
+                </a:solidFill>
+                <a:latin typeface="Times New Roman"/>
+                <a:cs typeface="Times New Roman"/>
+              </a:rPr>
+              <a:t>clusters.</a:t>
+            </a:r>
+          </a:p>
+        </p:txBody>
+      </p:sp>
+      <p:sp>
+        <p:nvSpPr>
+          <p:cNvPr id="64" name="TextBox 63"/>
+          <p:cNvSpPr txBox="1"/>
+          <p:nvPr/>
+        </p:nvSpPr>
+        <p:spPr>
+          <a:xfrm>
+            <a:off x="6191250" y="4676394"/>
+            <a:ext cx="142240" cy="152400"/>
+          </a:xfrm>
+          <a:prstGeom prst="rect">
+            <a:avLst/>
+          </a:prstGeom>
+          <a:noFill/>
+        </p:spPr>
+        <p:txBody>
+          <a:bodyPr wrap="none" lIns="0" rIns="0" tIns="0" bIns="0"/>
+          <a:lstStyle/>
+          <a:p>
+            <a:pPr algn="l">
+              <a:lnSpc>
+                <a:spcPct val="100000"/>
+              </a:lnSpc>
+              <a:spcBef>
+                <a:spcPts val="0"/>
+              </a:spcBef>
+              <a:spcAft>
+                <a:spcPts val="0"/>
+              </a:spcAft>
+            </a:pPr>
+            <a:r>
+              <a:rPr sz="800" b="1" i="0">
+                <a:solidFill>
+                  <a:srgbClr val="B6862C"/>
+                </a:solidFill>
+                <a:latin typeface="Consolas"/>
+                <a:cs typeface="Consolas"/>
+              </a:rPr>
+              <a:t>4</a:t>
+            </a:r>
+          </a:p>
+        </p:txBody>
+      </p:sp>
+      <p:sp>
+        <p:nvSpPr>
+          <p:cNvPr id="65" name="TextBox 64"/>
+          <p:cNvSpPr txBox="1"/>
+          <p:nvPr/>
+        </p:nvSpPr>
+        <p:spPr>
+          <a:xfrm>
+            <a:off x="6305550" y="4676724"/>
+            <a:ext cx="2600325" cy="311658"/>
+          </a:xfrm>
+          <a:prstGeom prst="rect">
+            <a:avLst/>
+          </a:prstGeom>
+          <a:noFill/>
+        </p:spPr>
+        <p:txBody>
+          <a:bodyPr wrap="square" lIns="0" rIns="0" tIns="0" bIns="0"/>
+          <a:lstStyle/>
+          <a:p>
+            <a:pPr algn="l">
+              <a:lnSpc>
+                <a:spcPts val="990"/>
+              </a:lnSpc>
+              <a:spcBef>
+                <a:spcPts val="0"/>
+              </a:spcBef>
+              <a:spcAft>
+                <a:spcPts val="0"/>
+              </a:spcAft>
+            </a:pPr>
+            <a:r>
+              <a:rPr sz="790" b="0" i="0">
+                <a:solidFill>
+                  <a:srgbClr val="3A4048"/>
+                </a:solidFill>
+                <a:latin typeface="Times New Roman"/>
+                <a:cs typeface="Times New Roman"/>
+              </a:rPr>
+              <a:t>Developing interpretations. Textural and structural, then a</a:t>
+            </a:r>
+          </a:p>
+          <a:p>
+            <a:pPr algn="l">
+              <a:lnSpc>
+                <a:spcPts val="990"/>
+              </a:lnSpc>
+              <a:spcBef>
+                <a:spcPts val="0"/>
+              </a:spcBef>
+              <a:spcAft>
+                <a:spcPts val="0"/>
+              </a:spcAft>
+            </a:pPr>
+            <a:r>
+              <a:rPr sz="790" b="0" i="0">
+                <a:solidFill>
+                  <a:srgbClr val="3A4048"/>
+                </a:solidFill>
+                <a:latin typeface="Times New Roman"/>
+                <a:cs typeface="Times New Roman"/>
+              </a:rPr>
+              <a:t>composite.</a:t>
+            </a:r>
+          </a:p>
+        </p:txBody>
+      </p:sp>
+      <p:sp>
+        <p:nvSpPr>
+          <p:cNvPr id="66" name="TextBox 65"/>
+          <p:cNvSpPr txBox="1"/>
+          <p:nvPr/>
+        </p:nvSpPr>
+        <p:spPr>
+          <a:xfrm>
+            <a:off x="6191250" y="4953254"/>
+            <a:ext cx="142240" cy="152400"/>
+          </a:xfrm>
+          <a:prstGeom prst="rect">
+            <a:avLst/>
+          </a:prstGeom>
+          <a:noFill/>
+        </p:spPr>
+        <p:txBody>
+          <a:bodyPr wrap="none" lIns="0" rIns="0" tIns="0" bIns="0"/>
+          <a:lstStyle/>
+          <a:p>
+            <a:pPr algn="l">
+              <a:lnSpc>
+                <a:spcPct val="100000"/>
+              </a:lnSpc>
+              <a:spcBef>
+                <a:spcPts val="0"/>
+              </a:spcBef>
+              <a:spcAft>
+                <a:spcPts val="0"/>
+              </a:spcAft>
+            </a:pPr>
+            <a:r>
+              <a:rPr sz="800" b="1" i="0">
+                <a:solidFill>
+                  <a:srgbClr val="B6862C"/>
+                </a:solidFill>
+                <a:latin typeface="Consolas"/>
+                <a:cs typeface="Consolas"/>
+              </a:rPr>
+              <a:t>5</a:t>
+            </a:r>
+          </a:p>
+        </p:txBody>
+      </p:sp>
+      <p:sp>
+        <p:nvSpPr>
+          <p:cNvPr id="67" name="TextBox 66"/>
+          <p:cNvSpPr txBox="1"/>
+          <p:nvPr/>
+        </p:nvSpPr>
+        <p:spPr>
+          <a:xfrm>
+            <a:off x="6305550" y="4953584"/>
+            <a:ext cx="2600325" cy="185928"/>
+          </a:xfrm>
+          <a:prstGeom prst="rect">
+            <a:avLst/>
+          </a:prstGeom>
+          <a:noFill/>
+        </p:spPr>
+        <p:txBody>
+          <a:bodyPr wrap="square" lIns="0" rIns="0" tIns="0" bIns="0"/>
+          <a:lstStyle/>
+          <a:p>
+            <a:pPr algn="l">
+              <a:lnSpc>
+                <a:spcPts val="990"/>
+              </a:lnSpc>
+              <a:spcBef>
+                <a:spcPts val="0"/>
+              </a:spcBef>
+              <a:spcAft>
+                <a:spcPts val="0"/>
+              </a:spcAft>
+            </a:pPr>
+            <a:r>
+              <a:rPr sz="790" b="0" i="0">
+                <a:solidFill>
+                  <a:srgbClr val="3A4048"/>
+                </a:solidFill>
+                <a:latin typeface="Times New Roman"/>
+                <a:cs typeface="Times New Roman"/>
+              </a:rPr>
+              <a:t>Representing. A thematic map and a composite narrative.</a:t>
+            </a:r>
+          </a:p>
+        </p:txBody>
+      </p:sp>
+      <p:sp>
+        <p:nvSpPr>
+          <p:cNvPr id="68" name="Rounded Rectangle 67"/>
+          <p:cNvSpPr/>
+          <p:nvPr/>
+        </p:nvSpPr>
+        <p:spPr>
+          <a:xfrm>
+            <a:off x="9032875" y="1752600"/>
+            <a:ext cx="2727325" cy="177800"/>
+          </a:xfrm>
+          <a:prstGeom prst="roundRect">
+            <a:avLst>
+              <a:gd name="adj" fmla="val 14285"/>
+            </a:avLst>
+          </a:prstGeom>
+          <a:solidFill>
+            <a:srgbClr val="081E3F"/>
+          </a:solidFill>
+          <a:ln>
+            <a:noFill/>
+          </a:ln>
+          <a:effectLst/>
+        </p:spPr>
+        <p:txBody>
+          <a:bodyPr rtlCol="0" anchor="ctr"/>
+          <a:lstStyle/>
+          <a:p>
+            <a:pPr algn="ctr"/>
+          </a:p>
+        </p:txBody>
+      </p:sp>
+      <p:sp>
+        <p:nvSpPr>
+          <p:cNvPr id="69" name="TextBox 68"/>
+          <p:cNvSpPr txBox="1"/>
+          <p:nvPr/>
+        </p:nvSpPr>
+        <p:spPr>
+          <a:xfrm>
+            <a:off x="9134475" y="1766925"/>
+            <a:ext cx="1810512" cy="137160"/>
+          </a:xfrm>
+          <a:prstGeom prst="rect">
+            <a:avLst/>
+          </a:prstGeom>
+          <a:noFill/>
+        </p:spPr>
+        <p:txBody>
+          <a:bodyPr wrap="none" lIns="0" rIns="0" tIns="0" bIns="0"/>
+          <a:lstStyle/>
+          <a:p>
+            <a:pPr algn="l">
+              <a:lnSpc>
+                <a:spcPct val="100000"/>
+              </a:lnSpc>
+              <a:spcBef>
+                <a:spcPts val="0"/>
+              </a:spcBef>
+              <a:spcAft>
+                <a:spcPts val="0"/>
+              </a:spcAft>
+            </a:pPr>
+            <a:r>
+              <a:rPr sz="720" b="1" i="0" spc="120">
+                <a:solidFill>
+                  <a:srgbClr val="FFFFFF"/>
+                </a:solidFill>
+                <a:latin typeface="Consolas"/>
+                <a:cs typeface="Consolas"/>
+              </a:rPr>
+              <a:t>7 · ETHICS AND VALIDATION</a:t>
+            </a:r>
+          </a:p>
+        </p:txBody>
+      </p:sp>
+      <p:sp>
+        <p:nvSpPr>
+          <p:cNvPr id="70" name="Rounded Rectangle 69"/>
+          <p:cNvSpPr/>
+          <p:nvPr/>
+        </p:nvSpPr>
+        <p:spPr>
+          <a:xfrm>
+            <a:off x="9045575" y="2032000"/>
             <a:ext cx="40640" cy="40640"/>
           </a:xfrm>
           <a:prstGeom prst="roundRect">
@@ -5495,14 +6532,14 @@
       </p:sp>
       <p:sp>
         <p:nvSpPr>
-          <p:cNvPr id="45" name="TextBox 44"/>
+          <p:cNvPr id="71" name="TextBox 70"/>
           <p:cNvSpPr txBox="1"/>
           <p:nvPr/>
         </p:nvSpPr>
         <p:spPr>
           <a:xfrm>
-            <a:off x="3413125" y="5303774"/>
-            <a:ext cx="2625725" cy="189229"/>
+            <a:off x="9147175" y="1967483"/>
+            <a:ext cx="2625725" cy="317500"/>
           </a:xfrm>
           <a:prstGeom prst="rect">
             <a:avLst/>
@@ -5532,20 +6569,317 @@
                 <a:latin typeface="Times New Roman"/>
                 <a:cs typeface="Times New Roman"/>
               </a:rPr>
-              <a:t>Ethnography needs embedded access to a firm's review process</a:t>
-            </a:r>
-          </a:p>
-        </p:txBody>
-      </p:sp>
-      <p:sp>
-        <p:nvSpPr>
-          <p:cNvPr id="46" name="Rounded Rectangle 45"/>
+              <a:t>Informed consent and IRB determination before any contact;</a:t>
+            </a:r>
+          </a:p>
+          <a:p>
+            <a:pPr algn="l">
+              <a:lnSpc>
+                <a:spcPts val="1010"/>
+              </a:lnSpc>
+              <a:spcBef>
+                <a:spcPts val="0"/>
+              </a:spcBef>
+              <a:spcAft>
+                <a:spcPts val="0"/>
+              </a:spcAft>
+            </a:pPr>
+            <a:r>
+              <a:rPr sz="800" b="0" i="0">
+                <a:solidFill>
+                  <a:srgbClr val="3A4048"/>
+                </a:solidFill>
+                <a:latin typeface="Times New Roman"/>
+                <a:cs typeface="Times New Roman"/>
+              </a:rPr>
+              <a:t>pseudonyms, no firm detail</a:t>
+            </a:r>
+          </a:p>
+        </p:txBody>
+      </p:sp>
+      <p:sp>
+        <p:nvSpPr>
+          <p:cNvPr id="72" name="Rounded Rectangle 71"/>
           <p:cNvSpPr/>
           <p:nvPr/>
         </p:nvSpPr>
         <p:spPr>
           <a:xfrm>
-            <a:off x="6165850" y="1752600"/>
+            <a:off x="9045575" y="2326640"/>
+            <a:ext cx="40640" cy="40640"/>
+          </a:xfrm>
+          <a:prstGeom prst="roundRect">
+            <a:avLst>
+              <a:gd name="adj" fmla="val 50000"/>
+            </a:avLst>
+          </a:prstGeom>
+          <a:solidFill>
+            <a:srgbClr val="8C3A1B"/>
+          </a:solidFill>
+          <a:ln>
+            <a:noFill/>
+          </a:ln>
+          <a:effectLst/>
+        </p:spPr>
+        <p:txBody>
+          <a:bodyPr rtlCol="0" anchor="ctr"/>
+          <a:lstStyle/>
+          <a:p>
+            <a:pPr algn="ctr"/>
+          </a:p>
+        </p:txBody>
+      </p:sp>
+      <p:sp>
+        <p:nvSpPr>
+          <p:cNvPr id="73" name="TextBox 72"/>
+          <p:cNvSpPr txBox="1"/>
+          <p:nvPr/>
+        </p:nvSpPr>
+        <p:spPr>
+          <a:xfrm>
+            <a:off x="9147175" y="2262123"/>
+            <a:ext cx="2625725" cy="189229"/>
+          </a:xfrm>
+          <a:prstGeom prst="rect">
+            <a:avLst/>
+          </a:prstGeom>
+          <a:noFill/>
+        </p:spPr>
+        <p:txBody>
+          <a:bodyPr wrap="square" lIns="0" rIns="0" tIns="0" bIns="0"/>
+          <a:lstStyle/>
+          <a:p>
+            <a:pPr algn="l">
+              <a:lnSpc>
+                <a:spcPts val="1010"/>
+              </a:lnSpc>
+              <a:spcBef>
+                <a:spcPts val="0"/>
+              </a:spcBef>
+              <a:spcAft>
+                <a:spcPts val="0"/>
+              </a:spcAft>
+            </a:pPr>
+            <a:r>
+              <a:rPr sz="800" b="0" i="0">
+                <a:solidFill>
+                  <a:srgbClr val="3A4048"/>
+                </a:solidFill>
+                <a:latin typeface="Times New Roman"/>
+                <a:cs typeface="Times New Roman"/>
+              </a:rPr>
+              <a:t>Member checking of each participant's own textural description</a:t>
+            </a:r>
+          </a:p>
+        </p:txBody>
+      </p:sp>
+      <p:sp>
+        <p:nvSpPr>
+          <p:cNvPr id="74" name="Rounded Rectangle 73"/>
+          <p:cNvSpPr/>
+          <p:nvPr/>
+        </p:nvSpPr>
+        <p:spPr>
+          <a:xfrm>
+            <a:off x="9045575" y="2493010"/>
+            <a:ext cx="40640" cy="40640"/>
+          </a:xfrm>
+          <a:prstGeom prst="roundRect">
+            <a:avLst>
+              <a:gd name="adj" fmla="val 50000"/>
+            </a:avLst>
+          </a:prstGeom>
+          <a:solidFill>
+            <a:srgbClr val="8C3A1B"/>
+          </a:solidFill>
+          <a:ln>
+            <a:noFill/>
+          </a:ln>
+          <a:effectLst/>
+        </p:spPr>
+        <p:txBody>
+          <a:bodyPr rtlCol="0" anchor="ctr"/>
+          <a:lstStyle/>
+          <a:p>
+            <a:pPr algn="ctr"/>
+          </a:p>
+        </p:txBody>
+      </p:sp>
+      <p:sp>
+        <p:nvSpPr>
+          <p:cNvPr id="75" name="TextBox 74"/>
+          <p:cNvSpPr txBox="1"/>
+          <p:nvPr/>
+        </p:nvSpPr>
+        <p:spPr>
+          <a:xfrm>
+            <a:off x="9147175" y="2428493"/>
+            <a:ext cx="2625725" cy="317500"/>
+          </a:xfrm>
+          <a:prstGeom prst="rect">
+            <a:avLst/>
+          </a:prstGeom>
+          <a:noFill/>
+        </p:spPr>
+        <p:txBody>
+          <a:bodyPr wrap="square" lIns="0" rIns="0" tIns="0" bIns="0"/>
+          <a:lstStyle/>
+          <a:p>
+            <a:pPr algn="l">
+              <a:lnSpc>
+                <a:spcPts val="1010"/>
+              </a:lnSpc>
+              <a:spcBef>
+                <a:spcPts val="0"/>
+              </a:spcBef>
+              <a:spcAft>
+                <a:spcPts val="0"/>
+              </a:spcAft>
+            </a:pPr>
+            <a:r>
+              <a:rPr sz="800" b="0" i="0">
+                <a:solidFill>
+                  <a:srgbClr val="3A4048"/>
+                </a:solidFill>
+                <a:latin typeface="Times New Roman"/>
+                <a:cs typeface="Times New Roman"/>
+              </a:rPr>
+              <a:t>External reviewer reads purposefully chosen transcripts,</a:t>
+            </a:r>
+          </a:p>
+          <a:p>
+            <a:pPr algn="l">
+              <a:lnSpc>
+                <a:spcPts val="1010"/>
+              </a:lnSpc>
+              <a:spcBef>
+                <a:spcPts val="0"/>
+              </a:spcBef>
+              <a:spcAft>
+                <a:spcPts val="0"/>
+              </a:spcAft>
+            </a:pPr>
+            <a:r>
+              <a:rPr sz="800" b="0" i="0">
+                <a:solidFill>
+                  <a:srgbClr val="3A4048"/>
+                </a:solidFill>
+                <a:latin typeface="Times New Roman"/>
+                <a:cs typeface="Times New Roman"/>
+              </a:rPr>
+              <a:t>including a disconfirming one, with the analytic memos</a:t>
+            </a:r>
+          </a:p>
+        </p:txBody>
+      </p:sp>
+      <p:sp>
+        <p:nvSpPr>
+          <p:cNvPr id="76" name="Rounded Rectangle 75"/>
+          <p:cNvSpPr/>
+          <p:nvPr/>
+        </p:nvSpPr>
+        <p:spPr>
+          <a:xfrm>
+            <a:off x="9045575" y="2787649"/>
+            <a:ext cx="40640" cy="40640"/>
+          </a:xfrm>
+          <a:prstGeom prst="roundRect">
+            <a:avLst>
+              <a:gd name="adj" fmla="val 50000"/>
+            </a:avLst>
+          </a:prstGeom>
+          <a:solidFill>
+            <a:srgbClr val="8C3A1B"/>
+          </a:solidFill>
+          <a:ln>
+            <a:noFill/>
+          </a:ln>
+          <a:effectLst/>
+        </p:spPr>
+        <p:txBody>
+          <a:bodyPr rtlCol="0" anchor="ctr"/>
+          <a:lstStyle/>
+          <a:p>
+            <a:pPr algn="ctr"/>
+          </a:p>
+        </p:txBody>
+      </p:sp>
+      <p:sp>
+        <p:nvSpPr>
+          <p:cNvPr id="77" name="TextBox 76"/>
+          <p:cNvSpPr txBox="1"/>
+          <p:nvPr/>
+        </p:nvSpPr>
+        <p:spPr>
+          <a:xfrm>
+            <a:off x="9147175" y="2723133"/>
+            <a:ext cx="2625725" cy="317500"/>
+          </a:xfrm>
+          <a:prstGeom prst="rect">
+            <a:avLst/>
+          </a:prstGeom>
+          <a:noFill/>
+        </p:spPr>
+        <p:txBody>
+          <a:bodyPr wrap="square" lIns="0" rIns="0" tIns="0" bIns="0"/>
+          <a:lstStyle/>
+          <a:p>
+            <a:pPr algn="l">
+              <a:lnSpc>
+                <a:spcPts val="1010"/>
+              </a:lnSpc>
+              <a:spcBef>
+                <a:spcPts val="0"/>
+              </a:spcBef>
+              <a:spcAft>
+                <a:spcPts val="0"/>
+              </a:spcAft>
+            </a:pPr>
+            <a:r>
+              <a:rPr sz="800" b="0" i="0">
+                <a:solidFill>
+                  <a:srgbClr val="3A4048"/>
+                </a:solidFill>
+                <a:latin typeface="Times New Roman"/>
+                <a:cs typeface="Times New Roman"/>
+              </a:rPr>
+              <a:t>Confirmation hazard log entries tied to specific analytic</a:t>
+            </a:r>
+          </a:p>
+          <a:p>
+            <a:pPr algn="l">
+              <a:lnSpc>
+                <a:spcPts val="1010"/>
+              </a:lnSpc>
+              <a:spcBef>
+                <a:spcPts val="0"/>
+              </a:spcBef>
+              <a:spcAft>
+                <a:spcPts val="0"/>
+              </a:spcAft>
+            </a:pPr>
+            <a:r>
+              <a:rPr sz="800" b="0" i="0">
+                <a:solidFill>
+                  <a:srgbClr val="3A4048"/>
+                </a:solidFill>
+                <a:latin typeface="Times New Roman"/>
+                <a:cs typeface="Times New Roman"/>
+              </a:rPr>
+              <a:t>decisions in the audit trail</a:t>
+            </a:r>
+          </a:p>
+        </p:txBody>
+      </p:sp>
+      <p:sp>
+        <p:nvSpPr>
+          <p:cNvPr id="78" name="Rounded Rectangle 77"/>
+          <p:cNvSpPr/>
+          <p:nvPr/>
+        </p:nvSpPr>
+        <p:spPr>
+          <a:xfrm>
+            <a:off x="9032875" y="3069589"/>
             <a:ext cx="2727325" cy="177800"/>
           </a:xfrm>
           <a:prstGeom prst="roundRect">
@@ -5571,14 +6905,14 @@
       </p:sp>
       <p:sp>
         <p:nvSpPr>
-          <p:cNvPr id="47" name="TextBox 46"/>
+          <p:cNvPr id="79" name="TextBox 78"/>
           <p:cNvSpPr txBox="1"/>
           <p:nvPr/>
         </p:nvSpPr>
         <p:spPr>
           <a:xfrm>
-            <a:off x="6267450" y="1766925"/>
-            <a:ext cx="2301240" cy="137160"/>
+            <a:off x="9134475" y="3083915"/>
+            <a:ext cx="1810512" cy="137160"/>
           </a:xfrm>
           <a:prstGeom prst="rect">
             <a:avLst/>
@@ -5608,21 +6942,21 @@
                 <a:latin typeface="Consolas"/>
                 <a:cs typeface="Consolas"/>
               </a:rPr>
-              <a:t>5 · METHODOLOGY: DATA COLLECTION</a:t>
-            </a:r>
-          </a:p>
-        </p:txBody>
-      </p:sp>
-      <p:sp>
-        <p:nvSpPr>
-          <p:cNvPr id="48" name="TextBox 47"/>
+              <a:t>8 · DESIRED CONTRIBUTIONS</a:t>
+            </a:r>
+          </a:p>
+        </p:txBody>
+      </p:sp>
+      <p:sp>
+        <p:nvSpPr>
+          <p:cNvPr id="80" name="TextBox 79"/>
           <p:cNvSpPr txBox="1"/>
           <p:nvPr/>
         </p:nvSpPr>
         <p:spPr>
           <a:xfrm>
-            <a:off x="6165850" y="1944725"/>
-            <a:ext cx="2019808" cy="137160"/>
+            <a:off x="9032875" y="3262375"/>
+            <a:ext cx="784860" cy="133350"/>
           </a:xfrm>
           <a:prstGeom prst="rect">
             <a:avLst/>
@@ -5645,28 +6979,28 @@
               </a:spcAft>
             </a:pPr>
             <a:r>
-              <a:rPr sz="720" b="1" i="0" spc="100">
-                <a:solidFill>
-                  <a:srgbClr val="8C3A1B"/>
+              <a:rPr sz="700" b="1" i="0" spc="100">
+                <a:solidFill>
+                  <a:srgbClr val="8A6A1F"/>
                 </a:solidFill>
                 <a:latin typeface="Consolas"/>
                 <a:cs typeface="Consolas"/>
               </a:rPr>
-              <a:t>ELIGIBILITY IS THE PHENOMENON</a:t>
-            </a:r>
-          </a:p>
-        </p:txBody>
-      </p:sp>
-      <p:sp>
-        <p:nvSpPr>
-          <p:cNvPr id="49" name="TextBox 48"/>
+              <a:t>TO PRACTICE</a:t>
+            </a:r>
+          </a:p>
+        </p:txBody>
+      </p:sp>
+      <p:sp>
+        <p:nvSpPr>
+          <p:cNvPr id="81" name="TextBox 80"/>
           <p:cNvSpPr txBox="1"/>
           <p:nvPr/>
         </p:nvSpPr>
         <p:spPr>
           <a:xfrm>
-            <a:off x="6165850" y="2094483"/>
-            <a:ext cx="2740025" cy="445769"/>
+            <a:off x="9032875" y="3398773"/>
+            <a:ext cx="2740025" cy="317500"/>
           </a:xfrm>
           <a:prstGeom prst="rect">
             <a:avLst/>
@@ -5691,12 +7025,12 @@
             <a:r>
               <a:rPr sz="800" b="0" i="0">
                 <a:solidFill>
-                  <a:srgbClr val="14171C"/>
-                </a:solidFill>
-                <a:latin typeface="Times New Roman"/>
-                <a:cs typeface="Times New Roman"/>
-              </a:rPr>
-              <a:t>A participant must have received AI-generated output that</a:t>
+                  <a:srgbClr val="3A4048"/>
+                </a:solidFill>
+                <a:latin typeface="Times New Roman"/>
+                <a:cs typeface="Times New Roman"/>
+              </a:rPr>
+              <a:t>Shows what human review of AI output is actually like, for firms</a:t>
             </a:r>
           </a:p>
           <a:p>
@@ -5714,81 +7048,26 @@
             <a:r>
               <a:rPr sz="800" b="0" i="0">
                 <a:solidFill>
-                  <a:srgbClr val="14171C"/>
-                </a:solidFill>
-                <a:latin typeface="Times New Roman"/>
-                <a:cs typeface="Times New Roman"/>
-              </a:rPr>
-              <a:t>confirmed a judgment they had already formed independently.</a:t>
-            </a:r>
-          </a:p>
-          <a:p>
-            <a:pPr algn="l">
-              <a:lnSpc>
-                <a:spcPts val="1010"/>
-              </a:lnSpc>
-              <a:spcBef>
-                <a:spcPts val="0"/>
-              </a:spcBef>
-              <a:spcAft>
-                <a:spcPts val="0"/>
-              </a:spcAft>
-            </a:pPr>
-            <a:r>
-              <a:rPr sz="800" b="0" i="0">
-                <a:solidFill>
-                  <a:srgbClr val="14171C"/>
-                </a:solidFill>
-                <a:latin typeface="Times New Roman"/>
-                <a:cs typeface="Times New Roman"/>
-              </a:rPr>
-              <a:t>General experience of AI-supported audit work does not qualify.</a:t>
-            </a:r>
-          </a:p>
-        </p:txBody>
-      </p:sp>
-      <p:sp>
-        <p:nvSpPr>
-          <p:cNvPr id="50" name="Rounded Rectangle 49"/>
-          <p:cNvSpPr/>
-          <p:nvPr/>
-        </p:nvSpPr>
-        <p:spPr>
-          <a:xfrm>
-            <a:off x="6178550" y="2594610"/>
-            <a:ext cx="40640" cy="40640"/>
-          </a:xfrm>
-          <a:prstGeom prst="roundRect">
-            <a:avLst>
-              <a:gd name="adj" fmla="val 50000"/>
-            </a:avLst>
-          </a:prstGeom>
-          <a:solidFill>
-            <a:srgbClr val="1C6B63"/>
-          </a:solidFill>
-          <a:ln>
-            <a:noFill/>
-          </a:ln>
-          <a:effectLst/>
-        </p:spPr>
-        <p:txBody>
-          <a:bodyPr rtlCol="0" anchor="ctr"/>
-          <a:lstStyle/>
-          <a:p>
-            <a:pPr algn="ctr"/>
-          </a:p>
-        </p:txBody>
-      </p:sp>
-      <p:sp>
-        <p:nvSpPr>
-          <p:cNvPr id="51" name="TextBox 50"/>
+                  <a:srgbClr val="3A4048"/>
+                </a:solidFill>
+                <a:latin typeface="Times New Roman"/>
+                <a:cs typeface="Times New Roman"/>
+              </a:rPr>
+              <a:t>and regulators relying on it.</a:t>
+            </a:r>
+          </a:p>
+        </p:txBody>
+      </p:sp>
+      <p:sp>
+        <p:nvSpPr>
+          <p:cNvPr id="82" name="TextBox 81"/>
           <p:cNvSpPr txBox="1"/>
           <p:nvPr/>
         </p:nvSpPr>
         <p:spPr>
           <a:xfrm>
-            <a:off x="6280150" y="2530094"/>
-            <a:ext cx="2625725" cy="317500"/>
+            <a:off x="9032875" y="3684015"/>
+            <a:ext cx="784860" cy="133350"/>
           </a:xfrm>
           <a:prstGeom prst="rect">
             <a:avLst/>
@@ -5796,98 +7075,43 @@
           <a:noFill/>
         </p:spPr>
         <p:txBody>
-          <a:bodyPr wrap="square" lIns="0" rIns="0" tIns="0" bIns="0"/>
-          <a:lstStyle/>
-          <a:p>
-            <a:pPr algn="l">
-              <a:lnSpc>
-                <a:spcPts val="1010"/>
-              </a:lnSpc>
-              <a:spcBef>
-                <a:spcPts val="0"/>
-              </a:spcBef>
-              <a:spcAft>
-                <a:spcPts val="0"/>
-              </a:spcAft>
-            </a:pPr>
-            <a:r>
-              <a:rPr sz="800" b="0" i="0">
-                <a:solidFill>
-                  <a:srgbClr val="3A4048"/>
-                </a:solidFill>
-                <a:latin typeface="Times New Roman"/>
-                <a:cs typeface="Times New Roman"/>
-              </a:rPr>
-              <a:t>Five or more years in audit or risk assurance, with recurring</a:t>
-            </a:r>
-          </a:p>
-          <a:p>
-            <a:pPr algn="l">
-              <a:lnSpc>
-                <a:spcPts val="1010"/>
-              </a:lnSpc>
-              <a:spcBef>
-                <a:spcPts val="0"/>
-              </a:spcBef>
-              <a:spcAft>
-                <a:spcPts val="0"/>
-              </a:spcAft>
-            </a:pPr>
-            <a:r>
-              <a:rPr sz="800" b="0" i="0">
-                <a:solidFill>
-                  <a:srgbClr val="3A4048"/>
-                </a:solidFill>
-                <a:latin typeface="Times New Roman"/>
-                <a:cs typeface="Times New Roman"/>
-              </a:rPr>
-              <a:t>engagement responsibility</a:t>
-            </a:r>
-          </a:p>
-        </p:txBody>
-      </p:sp>
-      <p:sp>
-        <p:nvSpPr>
-          <p:cNvPr id="52" name="Rounded Rectangle 51"/>
-          <p:cNvSpPr/>
-          <p:nvPr/>
-        </p:nvSpPr>
-        <p:spPr>
-          <a:xfrm>
-            <a:off x="6178550" y="2889250"/>
-            <a:ext cx="40640" cy="40640"/>
-          </a:xfrm>
-          <a:prstGeom prst="roundRect">
-            <a:avLst>
-              <a:gd name="adj" fmla="val 50000"/>
-            </a:avLst>
-          </a:prstGeom>
-          <a:solidFill>
-            <a:srgbClr val="1C6B63"/>
-          </a:solidFill>
-          <a:ln>
-            <a:noFill/>
-          </a:ln>
-          <a:effectLst/>
-        </p:spPr>
-        <p:txBody>
-          <a:bodyPr rtlCol="0" anchor="ctr"/>
-          <a:lstStyle/>
-          <a:p>
-            <a:pPr algn="ctr"/>
-          </a:p>
-        </p:txBody>
-      </p:sp>
-      <p:sp>
-        <p:nvSpPr>
-          <p:cNvPr id="53" name="TextBox 52"/>
+          <a:bodyPr wrap="none" lIns="0" rIns="0" tIns="0" bIns="0"/>
+          <a:lstStyle/>
+          <a:p>
+            <a:pPr algn="l">
+              <a:lnSpc>
+                <a:spcPct val="100000"/>
+              </a:lnSpc>
+              <a:spcBef>
+                <a:spcPts val="0"/>
+              </a:spcBef>
+              <a:spcAft>
+                <a:spcPts val="0"/>
+              </a:spcAft>
+            </a:pPr>
+            <a:r>
+              <a:rPr sz="700" b="1" i="0" spc="100">
+                <a:solidFill>
+                  <a:srgbClr val="8A6A1F"/>
+                </a:solidFill>
+                <a:latin typeface="Consolas"/>
+                <a:cs typeface="Consolas"/>
+              </a:rPr>
+              <a:t>TO ACADEMIA</a:t>
+            </a:r>
+          </a:p>
+        </p:txBody>
+      </p:sp>
+      <p:sp>
+        <p:nvSpPr>
+          <p:cNvPr id="83" name="TextBox 82"/>
           <p:cNvSpPr txBox="1"/>
           <p:nvPr/>
         </p:nvSpPr>
         <p:spPr>
           <a:xfrm>
-            <a:off x="6280150" y="2824734"/>
-            <a:ext cx="2625725" cy="317500"/>
+            <a:off x="9032875" y="3820413"/>
+            <a:ext cx="2740025" cy="317500"/>
           </a:xfrm>
           <a:prstGeom prst="rect">
             <a:avLst/>
@@ -5917,7 +7141,7 @@
                 <a:latin typeface="Times New Roman"/>
                 <a:cs typeface="Times New Roman"/>
               </a:rPr>
-              <a:t>Criterion sampling, 10 to 15. Saturation is a stopping rule, not a</a:t>
+              <a:t>Distinguishes the auditor's experience of agreement from measures</a:t>
             </a:r>
           </a:p>
           <a:p>
@@ -5940,340 +7164,20 @@
                 <a:latin typeface="Times New Roman"/>
                 <a:cs typeface="Times New Roman"/>
               </a:rPr>
-              <a:t>target</a:t>
-            </a:r>
-          </a:p>
-        </p:txBody>
-      </p:sp>
-      <p:sp>
-        <p:nvSpPr>
-          <p:cNvPr id="54" name="Rounded Rectangle 53"/>
+              <a:t>of reliance.</a:t>
+            </a:r>
+          </a:p>
+        </p:txBody>
+      </p:sp>
+      <p:sp>
+        <p:nvSpPr>
+          <p:cNvPr id="84" name="Rounded Rectangle 83"/>
           <p:cNvSpPr/>
           <p:nvPr/>
         </p:nvSpPr>
         <p:spPr>
           <a:xfrm>
-            <a:off x="6178550" y="3183890"/>
-            <a:ext cx="40640" cy="40640"/>
-          </a:xfrm>
-          <a:prstGeom prst="roundRect">
-            <a:avLst>
-              <a:gd name="adj" fmla="val 50000"/>
-            </a:avLst>
-          </a:prstGeom>
-          <a:solidFill>
-            <a:srgbClr val="1C6B63"/>
-          </a:solidFill>
-          <a:ln>
-            <a:noFill/>
-          </a:ln>
-          <a:effectLst/>
-        </p:spPr>
-        <p:txBody>
-          <a:bodyPr rtlCol="0" anchor="ctr"/>
-          <a:lstStyle/>
-          <a:p>
-            <a:pPr algn="ctr"/>
-          </a:p>
-        </p:txBody>
-      </p:sp>
-      <p:sp>
-        <p:nvSpPr>
-          <p:cNvPr id="55" name="TextBox 54"/>
-          <p:cNvSpPr txBox="1"/>
-          <p:nvPr/>
-        </p:nvSpPr>
-        <p:spPr>
-          <a:xfrm>
-            <a:off x="6280150" y="3119373"/>
-            <a:ext cx="2625725" cy="317500"/>
-          </a:xfrm>
-          <a:prstGeom prst="rect">
-            <a:avLst/>
-          </a:prstGeom>
-          <a:noFill/>
-        </p:spPr>
-        <p:txBody>
-          <a:bodyPr wrap="square" lIns="0" rIns="0" tIns="0" bIns="0"/>
-          <a:lstStyle/>
-          <a:p>
-            <a:pPr algn="l">
-              <a:lnSpc>
-                <a:spcPts val="1010"/>
-              </a:lnSpc>
-              <a:spcBef>
-                <a:spcPts val="0"/>
-              </a:spcBef>
-              <a:spcAft>
-                <a:spcPts val="0"/>
-              </a:spcAft>
-            </a:pPr>
-            <a:r>
-              <a:rPr sz="800" b="0" i="0">
-                <a:solidFill>
-                  <a:srgbClr val="3A4048"/>
-                </a:solidFill>
-                <a:latin typeface="Times New Roman"/>
-                <a:cs typeface="Times New Roman"/>
-              </a:rPr>
-              <a:t>No single site. Professional networks, association chapters,</a:t>
-            </a:r>
-          </a:p>
-          <a:p>
-            <a:pPr algn="l">
-              <a:lnSpc>
-                <a:spcPts val="1010"/>
-              </a:lnSpc>
-              <a:spcBef>
-                <a:spcPts val="0"/>
-              </a:spcBef>
-              <a:spcAft>
-                <a:spcPts val="0"/>
-              </a:spcAft>
-            </a:pPr>
-            <a:r>
-              <a:rPr sz="800" b="0" i="0">
-                <a:solidFill>
-                  <a:srgbClr val="3A4048"/>
-                </a:solidFill>
-                <a:latin typeface="Times New Roman"/>
-                <a:cs typeface="Times New Roman"/>
-              </a:rPr>
-              <a:t>referral chains</a:t>
-            </a:r>
-          </a:p>
-        </p:txBody>
-      </p:sp>
-      <p:sp>
-        <p:nvSpPr>
-          <p:cNvPr id="56" name="Rounded Rectangle 55"/>
-          <p:cNvSpPr/>
-          <p:nvPr/>
-        </p:nvSpPr>
-        <p:spPr>
-          <a:xfrm>
-            <a:off x="6178550" y="3478529"/>
-            <a:ext cx="40640" cy="40640"/>
-          </a:xfrm>
-          <a:prstGeom prst="roundRect">
-            <a:avLst>
-              <a:gd name="adj" fmla="val 50000"/>
-            </a:avLst>
-          </a:prstGeom>
-          <a:solidFill>
-            <a:srgbClr val="1C6B63"/>
-          </a:solidFill>
-          <a:ln>
-            <a:noFill/>
-          </a:ln>
-          <a:effectLst/>
-        </p:spPr>
-        <p:txBody>
-          <a:bodyPr rtlCol="0" anchor="ctr"/>
-          <a:lstStyle/>
-          <a:p>
-            <a:pPr algn="ctr"/>
-          </a:p>
-        </p:txBody>
-      </p:sp>
-      <p:sp>
-        <p:nvSpPr>
-          <p:cNvPr id="57" name="TextBox 56"/>
-          <p:cNvSpPr txBox="1"/>
-          <p:nvPr/>
-        </p:nvSpPr>
-        <p:spPr>
-          <a:xfrm>
-            <a:off x="6280150" y="3414014"/>
-            <a:ext cx="2625725" cy="445769"/>
-          </a:xfrm>
-          <a:prstGeom prst="rect">
-            <a:avLst/>
-          </a:prstGeom>
-          <a:noFill/>
-        </p:spPr>
-        <p:txBody>
-          <a:bodyPr wrap="square" lIns="0" rIns="0" tIns="0" bIns="0"/>
-          <a:lstStyle/>
-          <a:p>
-            <a:pPr algn="l">
-              <a:lnSpc>
-                <a:spcPts val="1010"/>
-              </a:lnSpc>
-              <a:spcBef>
-                <a:spcPts val="0"/>
-              </a:spcBef>
-              <a:spcAft>
-                <a:spcPts val="0"/>
-              </a:spcAft>
-            </a:pPr>
-            <a:r>
-              <a:rPr sz="800" b="0" i="0">
-                <a:solidFill>
-                  <a:srgbClr val="3A4048"/>
-                </a:solidFill>
-                <a:latin typeface="Times New Roman"/>
-                <a:cs typeface="Times New Roman"/>
-              </a:rPr>
-              <a:t>Semi-structured interviews, recorded and transcribed verbatim.</a:t>
-            </a:r>
-          </a:p>
-          <a:p>
-            <a:pPr algn="l">
-              <a:lnSpc>
-                <a:spcPts val="1010"/>
-              </a:lnSpc>
-              <a:spcBef>
-                <a:spcPts val="0"/>
-              </a:spcBef>
-              <a:spcAft>
-                <a:spcPts val="0"/>
-              </a:spcAft>
-            </a:pPr>
-            <a:r>
-              <a:rPr sz="800" b="0" i="0">
-                <a:solidFill>
-                  <a:srgbClr val="3A4048"/>
-                </a:solidFill>
-                <a:latin typeface="Times New Roman"/>
-                <a:cs typeface="Times New Roman"/>
-              </a:rPr>
-              <a:t>Protocol piloted first, and pilot testers cannot become</a:t>
-            </a:r>
-          </a:p>
-          <a:p>
-            <a:pPr algn="l">
-              <a:lnSpc>
-                <a:spcPts val="1010"/>
-              </a:lnSpc>
-              <a:spcBef>
-                <a:spcPts val="0"/>
-              </a:spcBef>
-              <a:spcAft>
-                <a:spcPts val="0"/>
-              </a:spcAft>
-            </a:pPr>
-            <a:r>
-              <a:rPr sz="800" b="0" i="0">
-                <a:solidFill>
-                  <a:srgbClr val="3A4048"/>
-                </a:solidFill>
-                <a:latin typeface="Times New Roman"/>
-                <a:cs typeface="Times New Roman"/>
-              </a:rPr>
-              <a:t>participants</a:t>
-            </a:r>
-          </a:p>
-        </p:txBody>
-      </p:sp>
-      <p:sp>
-        <p:nvSpPr>
-          <p:cNvPr id="58" name="Rounded Rectangle 57"/>
-          <p:cNvSpPr/>
-          <p:nvPr/>
-        </p:nvSpPr>
-        <p:spPr>
-          <a:xfrm>
-            <a:off x="6178550" y="3901440"/>
-            <a:ext cx="40640" cy="40640"/>
-          </a:xfrm>
-          <a:prstGeom prst="roundRect">
-            <a:avLst>
-              <a:gd name="adj" fmla="val 50000"/>
-            </a:avLst>
-          </a:prstGeom>
-          <a:solidFill>
-            <a:srgbClr val="1C6B63"/>
-          </a:solidFill>
-          <a:ln>
-            <a:noFill/>
-          </a:ln>
-          <a:effectLst/>
-        </p:spPr>
-        <p:txBody>
-          <a:bodyPr rtlCol="0" anchor="ctr"/>
-          <a:lstStyle/>
-          <a:p>
-            <a:pPr algn="ctr"/>
-          </a:p>
-        </p:txBody>
-      </p:sp>
-      <p:sp>
-        <p:nvSpPr>
-          <p:cNvPr id="59" name="TextBox 58"/>
-          <p:cNvSpPr txBox="1"/>
-          <p:nvPr/>
-        </p:nvSpPr>
-        <p:spPr>
-          <a:xfrm>
-            <a:off x="6280150" y="3836924"/>
-            <a:ext cx="2625725" cy="317500"/>
-          </a:xfrm>
-          <a:prstGeom prst="rect">
-            <a:avLst/>
-          </a:prstGeom>
-          <a:noFill/>
-        </p:spPr>
-        <p:txBody>
-          <a:bodyPr wrap="square" lIns="0" rIns="0" tIns="0" bIns="0"/>
-          <a:lstStyle/>
-          <a:p>
-            <a:pPr algn="l">
-              <a:lnSpc>
-                <a:spcPts val="1010"/>
-              </a:lnSpc>
-              <a:spcBef>
-                <a:spcPts val="0"/>
-              </a:spcBef>
-              <a:spcAft>
-                <a:spcPts val="0"/>
-              </a:spcAft>
-            </a:pPr>
-            <a:r>
-              <a:rPr sz="800" b="0" i="0">
-                <a:solidFill>
-                  <a:srgbClr val="3A4048"/>
-                </a:solidFill>
-                <a:latin typeface="Times New Roman"/>
-                <a:cs typeface="Times New Roman"/>
-              </a:rPr>
-              <a:t>Encrypted storage, pseudonyms at transcription, named file</a:t>
-            </a:r>
-          </a:p>
-          <a:p>
-            <a:pPr algn="l">
-              <a:lnSpc>
-                <a:spcPts val="1010"/>
-              </a:lnSpc>
-              <a:spcBef>
-                <a:spcPts val="0"/>
-              </a:spcBef>
-              <a:spcAft>
-                <a:spcPts val="0"/>
-              </a:spcAft>
-            </a:pPr>
-            <a:r>
-              <a:rPr sz="800" b="0" i="0">
-                <a:solidFill>
-                  <a:srgbClr val="3A4048"/>
-                </a:solidFill>
-                <a:latin typeface="Times New Roman"/>
-                <a:cs typeface="Times New Roman"/>
-              </a:rPr>
-              <a:t>plan</a:t>
-            </a:r>
-          </a:p>
-        </p:txBody>
-      </p:sp>
-      <p:sp>
-        <p:nvSpPr>
-          <p:cNvPr id="60" name="Rounded Rectangle 59"/>
-          <p:cNvSpPr/>
-          <p:nvPr/>
-        </p:nvSpPr>
-        <p:spPr>
-          <a:xfrm>
-            <a:off x="6165850" y="4183379"/>
+            <a:off x="9032875" y="4154169"/>
             <a:ext cx="2727325" cy="177800"/>
           </a:xfrm>
           <a:prstGeom prst="roundRect">
@@ -6299,14 +7203,14 @@
       </p:sp>
       <p:sp>
         <p:nvSpPr>
-          <p:cNvPr id="61" name="TextBox 60"/>
+          <p:cNvPr id="85" name="TextBox 84"/>
           <p:cNvSpPr txBox="1"/>
           <p:nvPr/>
         </p:nvSpPr>
         <p:spPr>
           <a:xfrm>
-            <a:off x="6267450" y="4197705"/>
-            <a:ext cx="2161031" cy="137160"/>
+            <a:off x="9134475" y="4168495"/>
+            <a:ext cx="1810512" cy="137160"/>
           </a:xfrm>
           <a:prstGeom prst="rect">
             <a:avLst/>
@@ -6336,672 +7240,20 @@
                 <a:latin typeface="Consolas"/>
                 <a:cs typeface="Consolas"/>
               </a:rPr>
-              <a:t>6 · METHODOLOGY: DATA ANALYSIS</a:t>
-            </a:r>
-          </a:p>
-        </p:txBody>
-      </p:sp>
-      <p:sp>
-        <p:nvSpPr>
-          <p:cNvPr id="62" name="TextBox 61"/>
-          <p:cNvSpPr txBox="1"/>
-          <p:nvPr/>
-        </p:nvSpPr>
-        <p:spPr>
-          <a:xfrm>
-            <a:off x="6165850" y="4376166"/>
-            <a:ext cx="1678939" cy="133350"/>
-          </a:xfrm>
-          <a:prstGeom prst="rect">
-            <a:avLst/>
-          </a:prstGeom>
-          <a:noFill/>
-        </p:spPr>
-        <p:txBody>
-          <a:bodyPr wrap="none" lIns="0" rIns="0" tIns="0" bIns="0"/>
-          <a:lstStyle/>
-          <a:p>
-            <a:pPr algn="l">
-              <a:lnSpc>
-                <a:spcPct val="100000"/>
-              </a:lnSpc>
-              <a:spcBef>
-                <a:spcPts val="0"/>
-              </a:spcBef>
-              <a:spcAft>
-                <a:spcPts val="0"/>
-              </a:spcAft>
-            </a:pPr>
-            <a:r>
-              <a:rPr sz="700" b="1" i="0" spc="90">
-                <a:solidFill>
-                  <a:srgbClr val="1C6B63"/>
-                </a:solidFill>
-                <a:latin typeface="Consolas"/>
-                <a:cs typeface="Consolas"/>
-              </a:rPr>
-              <a:t>FIVE ACTIVITIES  ·  NVIVO</a:t>
-            </a:r>
-          </a:p>
-        </p:txBody>
-      </p:sp>
-      <p:sp>
-        <p:nvSpPr>
-          <p:cNvPr id="63" name="TextBox 62"/>
-          <p:cNvSpPr txBox="1"/>
-          <p:nvPr/>
-        </p:nvSpPr>
-        <p:spPr>
-          <a:xfrm>
-            <a:off x="6191250" y="4525264"/>
-            <a:ext cx="142240" cy="152400"/>
-          </a:xfrm>
-          <a:prstGeom prst="rect">
-            <a:avLst/>
-          </a:prstGeom>
-          <a:noFill/>
-        </p:spPr>
-        <p:txBody>
-          <a:bodyPr wrap="none" lIns="0" rIns="0" tIns="0" bIns="0"/>
-          <a:lstStyle/>
-          <a:p>
-            <a:pPr algn="l">
-              <a:lnSpc>
-                <a:spcPct val="100000"/>
-              </a:lnSpc>
-              <a:spcBef>
-                <a:spcPts val="0"/>
-              </a:spcBef>
-              <a:spcAft>
-                <a:spcPts val="0"/>
-              </a:spcAft>
-            </a:pPr>
-            <a:r>
-              <a:rPr sz="800" b="1" i="0">
-                <a:solidFill>
-                  <a:srgbClr val="B6862C"/>
-                </a:solidFill>
-                <a:latin typeface="Consolas"/>
-                <a:cs typeface="Consolas"/>
-              </a:rPr>
-              <a:t>1</a:t>
-            </a:r>
-          </a:p>
-        </p:txBody>
-      </p:sp>
-      <p:sp>
-        <p:nvSpPr>
-          <p:cNvPr id="64" name="TextBox 63"/>
-          <p:cNvSpPr txBox="1"/>
-          <p:nvPr/>
-        </p:nvSpPr>
-        <p:spPr>
-          <a:xfrm>
-            <a:off x="6305550" y="4525594"/>
-            <a:ext cx="2600325" cy="311658"/>
-          </a:xfrm>
-          <a:prstGeom prst="rect">
-            <a:avLst/>
-          </a:prstGeom>
-          <a:noFill/>
-        </p:spPr>
-        <p:txBody>
-          <a:bodyPr wrap="square" lIns="0" rIns="0" tIns="0" bIns="0"/>
-          <a:lstStyle/>
-          <a:p>
-            <a:pPr algn="l">
-              <a:lnSpc>
-                <a:spcPts val="990"/>
-              </a:lnSpc>
-              <a:spcBef>
-                <a:spcPts val="0"/>
-              </a:spcBef>
-              <a:spcAft>
-                <a:spcPts val="0"/>
-              </a:spcAft>
-            </a:pPr>
-            <a:r>
-              <a:rPr sz="790" b="0" i="0">
-                <a:solidFill>
-                  <a:srgbClr val="3A4048"/>
-                </a:solidFill>
-                <a:latin typeface="Times New Roman"/>
-                <a:cs typeface="Times New Roman"/>
-              </a:rPr>
-              <a:t>Managing and organising. NVivo, named file plan, secure</a:t>
-            </a:r>
-          </a:p>
-          <a:p>
-            <a:pPr algn="l">
-              <a:lnSpc>
-                <a:spcPts val="990"/>
-              </a:lnSpc>
-              <a:spcBef>
-                <a:spcPts val="0"/>
-              </a:spcBef>
-              <a:spcAft>
-                <a:spcPts val="0"/>
-              </a:spcAft>
-            </a:pPr>
-            <a:r>
-              <a:rPr sz="790" b="0" i="0">
-                <a:solidFill>
-                  <a:srgbClr val="3A4048"/>
-                </a:solidFill>
-                <a:latin typeface="Times New Roman"/>
-                <a:cs typeface="Times New Roman"/>
-              </a:rPr>
-              <a:t>storage.</a:t>
-            </a:r>
-          </a:p>
-        </p:txBody>
-      </p:sp>
-      <p:sp>
-        <p:nvSpPr>
-          <p:cNvPr id="65" name="TextBox 64"/>
-          <p:cNvSpPr txBox="1"/>
-          <p:nvPr/>
-        </p:nvSpPr>
-        <p:spPr>
-          <a:xfrm>
-            <a:off x="6191250" y="4802124"/>
-            <a:ext cx="142240" cy="152400"/>
-          </a:xfrm>
-          <a:prstGeom prst="rect">
-            <a:avLst/>
-          </a:prstGeom>
-          <a:noFill/>
-        </p:spPr>
-        <p:txBody>
-          <a:bodyPr wrap="none" lIns="0" rIns="0" tIns="0" bIns="0"/>
-          <a:lstStyle/>
-          <a:p>
-            <a:pPr algn="l">
-              <a:lnSpc>
-                <a:spcPct val="100000"/>
-              </a:lnSpc>
-              <a:spcBef>
-                <a:spcPts val="0"/>
-              </a:spcBef>
-              <a:spcAft>
-                <a:spcPts val="0"/>
-              </a:spcAft>
-            </a:pPr>
-            <a:r>
-              <a:rPr sz="800" b="1" i="0">
-                <a:solidFill>
-                  <a:srgbClr val="B6862C"/>
-                </a:solidFill>
-                <a:latin typeface="Consolas"/>
-                <a:cs typeface="Consolas"/>
-              </a:rPr>
-              <a:t>2</a:t>
-            </a:r>
-          </a:p>
-        </p:txBody>
-      </p:sp>
-      <p:sp>
-        <p:nvSpPr>
-          <p:cNvPr id="66" name="TextBox 65"/>
-          <p:cNvSpPr txBox="1"/>
-          <p:nvPr/>
-        </p:nvSpPr>
-        <p:spPr>
-          <a:xfrm>
-            <a:off x="6305550" y="4802454"/>
-            <a:ext cx="2600325" cy="311658"/>
-          </a:xfrm>
-          <a:prstGeom prst="rect">
-            <a:avLst/>
-          </a:prstGeom>
-          <a:noFill/>
-        </p:spPr>
-        <p:txBody>
-          <a:bodyPr wrap="square" lIns="0" rIns="0" tIns="0" bIns="0"/>
-          <a:lstStyle/>
-          <a:p>
-            <a:pPr algn="l">
-              <a:lnSpc>
-                <a:spcPts val="990"/>
-              </a:lnSpc>
-              <a:spcBef>
-                <a:spcPts val="0"/>
-              </a:spcBef>
-              <a:spcAft>
-                <a:spcPts val="0"/>
-              </a:spcAft>
-            </a:pPr>
-            <a:r>
-              <a:rPr sz="790" b="0" i="0">
-                <a:solidFill>
-                  <a:srgbClr val="3A4048"/>
-                </a:solidFill>
-                <a:latin typeface="Times New Roman"/>
-                <a:cs typeface="Times New Roman"/>
-              </a:rPr>
-              <a:t>Reading and memoing. A dated reflexive journal, kept as</a:t>
-            </a:r>
-          </a:p>
-          <a:p>
-            <a:pPr algn="l">
-              <a:lnSpc>
-                <a:spcPts val="990"/>
-              </a:lnSpc>
-              <a:spcBef>
-                <a:spcPts val="0"/>
-              </a:spcBef>
-              <a:spcAft>
-                <a:spcPts val="0"/>
-              </a:spcAft>
-            </a:pPr>
-            <a:r>
-              <a:rPr sz="790" b="0" i="0">
-                <a:solidFill>
-                  <a:srgbClr val="3A4048"/>
-                </a:solidFill>
-                <a:latin typeface="Times New Roman"/>
-                <a:cs typeface="Times New Roman"/>
-              </a:rPr>
-              <a:t>evidence.</a:t>
-            </a:r>
-          </a:p>
-        </p:txBody>
-      </p:sp>
-      <p:sp>
-        <p:nvSpPr>
-          <p:cNvPr id="67" name="TextBox 66"/>
-          <p:cNvSpPr txBox="1"/>
-          <p:nvPr/>
-        </p:nvSpPr>
-        <p:spPr>
-          <a:xfrm>
-            <a:off x="6191250" y="5078984"/>
-            <a:ext cx="142240" cy="152400"/>
-          </a:xfrm>
-          <a:prstGeom prst="rect">
-            <a:avLst/>
-          </a:prstGeom>
-          <a:noFill/>
-        </p:spPr>
-        <p:txBody>
-          <a:bodyPr wrap="none" lIns="0" rIns="0" tIns="0" bIns="0"/>
-          <a:lstStyle/>
-          <a:p>
-            <a:pPr algn="l">
-              <a:lnSpc>
-                <a:spcPct val="100000"/>
-              </a:lnSpc>
-              <a:spcBef>
-                <a:spcPts val="0"/>
-              </a:spcBef>
-              <a:spcAft>
-                <a:spcPts val="0"/>
-              </a:spcAft>
-            </a:pPr>
-            <a:r>
-              <a:rPr sz="800" b="1" i="0">
-                <a:solidFill>
-                  <a:srgbClr val="B6862C"/>
-                </a:solidFill>
-                <a:latin typeface="Consolas"/>
-                <a:cs typeface="Consolas"/>
-              </a:rPr>
-              <a:t>3</a:t>
-            </a:r>
-          </a:p>
-        </p:txBody>
-      </p:sp>
-      <p:sp>
-        <p:nvSpPr>
-          <p:cNvPr id="68" name="TextBox 67"/>
-          <p:cNvSpPr txBox="1"/>
-          <p:nvPr/>
-        </p:nvSpPr>
-        <p:spPr>
-          <a:xfrm>
-            <a:off x="6305550" y="5079314"/>
-            <a:ext cx="2600325" cy="311658"/>
-          </a:xfrm>
-          <a:prstGeom prst="rect">
-            <a:avLst/>
-          </a:prstGeom>
-          <a:noFill/>
-        </p:spPr>
-        <p:txBody>
-          <a:bodyPr wrap="square" lIns="0" rIns="0" tIns="0" bIns="0"/>
-          <a:lstStyle/>
-          <a:p>
-            <a:pPr algn="l">
-              <a:lnSpc>
-                <a:spcPts val="990"/>
-              </a:lnSpc>
-              <a:spcBef>
-                <a:spcPts val="0"/>
-              </a:spcBef>
-              <a:spcAft>
-                <a:spcPts val="0"/>
-              </a:spcAft>
-            </a:pPr>
-            <a:r>
-              <a:rPr sz="790" b="0" i="0">
-                <a:solidFill>
-                  <a:srgbClr val="3A4048"/>
-                </a:solidFill>
-                <a:latin typeface="Times New Roman"/>
-                <a:cs typeface="Times New Roman"/>
-              </a:rPr>
-              <a:t>Describing and classifying. Horizontalisation, meaning units,</a:t>
-            </a:r>
-          </a:p>
-          <a:p>
-            <a:pPr algn="l">
-              <a:lnSpc>
-                <a:spcPts val="990"/>
-              </a:lnSpc>
-              <a:spcBef>
-                <a:spcPts val="0"/>
-              </a:spcBef>
-              <a:spcAft>
-                <a:spcPts val="0"/>
-              </a:spcAft>
-            </a:pPr>
-            <a:r>
-              <a:rPr sz="790" b="0" i="0">
-                <a:solidFill>
-                  <a:srgbClr val="3A4048"/>
-                </a:solidFill>
-                <a:latin typeface="Times New Roman"/>
-                <a:cs typeface="Times New Roman"/>
-              </a:rPr>
-              <a:t>clusters.</a:t>
-            </a:r>
-          </a:p>
-        </p:txBody>
-      </p:sp>
-      <p:sp>
-        <p:nvSpPr>
-          <p:cNvPr id="69" name="TextBox 68"/>
-          <p:cNvSpPr txBox="1"/>
-          <p:nvPr/>
-        </p:nvSpPr>
-        <p:spPr>
-          <a:xfrm>
-            <a:off x="6191250" y="5355844"/>
-            <a:ext cx="142240" cy="152400"/>
-          </a:xfrm>
-          <a:prstGeom prst="rect">
-            <a:avLst/>
-          </a:prstGeom>
-          <a:noFill/>
-        </p:spPr>
-        <p:txBody>
-          <a:bodyPr wrap="none" lIns="0" rIns="0" tIns="0" bIns="0"/>
-          <a:lstStyle/>
-          <a:p>
-            <a:pPr algn="l">
-              <a:lnSpc>
-                <a:spcPct val="100000"/>
-              </a:lnSpc>
-              <a:spcBef>
-                <a:spcPts val="0"/>
-              </a:spcBef>
-              <a:spcAft>
-                <a:spcPts val="0"/>
-              </a:spcAft>
-            </a:pPr>
-            <a:r>
-              <a:rPr sz="800" b="1" i="0">
-                <a:solidFill>
-                  <a:srgbClr val="B6862C"/>
-                </a:solidFill>
-                <a:latin typeface="Consolas"/>
-                <a:cs typeface="Consolas"/>
-              </a:rPr>
-              <a:t>4</a:t>
-            </a:r>
-          </a:p>
-        </p:txBody>
-      </p:sp>
-      <p:sp>
-        <p:nvSpPr>
-          <p:cNvPr id="70" name="TextBox 69"/>
-          <p:cNvSpPr txBox="1"/>
-          <p:nvPr/>
-        </p:nvSpPr>
-        <p:spPr>
-          <a:xfrm>
-            <a:off x="6305550" y="5356174"/>
-            <a:ext cx="2600325" cy="311658"/>
-          </a:xfrm>
-          <a:prstGeom prst="rect">
-            <a:avLst/>
-          </a:prstGeom>
-          <a:noFill/>
-        </p:spPr>
-        <p:txBody>
-          <a:bodyPr wrap="square" lIns="0" rIns="0" tIns="0" bIns="0"/>
-          <a:lstStyle/>
-          <a:p>
-            <a:pPr algn="l">
-              <a:lnSpc>
-                <a:spcPts val="990"/>
-              </a:lnSpc>
-              <a:spcBef>
-                <a:spcPts val="0"/>
-              </a:spcBef>
-              <a:spcAft>
-                <a:spcPts val="0"/>
-              </a:spcAft>
-            </a:pPr>
-            <a:r>
-              <a:rPr sz="790" b="0" i="0">
-                <a:solidFill>
-                  <a:srgbClr val="3A4048"/>
-                </a:solidFill>
-                <a:latin typeface="Times New Roman"/>
-                <a:cs typeface="Times New Roman"/>
-              </a:rPr>
-              <a:t>Developing interpretations. Textural and structural, then a</a:t>
-            </a:r>
-          </a:p>
-          <a:p>
-            <a:pPr algn="l">
-              <a:lnSpc>
-                <a:spcPts val="990"/>
-              </a:lnSpc>
-              <a:spcBef>
-                <a:spcPts val="0"/>
-              </a:spcBef>
-              <a:spcAft>
-                <a:spcPts val="0"/>
-              </a:spcAft>
-            </a:pPr>
-            <a:r>
-              <a:rPr sz="790" b="0" i="0">
-                <a:solidFill>
-                  <a:srgbClr val="3A4048"/>
-                </a:solidFill>
-                <a:latin typeface="Times New Roman"/>
-                <a:cs typeface="Times New Roman"/>
-              </a:rPr>
-              <a:t>composite.</a:t>
-            </a:r>
-          </a:p>
-        </p:txBody>
-      </p:sp>
-      <p:sp>
-        <p:nvSpPr>
-          <p:cNvPr id="71" name="TextBox 70"/>
-          <p:cNvSpPr txBox="1"/>
-          <p:nvPr/>
-        </p:nvSpPr>
-        <p:spPr>
-          <a:xfrm>
-            <a:off x="6191250" y="5632704"/>
-            <a:ext cx="142240" cy="152400"/>
-          </a:xfrm>
-          <a:prstGeom prst="rect">
-            <a:avLst/>
-          </a:prstGeom>
-          <a:noFill/>
-        </p:spPr>
-        <p:txBody>
-          <a:bodyPr wrap="none" lIns="0" rIns="0" tIns="0" bIns="0"/>
-          <a:lstStyle/>
-          <a:p>
-            <a:pPr algn="l">
-              <a:lnSpc>
-                <a:spcPct val="100000"/>
-              </a:lnSpc>
-              <a:spcBef>
-                <a:spcPts val="0"/>
-              </a:spcBef>
-              <a:spcAft>
-                <a:spcPts val="0"/>
-              </a:spcAft>
-            </a:pPr>
-            <a:r>
-              <a:rPr sz="800" b="1" i="0">
-                <a:solidFill>
-                  <a:srgbClr val="B6862C"/>
-                </a:solidFill>
-                <a:latin typeface="Consolas"/>
-                <a:cs typeface="Consolas"/>
-              </a:rPr>
-              <a:t>5</a:t>
-            </a:r>
-          </a:p>
-        </p:txBody>
-      </p:sp>
-      <p:sp>
-        <p:nvSpPr>
-          <p:cNvPr id="72" name="TextBox 71"/>
-          <p:cNvSpPr txBox="1"/>
-          <p:nvPr/>
-        </p:nvSpPr>
-        <p:spPr>
-          <a:xfrm>
-            <a:off x="6305550" y="5633034"/>
-            <a:ext cx="2600325" cy="185928"/>
-          </a:xfrm>
-          <a:prstGeom prst="rect">
-            <a:avLst/>
-          </a:prstGeom>
-          <a:noFill/>
-        </p:spPr>
-        <p:txBody>
-          <a:bodyPr wrap="square" lIns="0" rIns="0" tIns="0" bIns="0"/>
-          <a:lstStyle/>
-          <a:p>
-            <a:pPr algn="l">
-              <a:lnSpc>
-                <a:spcPts val="990"/>
-              </a:lnSpc>
-              <a:spcBef>
-                <a:spcPts val="0"/>
-              </a:spcBef>
-              <a:spcAft>
-                <a:spcPts val="0"/>
-              </a:spcAft>
-            </a:pPr>
-            <a:r>
-              <a:rPr sz="790" b="0" i="0">
-                <a:solidFill>
-                  <a:srgbClr val="3A4048"/>
-                </a:solidFill>
-                <a:latin typeface="Times New Roman"/>
-                <a:cs typeface="Times New Roman"/>
-              </a:rPr>
-              <a:t>Representing. A thematic map and a composite narrative.</a:t>
-            </a:r>
-          </a:p>
-        </p:txBody>
-      </p:sp>
-      <p:sp>
-        <p:nvSpPr>
-          <p:cNvPr id="73" name="Rounded Rectangle 72"/>
+              <a:t>9 · POTENTIAL LIMITATIONS</a:t>
+            </a:r>
+          </a:p>
+        </p:txBody>
+      </p:sp>
+      <p:sp>
+        <p:nvSpPr>
+          <p:cNvPr id="86" name="Rounded Rectangle 85"/>
           <p:cNvSpPr/>
           <p:nvPr/>
         </p:nvSpPr>
         <p:spPr>
           <a:xfrm>
-            <a:off x="9032875" y="1752600"/>
-            <a:ext cx="2727325" cy="177800"/>
-          </a:xfrm>
-          <a:prstGeom prst="roundRect">
-            <a:avLst>
-              <a:gd name="adj" fmla="val 14285"/>
-            </a:avLst>
-          </a:prstGeom>
-          <a:solidFill>
-            <a:srgbClr val="081E3F"/>
-          </a:solidFill>
-          <a:ln>
-            <a:noFill/>
-          </a:ln>
-          <a:effectLst/>
-        </p:spPr>
-        <p:txBody>
-          <a:bodyPr rtlCol="0" anchor="ctr"/>
-          <a:lstStyle/>
-          <a:p>
-            <a:pPr algn="ctr"/>
-          </a:p>
-        </p:txBody>
-      </p:sp>
-      <p:sp>
-        <p:nvSpPr>
-          <p:cNvPr id="74" name="TextBox 73"/>
-          <p:cNvSpPr txBox="1"/>
-          <p:nvPr/>
-        </p:nvSpPr>
-        <p:spPr>
-          <a:xfrm>
-            <a:off x="9134475" y="1766925"/>
-            <a:ext cx="1810512" cy="137160"/>
-          </a:xfrm>
-          <a:prstGeom prst="rect">
-            <a:avLst/>
-          </a:prstGeom>
-          <a:noFill/>
-        </p:spPr>
-        <p:txBody>
-          <a:bodyPr wrap="none" lIns="0" rIns="0" tIns="0" bIns="0"/>
-          <a:lstStyle/>
-          <a:p>
-            <a:pPr algn="l">
-              <a:lnSpc>
-                <a:spcPct val="100000"/>
-              </a:lnSpc>
-              <a:spcBef>
-                <a:spcPts val="0"/>
-              </a:spcBef>
-              <a:spcAft>
-                <a:spcPts val="0"/>
-              </a:spcAft>
-            </a:pPr>
-            <a:r>
-              <a:rPr sz="720" b="1" i="0" spc="120">
-                <a:solidFill>
-                  <a:srgbClr val="FFFFFF"/>
-                </a:solidFill>
-                <a:latin typeface="Consolas"/>
-                <a:cs typeface="Consolas"/>
-              </a:rPr>
-              <a:t>7 · ETHICS AND VALIDATION</a:t>
-            </a:r>
-          </a:p>
-        </p:txBody>
-      </p:sp>
-      <p:sp>
-        <p:nvSpPr>
-          <p:cNvPr id="75" name="Rounded Rectangle 74"/>
-          <p:cNvSpPr/>
-          <p:nvPr/>
-        </p:nvSpPr>
-        <p:spPr>
-          <a:xfrm>
-            <a:off x="9045575" y="2032000"/>
+            <a:off x="9045575" y="4433569"/>
             <a:ext cx="40640" cy="40640"/>
           </a:xfrm>
           <a:prstGeom prst="roundRect">
@@ -7027,13 +7279,13 @@
       </p:sp>
       <p:sp>
         <p:nvSpPr>
-          <p:cNvPr id="76" name="TextBox 75"/>
+          <p:cNvPr id="87" name="TextBox 86"/>
           <p:cNvSpPr txBox="1"/>
           <p:nvPr/>
         </p:nvSpPr>
         <p:spPr>
           <a:xfrm>
-            <a:off x="9147175" y="1967483"/>
+            <a:off x="9147175" y="4369053"/>
             <a:ext cx="2625725" cy="189229"/>
           </a:xfrm>
           <a:prstGeom prst="rect">
@@ -7064,20 +7316,20 @@
                 <a:latin typeface="Times New Roman"/>
                 <a:cs typeface="Times New Roman"/>
               </a:rPr>
-              <a:t>Written informed consent before recording begins</a:t>
-            </a:r>
-          </a:p>
-        </p:txBody>
-      </p:sp>
-      <p:sp>
-        <p:nvSpPr>
-          <p:cNvPr id="77" name="Rounded Rectangle 76"/>
+              <a:t>Retrospective accounts of a past experience</a:t>
+            </a:r>
+          </a:p>
+        </p:txBody>
+      </p:sp>
+      <p:sp>
+        <p:nvSpPr>
+          <p:cNvPr id="88" name="Rounded Rectangle 87"/>
           <p:cNvSpPr/>
           <p:nvPr/>
         </p:nvSpPr>
         <p:spPr>
           <a:xfrm>
-            <a:off x="9045575" y="2198370"/>
+            <a:off x="9045575" y="4599939"/>
             <a:ext cx="40640" cy="40640"/>
           </a:xfrm>
           <a:prstGeom prst="roundRect">
@@ -7103,13 +7355,13 @@
       </p:sp>
       <p:sp>
         <p:nvSpPr>
-          <p:cNvPr id="78" name="TextBox 77"/>
+          <p:cNvPr id="89" name="TextBox 88"/>
           <p:cNvSpPr txBox="1"/>
           <p:nvPr/>
         </p:nvSpPr>
         <p:spPr>
           <a:xfrm>
-            <a:off x="9147175" y="2133854"/>
+            <a:off x="9147175" y="4535423"/>
             <a:ext cx="2625725" cy="189229"/>
           </a:xfrm>
           <a:prstGeom prst="rect">
@@ -7140,20 +7392,20 @@
                 <a:latin typeface="Times New Roman"/>
                 <a:cs typeface="Times New Roman"/>
               </a:rPr>
-              <a:t>IRB determination confirmed before any contact, not assumed</a:t>
-            </a:r>
-          </a:p>
-        </p:txBody>
-      </p:sp>
-      <p:sp>
-        <p:nvSpPr>
-          <p:cNvPr id="79" name="Rounded Rectangle 78"/>
+              <a:t>Insider researcher: bias managed, not eliminated</a:t>
+            </a:r>
+          </a:p>
+        </p:txBody>
+      </p:sp>
+      <p:sp>
+        <p:nvSpPr>
+          <p:cNvPr id="90" name="Rounded Rectangle 89"/>
           <p:cNvSpPr/>
           <p:nvPr/>
         </p:nvSpPr>
         <p:spPr>
           <a:xfrm>
-            <a:off x="9045575" y="2364740"/>
+            <a:off x="9045575" y="4766309"/>
             <a:ext cx="40640" cy="40640"/>
           </a:xfrm>
           <a:prstGeom prst="roundRect">
@@ -7179,14 +7431,14 @@
       </p:sp>
       <p:sp>
         <p:nvSpPr>
-          <p:cNvPr id="80" name="TextBox 79"/>
+          <p:cNvPr id="91" name="TextBox 90"/>
           <p:cNvSpPr txBox="1"/>
           <p:nvPr/>
         </p:nvSpPr>
         <p:spPr>
           <a:xfrm>
-            <a:off x="9147175" y="2300223"/>
-            <a:ext cx="2625725" cy="317500"/>
+            <a:off x="9147175" y="4701794"/>
+            <a:ext cx="2625725" cy="189229"/>
           </a:xfrm>
           <a:prstGeom prst="rect">
             <a:avLst/>
@@ -7216,1069 +7468,25 @@
                 <a:latin typeface="Times New Roman"/>
                 <a:cs typeface="Times New Roman"/>
               </a:rPr>
-              <a:t>Pseudonyms at transcription. No client, engagement or</a:t>
-            </a:r>
-          </a:p>
-          <a:p>
-            <a:pPr algn="l">
-              <a:lnSpc>
-                <a:spcPts val="1010"/>
-              </a:lnSpc>
-              <a:spcBef>
-                <a:spcPts val="0"/>
-              </a:spcBef>
-              <a:spcAft>
-                <a:spcPts val="0"/>
-              </a:spcAft>
-            </a:pPr>
-            <a:r>
-              <a:rPr sz="800" b="0" i="0">
-                <a:solidFill>
-                  <a:srgbClr val="3A4048"/>
-                </a:solidFill>
-                <a:latin typeface="Times New Roman"/>
-                <a:cs typeface="Times New Roman"/>
-              </a:rPr>
-              <a:t>firm-identifying detail</a:t>
-            </a:r>
-          </a:p>
-        </p:txBody>
-      </p:sp>
-      <p:sp>
-        <p:nvSpPr>
-          <p:cNvPr id="81" name="Rounded Rectangle 80"/>
+              <a:t>Small purposive sample; not intended to generalise</a:t>
+            </a:r>
+          </a:p>
+        </p:txBody>
+      </p:sp>
+      <p:sp>
+        <p:nvSpPr>
+          <p:cNvPr id="92" name="Rounded Rectangle 91"/>
           <p:cNvSpPr/>
           <p:nvPr/>
         </p:nvSpPr>
         <p:spPr>
           <a:xfrm>
-            <a:off x="9045575" y="2659379"/>
-            <a:ext cx="40640" cy="40640"/>
+            <a:off x="431800" y="5740400"/>
+            <a:ext cx="11328400" cy="330200"/>
           </a:xfrm>
           <a:prstGeom prst="roundRect">
             <a:avLst>
-              <a:gd name="adj" fmla="val 50000"/>
-            </a:avLst>
-          </a:prstGeom>
-          <a:solidFill>
-            <a:srgbClr val="8C3A1B"/>
-          </a:solidFill>
-          <a:ln>
-            <a:noFill/>
-          </a:ln>
-          <a:effectLst/>
-        </p:spPr>
-        <p:txBody>
-          <a:bodyPr rtlCol="0" anchor="ctr"/>
-          <a:lstStyle/>
-          <a:p>
-            <a:pPr algn="ctr"/>
-          </a:p>
-        </p:txBody>
-      </p:sp>
-      <p:sp>
-        <p:nvSpPr>
-          <p:cNvPr id="82" name="TextBox 81"/>
-          <p:cNvSpPr txBox="1"/>
-          <p:nvPr/>
-        </p:nvSpPr>
-        <p:spPr>
-          <a:xfrm>
-            <a:off x="9147175" y="2594863"/>
-            <a:ext cx="2625725" cy="189229"/>
-          </a:xfrm>
-          <a:prstGeom prst="rect">
-            <a:avLst/>
-          </a:prstGeom>
-          <a:noFill/>
-        </p:spPr>
-        <p:txBody>
-          <a:bodyPr wrap="square" lIns="0" rIns="0" tIns="0" bIns="0"/>
-          <a:lstStyle/>
-          <a:p>
-            <a:pPr algn="l">
-              <a:lnSpc>
-                <a:spcPts val="1010"/>
-              </a:lnSpc>
-              <a:spcBef>
-                <a:spcPts val="0"/>
-              </a:spcBef>
-              <a:spcAft>
-                <a:spcPts val="0"/>
-              </a:spcAft>
-            </a:pPr>
-            <a:r>
-              <a:rPr sz="800" b="0" i="0">
-                <a:solidFill>
-                  <a:srgbClr val="3A4048"/>
-                </a:solidFill>
-                <a:latin typeface="Times New Roman"/>
-                <a:cs typeface="Times New Roman"/>
-              </a:rPr>
-              <a:t>Withdrawal at any point, data destroyed on request</a:t>
-            </a:r>
-          </a:p>
-        </p:txBody>
-      </p:sp>
-      <p:sp>
-        <p:nvSpPr>
-          <p:cNvPr id="83" name="Rounded Rectangle 82"/>
-          <p:cNvSpPr/>
-          <p:nvPr/>
-        </p:nvSpPr>
-        <p:spPr>
-          <a:xfrm>
-            <a:off x="9045575" y="2825749"/>
-            <a:ext cx="40640" cy="40640"/>
-          </a:xfrm>
-          <a:prstGeom prst="roundRect">
-            <a:avLst>
-              <a:gd name="adj" fmla="val 50000"/>
-            </a:avLst>
-          </a:prstGeom>
-          <a:solidFill>
-            <a:srgbClr val="8C3A1B"/>
-          </a:solidFill>
-          <a:ln>
-            <a:noFill/>
-          </a:ln>
-          <a:effectLst/>
-        </p:spPr>
-        <p:txBody>
-          <a:bodyPr rtlCol="0" anchor="ctr"/>
-          <a:lstStyle/>
-          <a:p>
-            <a:pPr algn="ctr"/>
-          </a:p>
-        </p:txBody>
-      </p:sp>
-      <p:sp>
-        <p:nvSpPr>
-          <p:cNvPr id="84" name="TextBox 83"/>
-          <p:cNvSpPr txBox="1"/>
-          <p:nvPr/>
-        </p:nvSpPr>
-        <p:spPr>
-          <a:xfrm>
-            <a:off x="9147175" y="2761233"/>
-            <a:ext cx="2625725" cy="317500"/>
-          </a:xfrm>
-          <a:prstGeom prst="rect">
-            <a:avLst/>
-          </a:prstGeom>
-          <a:noFill/>
-        </p:spPr>
-        <p:txBody>
-          <a:bodyPr wrap="square" lIns="0" rIns="0" tIns="0" bIns="0"/>
-          <a:lstStyle/>
-          <a:p>
-            <a:pPr algn="l">
-              <a:lnSpc>
-                <a:spcPts val="1010"/>
-              </a:lnSpc>
-              <a:spcBef>
-                <a:spcPts val="0"/>
-              </a:spcBef>
-              <a:spcAft>
-                <a:spcPts val="0"/>
-              </a:spcAft>
-            </a:pPr>
-            <a:r>
-              <a:rPr sz="800" b="0" i="0">
-                <a:solidFill>
-                  <a:srgbClr val="3A4048"/>
-                </a:solidFill>
-                <a:latin typeface="Times New Roman"/>
-                <a:cs typeface="Times New Roman"/>
-              </a:rPr>
-              <a:t>Validation: confirmation hazard log, disconfirming cases,</a:t>
-            </a:r>
-          </a:p>
-          <a:p>
-            <a:pPr algn="l">
-              <a:lnSpc>
-                <a:spcPts val="1010"/>
-              </a:lnSpc>
-              <a:spcBef>
-                <a:spcPts val="0"/>
-              </a:spcBef>
-              <a:spcAft>
-                <a:spcPts val="0"/>
-              </a:spcAft>
-            </a:pPr>
-            <a:r>
-              <a:rPr sz="800" b="0" i="0">
-                <a:solidFill>
-                  <a:srgbClr val="3A4048"/>
-                </a:solidFill>
-                <a:latin typeface="Times New Roman"/>
-                <a:cs typeface="Times New Roman"/>
-              </a:rPr>
-              <a:t>member checking, audit trail</a:t>
-            </a:r>
-          </a:p>
-        </p:txBody>
-      </p:sp>
-      <p:sp>
-        <p:nvSpPr>
-          <p:cNvPr id="85" name="Rounded Rectangle 84"/>
-          <p:cNvSpPr/>
-          <p:nvPr/>
-        </p:nvSpPr>
-        <p:spPr>
-          <a:xfrm>
-            <a:off x="9045575" y="3120389"/>
-            <a:ext cx="40640" cy="40640"/>
-          </a:xfrm>
-          <a:prstGeom prst="roundRect">
-            <a:avLst>
-              <a:gd name="adj" fmla="val 50000"/>
-            </a:avLst>
-          </a:prstGeom>
-          <a:solidFill>
-            <a:srgbClr val="8C3A1B"/>
-          </a:solidFill>
-          <a:ln>
-            <a:noFill/>
-          </a:ln>
-          <a:effectLst/>
-        </p:spPr>
-        <p:txBody>
-          <a:bodyPr rtlCol="0" anchor="ctr"/>
-          <a:lstStyle/>
-          <a:p>
-            <a:pPr algn="ctr"/>
-          </a:p>
-        </p:txBody>
-      </p:sp>
-      <p:sp>
-        <p:nvSpPr>
-          <p:cNvPr id="86" name="TextBox 85"/>
-          <p:cNvSpPr txBox="1"/>
-          <p:nvPr/>
-        </p:nvSpPr>
-        <p:spPr>
-          <a:xfrm>
-            <a:off x="9147175" y="3055873"/>
-            <a:ext cx="2625725" cy="317500"/>
-          </a:xfrm>
-          <a:prstGeom prst="rect">
-            <a:avLst/>
-          </a:prstGeom>
-          <a:noFill/>
-        </p:spPr>
-        <p:txBody>
-          <a:bodyPr wrap="square" lIns="0" rIns="0" tIns="0" bIns="0"/>
-          <a:lstStyle/>
-          <a:p>
-            <a:pPr algn="l">
-              <a:lnSpc>
-                <a:spcPts val="1010"/>
-              </a:lnSpc>
-              <a:spcBef>
-                <a:spcPts val="0"/>
-              </a:spcBef>
-              <a:spcAft>
-                <a:spcPts val="0"/>
-              </a:spcAft>
-            </a:pPr>
-            <a:r>
-              <a:rPr sz="800" b="0" i="0">
-                <a:solidFill>
-                  <a:srgbClr val="3A4048"/>
-                </a:solidFill>
-                <a:latin typeface="Times New Roman"/>
-                <a:cs typeface="Times New Roman"/>
-              </a:rPr>
-              <a:t>No confidential data to any public AI platform. AI use</a:t>
-            </a:r>
-          </a:p>
-          <a:p>
-            <a:pPr algn="l">
-              <a:lnSpc>
-                <a:spcPts val="1010"/>
-              </a:lnSpc>
-              <a:spcBef>
-                <a:spcPts val="0"/>
-              </a:spcBef>
-              <a:spcAft>
-                <a:spcPts val="0"/>
-              </a:spcAft>
-            </a:pPr>
-            <a:r>
-              <a:rPr sz="800" b="0" i="0">
-                <a:solidFill>
-                  <a:srgbClr val="3A4048"/>
-                </a:solidFill>
-                <a:latin typeface="Times New Roman"/>
-                <a:cs typeface="Times New Roman"/>
-              </a:rPr>
-              <a:t>disclosed per FIU policy</a:t>
-            </a:r>
-          </a:p>
-        </p:txBody>
-      </p:sp>
-      <p:sp>
-        <p:nvSpPr>
-          <p:cNvPr id="87" name="Rounded Rectangle 86"/>
-          <p:cNvSpPr/>
-          <p:nvPr/>
-        </p:nvSpPr>
-        <p:spPr>
-          <a:xfrm>
-            <a:off x="9032875" y="3402329"/>
-            <a:ext cx="2727325" cy="177800"/>
-          </a:xfrm>
-          <a:prstGeom prst="roundRect">
-            <a:avLst>
-              <a:gd name="adj" fmla="val 14285"/>
-            </a:avLst>
-          </a:prstGeom>
-          <a:solidFill>
-            <a:srgbClr val="081E3F"/>
-          </a:solidFill>
-          <a:ln>
-            <a:noFill/>
-          </a:ln>
-          <a:effectLst/>
-        </p:spPr>
-        <p:txBody>
-          <a:bodyPr rtlCol="0" anchor="ctr"/>
-          <a:lstStyle/>
-          <a:p>
-            <a:pPr algn="ctr"/>
-          </a:p>
-        </p:txBody>
-      </p:sp>
-      <p:sp>
-        <p:nvSpPr>
-          <p:cNvPr id="88" name="TextBox 87"/>
-          <p:cNvSpPr txBox="1"/>
-          <p:nvPr/>
-        </p:nvSpPr>
-        <p:spPr>
-          <a:xfrm>
-            <a:off x="9134475" y="3416655"/>
-            <a:ext cx="1810512" cy="137160"/>
-          </a:xfrm>
-          <a:prstGeom prst="rect">
-            <a:avLst/>
-          </a:prstGeom>
-          <a:noFill/>
-        </p:spPr>
-        <p:txBody>
-          <a:bodyPr wrap="none" lIns="0" rIns="0" tIns="0" bIns="0"/>
-          <a:lstStyle/>
-          <a:p>
-            <a:pPr algn="l">
-              <a:lnSpc>
-                <a:spcPct val="100000"/>
-              </a:lnSpc>
-              <a:spcBef>
-                <a:spcPts val="0"/>
-              </a:spcBef>
-              <a:spcAft>
-                <a:spcPts val="0"/>
-              </a:spcAft>
-            </a:pPr>
-            <a:r>
-              <a:rPr sz="720" b="1" i="0" spc="120">
-                <a:solidFill>
-                  <a:srgbClr val="FFFFFF"/>
-                </a:solidFill>
-                <a:latin typeface="Consolas"/>
-                <a:cs typeface="Consolas"/>
-              </a:rPr>
-              <a:t>8 · DESIRED CONTRIBUTIONS</a:t>
-            </a:r>
-          </a:p>
-        </p:txBody>
-      </p:sp>
-      <p:sp>
-        <p:nvSpPr>
-          <p:cNvPr id="89" name="TextBox 88"/>
-          <p:cNvSpPr txBox="1"/>
-          <p:nvPr/>
-        </p:nvSpPr>
-        <p:spPr>
-          <a:xfrm>
-            <a:off x="9032875" y="3595116"/>
-            <a:ext cx="784860" cy="133350"/>
-          </a:xfrm>
-          <a:prstGeom prst="rect">
-            <a:avLst/>
-          </a:prstGeom>
-          <a:noFill/>
-        </p:spPr>
-        <p:txBody>
-          <a:bodyPr wrap="none" lIns="0" rIns="0" tIns="0" bIns="0"/>
-          <a:lstStyle/>
-          <a:p>
-            <a:pPr algn="l">
-              <a:lnSpc>
-                <a:spcPct val="100000"/>
-              </a:lnSpc>
-              <a:spcBef>
-                <a:spcPts val="0"/>
-              </a:spcBef>
-              <a:spcAft>
-                <a:spcPts val="0"/>
-              </a:spcAft>
-            </a:pPr>
-            <a:r>
-              <a:rPr sz="700" b="1" i="0" spc="100">
-                <a:solidFill>
-                  <a:srgbClr val="8A6A1F"/>
-                </a:solidFill>
-                <a:latin typeface="Consolas"/>
-                <a:cs typeface="Consolas"/>
-              </a:rPr>
-              <a:t>TO PRACTICE</a:t>
-            </a:r>
-          </a:p>
-        </p:txBody>
-      </p:sp>
-      <p:sp>
-        <p:nvSpPr>
-          <p:cNvPr id="90" name="TextBox 89"/>
-          <p:cNvSpPr txBox="1"/>
-          <p:nvPr/>
-        </p:nvSpPr>
-        <p:spPr>
-          <a:xfrm>
-            <a:off x="9032875" y="3731514"/>
-            <a:ext cx="2740025" cy="445769"/>
-          </a:xfrm>
-          <a:prstGeom prst="rect">
-            <a:avLst/>
-          </a:prstGeom>
-          <a:noFill/>
-        </p:spPr>
-        <p:txBody>
-          <a:bodyPr wrap="square" lIns="0" rIns="0" tIns="0" bIns="0"/>
-          <a:lstStyle/>
-          <a:p>
-            <a:pPr algn="l">
-              <a:lnSpc>
-                <a:spcPts val="1010"/>
-              </a:lnSpc>
-              <a:spcBef>
-                <a:spcPts val="0"/>
-              </a:spcBef>
-              <a:spcAft>
-                <a:spcPts val="0"/>
-              </a:spcAft>
-            </a:pPr>
-            <a:r>
-              <a:rPr sz="800" b="0" i="0">
-                <a:solidFill>
-                  <a:srgbClr val="3A4048"/>
-                </a:solidFill>
-                <a:latin typeface="Times New Roman"/>
-                <a:cs typeface="Times New Roman"/>
-              </a:rPr>
-              <a:t>Firms and regulators are writing AI-use policy on the assumption</a:t>
-            </a:r>
-          </a:p>
-          <a:p>
-            <a:pPr algn="l">
-              <a:lnSpc>
-                <a:spcPts val="1010"/>
-              </a:lnSpc>
-              <a:spcBef>
-                <a:spcPts val="0"/>
-              </a:spcBef>
-              <a:spcAft>
-                <a:spcPts val="0"/>
-              </a:spcAft>
-            </a:pPr>
-            <a:r>
-              <a:rPr sz="800" b="0" i="0">
-                <a:solidFill>
-                  <a:srgbClr val="3A4048"/>
-                </a:solidFill>
-                <a:latin typeface="Times New Roman"/>
-                <a:cs typeface="Times New Roman"/>
-              </a:rPr>
-              <a:t>that human review is a working control. This describes what that</a:t>
-            </a:r>
-          </a:p>
-          <a:p>
-            <a:pPr algn="l">
-              <a:lnSpc>
-                <a:spcPts val="1010"/>
-              </a:lnSpc>
-              <a:spcBef>
-                <a:spcPts val="0"/>
-              </a:spcBef>
-              <a:spcAft>
-                <a:spcPts val="0"/>
-              </a:spcAft>
-            </a:pPr>
-            <a:r>
-              <a:rPr sz="800" b="0" i="0">
-                <a:solidFill>
-                  <a:srgbClr val="3A4048"/>
-                </a:solidFill>
-                <a:latin typeface="Times New Roman"/>
-                <a:cs typeface="Times New Roman"/>
-              </a:rPr>
-              <a:t>review is actually like from inside it.</a:t>
-            </a:r>
-          </a:p>
-        </p:txBody>
-      </p:sp>
-      <p:sp>
-        <p:nvSpPr>
-          <p:cNvPr id="91" name="TextBox 90"/>
-          <p:cNvSpPr txBox="1"/>
-          <p:nvPr/>
-        </p:nvSpPr>
-        <p:spPr>
-          <a:xfrm>
-            <a:off x="9032875" y="4145026"/>
-            <a:ext cx="784860" cy="133350"/>
-          </a:xfrm>
-          <a:prstGeom prst="rect">
-            <a:avLst/>
-          </a:prstGeom>
-          <a:noFill/>
-        </p:spPr>
-        <p:txBody>
-          <a:bodyPr wrap="none" lIns="0" rIns="0" tIns="0" bIns="0"/>
-          <a:lstStyle/>
-          <a:p>
-            <a:pPr algn="l">
-              <a:lnSpc>
-                <a:spcPct val="100000"/>
-              </a:lnSpc>
-              <a:spcBef>
-                <a:spcPts val="0"/>
-              </a:spcBef>
-              <a:spcAft>
-                <a:spcPts val="0"/>
-              </a:spcAft>
-            </a:pPr>
-            <a:r>
-              <a:rPr sz="700" b="1" i="0" spc="100">
-                <a:solidFill>
-                  <a:srgbClr val="8A6A1F"/>
-                </a:solidFill>
-                <a:latin typeface="Consolas"/>
-                <a:cs typeface="Consolas"/>
-              </a:rPr>
-              <a:t>TO ACADEMIA</a:t>
-            </a:r>
-          </a:p>
-        </p:txBody>
-      </p:sp>
-      <p:sp>
-        <p:nvSpPr>
-          <p:cNvPr id="92" name="TextBox 91"/>
-          <p:cNvSpPr txBox="1"/>
-          <p:nvPr/>
-        </p:nvSpPr>
-        <p:spPr>
-          <a:xfrm>
-            <a:off x="9032875" y="4281424"/>
-            <a:ext cx="2740025" cy="317500"/>
-          </a:xfrm>
-          <a:prstGeom prst="rect">
-            <a:avLst/>
-          </a:prstGeom>
-          <a:noFill/>
-        </p:spPr>
-        <p:txBody>
-          <a:bodyPr wrap="square" lIns="0" rIns="0" tIns="0" bIns="0"/>
-          <a:lstStyle/>
-          <a:p>
-            <a:pPr algn="l">
-              <a:lnSpc>
-                <a:spcPts val="1010"/>
-              </a:lnSpc>
-              <a:spcBef>
-                <a:spcPts val="0"/>
-              </a:spcBef>
-              <a:spcAft>
-                <a:spcPts val="0"/>
-              </a:spcAft>
-            </a:pPr>
-            <a:r>
-              <a:rPr sz="800" b="0" i="0">
-                <a:solidFill>
-                  <a:srgbClr val="3A4048"/>
-                </a:solidFill>
-                <a:latin typeface="Times New Roman"/>
-                <a:cs typeface="Times New Roman"/>
-              </a:rPr>
-              <a:t>It separates automation bias from sycophancy, which measures of</a:t>
-            </a:r>
-          </a:p>
-          <a:p>
-            <a:pPr algn="l">
-              <a:lnSpc>
-                <a:spcPts val="1010"/>
-              </a:lnSpc>
-              <a:spcBef>
-                <a:spcPts val="0"/>
-              </a:spcBef>
-              <a:spcAft>
-                <a:spcPts val="0"/>
-              </a:spcAft>
-            </a:pPr>
-            <a:r>
-              <a:rPr sz="800" b="0" i="0">
-                <a:solidFill>
-                  <a:srgbClr val="3A4048"/>
-                </a:solidFill>
-                <a:latin typeface="Times New Roman"/>
-                <a:cs typeface="Times New Roman"/>
-              </a:rPr>
-              <a:t>how much someone relied on a machine cannot distinguish.</a:t>
-            </a:r>
-          </a:p>
-        </p:txBody>
-      </p:sp>
-      <p:sp>
-        <p:nvSpPr>
-          <p:cNvPr id="93" name="Rounded Rectangle 92"/>
-          <p:cNvSpPr/>
-          <p:nvPr/>
-        </p:nvSpPr>
-        <p:spPr>
-          <a:xfrm>
-            <a:off x="9032875" y="4615180"/>
-            <a:ext cx="2727325" cy="177800"/>
-          </a:xfrm>
-          <a:prstGeom prst="roundRect">
-            <a:avLst>
-              <a:gd name="adj" fmla="val 14285"/>
-            </a:avLst>
-          </a:prstGeom>
-          <a:solidFill>
-            <a:srgbClr val="081E3F"/>
-          </a:solidFill>
-          <a:ln>
-            <a:noFill/>
-          </a:ln>
-          <a:effectLst/>
-        </p:spPr>
-        <p:txBody>
-          <a:bodyPr rtlCol="0" anchor="ctr"/>
-          <a:lstStyle/>
-          <a:p>
-            <a:pPr algn="ctr"/>
-          </a:p>
-        </p:txBody>
-      </p:sp>
-      <p:sp>
-        <p:nvSpPr>
-          <p:cNvPr id="94" name="TextBox 93"/>
-          <p:cNvSpPr txBox="1"/>
-          <p:nvPr/>
-        </p:nvSpPr>
-        <p:spPr>
-          <a:xfrm>
-            <a:off x="9134475" y="4629505"/>
-            <a:ext cx="1810512" cy="137160"/>
-          </a:xfrm>
-          <a:prstGeom prst="rect">
-            <a:avLst/>
-          </a:prstGeom>
-          <a:noFill/>
-        </p:spPr>
-        <p:txBody>
-          <a:bodyPr wrap="none" lIns="0" rIns="0" tIns="0" bIns="0"/>
-          <a:lstStyle/>
-          <a:p>
-            <a:pPr algn="l">
-              <a:lnSpc>
-                <a:spcPct val="100000"/>
-              </a:lnSpc>
-              <a:spcBef>
-                <a:spcPts val="0"/>
-              </a:spcBef>
-              <a:spcAft>
-                <a:spcPts val="0"/>
-              </a:spcAft>
-            </a:pPr>
-            <a:r>
-              <a:rPr sz="720" b="1" i="0" spc="120">
-                <a:solidFill>
-                  <a:srgbClr val="FFFFFF"/>
-                </a:solidFill>
-                <a:latin typeface="Consolas"/>
-                <a:cs typeface="Consolas"/>
-              </a:rPr>
-              <a:t>9 · POTENTIAL LIMITATIONS</a:t>
-            </a:r>
-          </a:p>
-        </p:txBody>
-      </p:sp>
-      <p:sp>
-        <p:nvSpPr>
-          <p:cNvPr id="95" name="Rounded Rectangle 94"/>
-          <p:cNvSpPr/>
-          <p:nvPr/>
-        </p:nvSpPr>
-        <p:spPr>
-          <a:xfrm>
-            <a:off x="9045575" y="4894580"/>
-            <a:ext cx="40640" cy="40640"/>
-          </a:xfrm>
-          <a:prstGeom prst="roundRect">
-            <a:avLst>
-              <a:gd name="adj" fmla="val 50000"/>
-            </a:avLst>
-          </a:prstGeom>
-          <a:solidFill>
-            <a:srgbClr val="8C3A1B"/>
-          </a:solidFill>
-          <a:ln>
-            <a:noFill/>
-          </a:ln>
-          <a:effectLst/>
-        </p:spPr>
-        <p:txBody>
-          <a:bodyPr rtlCol="0" anchor="ctr"/>
-          <a:lstStyle/>
-          <a:p>
-            <a:pPr algn="ctr"/>
-          </a:p>
-        </p:txBody>
-      </p:sp>
-      <p:sp>
-        <p:nvSpPr>
-          <p:cNvPr id="96" name="TextBox 95"/>
-          <p:cNvSpPr txBox="1"/>
-          <p:nvPr/>
-        </p:nvSpPr>
-        <p:spPr>
-          <a:xfrm>
-            <a:off x="9147175" y="4830064"/>
-            <a:ext cx="2625725" cy="317500"/>
-          </a:xfrm>
-          <a:prstGeom prst="rect">
-            <a:avLst/>
-          </a:prstGeom>
-          <a:noFill/>
-        </p:spPr>
-        <p:txBody>
-          <a:bodyPr wrap="square" lIns="0" rIns="0" tIns="0" bIns="0"/>
-          <a:lstStyle/>
-          <a:p>
-            <a:pPr algn="l">
-              <a:lnSpc>
-                <a:spcPts val="1010"/>
-              </a:lnSpc>
-              <a:spcBef>
-                <a:spcPts val="0"/>
-              </a:spcBef>
-              <a:spcAft>
-                <a:spcPts val="0"/>
-              </a:spcAft>
-            </a:pPr>
-            <a:r>
-              <a:rPr sz="800" b="0" i="0">
-                <a:solidFill>
-                  <a:srgbClr val="3A4048"/>
-                </a:solidFill>
-                <a:latin typeface="Times New Roman"/>
-                <a:cs typeface="Times New Roman"/>
-              </a:rPr>
-              <a:t>Retrospective self-report. Participants describe an experience</a:t>
-            </a:r>
-          </a:p>
-          <a:p>
-            <a:pPr algn="l">
-              <a:lnSpc>
-                <a:spcPts val="1010"/>
-              </a:lnSpc>
-              <a:spcBef>
-                <a:spcPts val="0"/>
-              </a:spcBef>
-              <a:spcAft>
-                <a:spcPts val="0"/>
-              </a:spcAft>
-            </a:pPr>
-            <a:r>
-              <a:rPr sz="800" b="0" i="0">
-                <a:solidFill>
-                  <a:srgbClr val="3A4048"/>
-                </a:solidFill>
-                <a:latin typeface="Times New Roman"/>
-                <a:cs typeface="Times New Roman"/>
-              </a:rPr>
-              <a:t>after the fact</a:t>
-            </a:r>
-          </a:p>
-        </p:txBody>
-      </p:sp>
-      <p:sp>
-        <p:nvSpPr>
-          <p:cNvPr id="97" name="Rounded Rectangle 96"/>
-          <p:cNvSpPr/>
-          <p:nvPr/>
-        </p:nvSpPr>
-        <p:spPr>
-          <a:xfrm>
-            <a:off x="9045575" y="5189220"/>
-            <a:ext cx="40640" cy="40640"/>
-          </a:xfrm>
-          <a:prstGeom prst="roundRect">
-            <a:avLst>
-              <a:gd name="adj" fmla="val 50000"/>
-            </a:avLst>
-          </a:prstGeom>
-          <a:solidFill>
-            <a:srgbClr val="8C3A1B"/>
-          </a:solidFill>
-          <a:ln>
-            <a:noFill/>
-          </a:ln>
-          <a:effectLst/>
-        </p:spPr>
-        <p:txBody>
-          <a:bodyPr rtlCol="0" anchor="ctr"/>
-          <a:lstStyle/>
-          <a:p>
-            <a:pPr algn="ctr"/>
-          </a:p>
-        </p:txBody>
-      </p:sp>
-      <p:sp>
-        <p:nvSpPr>
-          <p:cNvPr id="98" name="TextBox 97"/>
-          <p:cNvSpPr txBox="1"/>
-          <p:nvPr/>
-        </p:nvSpPr>
-        <p:spPr>
-          <a:xfrm>
-            <a:off x="9147175" y="5124704"/>
-            <a:ext cx="2625725" cy="317500"/>
-          </a:xfrm>
-          <a:prstGeom prst="rect">
-            <a:avLst/>
-          </a:prstGeom>
-          <a:noFill/>
-        </p:spPr>
-        <p:txBody>
-          <a:bodyPr wrap="square" lIns="0" rIns="0" tIns="0" bIns="0"/>
-          <a:lstStyle/>
-          <a:p>
-            <a:pPr algn="l">
-              <a:lnSpc>
-                <a:spcPts val="1010"/>
-              </a:lnSpc>
-              <a:spcBef>
-                <a:spcPts val="0"/>
-              </a:spcBef>
-              <a:spcAft>
-                <a:spcPts val="0"/>
-              </a:spcAft>
-            </a:pPr>
-            <a:r>
-              <a:rPr sz="800" b="0" i="0">
-                <a:solidFill>
-                  <a:srgbClr val="3A4048"/>
-                </a:solidFill>
-                <a:latin typeface="Times New Roman"/>
-                <a:cs typeface="Times New Roman"/>
-              </a:rPr>
-              <a:t>Insider researcher. Managed by the confirmation hazard log, not</a:t>
-            </a:r>
-          </a:p>
-          <a:p>
-            <a:pPr algn="l">
-              <a:lnSpc>
-                <a:spcPts val="1010"/>
-              </a:lnSpc>
-              <a:spcBef>
-                <a:spcPts val="0"/>
-              </a:spcBef>
-              <a:spcAft>
-                <a:spcPts val="0"/>
-              </a:spcAft>
-            </a:pPr>
-            <a:r>
-              <a:rPr sz="800" b="0" i="0">
-                <a:solidFill>
-                  <a:srgbClr val="3A4048"/>
-                </a:solidFill>
-                <a:latin typeface="Times New Roman"/>
-                <a:cs typeface="Times New Roman"/>
-              </a:rPr>
-              <a:t>eliminated</a:t>
-            </a:r>
-          </a:p>
-        </p:txBody>
-      </p:sp>
-      <p:sp>
-        <p:nvSpPr>
-          <p:cNvPr id="99" name="Rounded Rectangle 98"/>
-          <p:cNvSpPr/>
-          <p:nvPr/>
-        </p:nvSpPr>
-        <p:spPr>
-          <a:xfrm>
-            <a:off x="9045575" y="5483859"/>
-            <a:ext cx="40640" cy="40640"/>
-          </a:xfrm>
-          <a:prstGeom prst="roundRect">
-            <a:avLst>
-              <a:gd name="adj" fmla="val 50000"/>
-            </a:avLst>
-          </a:prstGeom>
-          <a:solidFill>
-            <a:srgbClr val="8C3A1B"/>
-          </a:solidFill>
-          <a:ln>
-            <a:noFill/>
-          </a:ln>
-          <a:effectLst/>
-        </p:spPr>
-        <p:txBody>
-          <a:bodyPr rtlCol="0" anchor="ctr"/>
-          <a:lstStyle/>
-          <a:p>
-            <a:pPr algn="ctr"/>
-          </a:p>
-        </p:txBody>
-      </p:sp>
-      <p:sp>
-        <p:nvSpPr>
-          <p:cNvPr id="100" name="TextBox 99"/>
-          <p:cNvSpPr txBox="1"/>
-          <p:nvPr/>
-        </p:nvSpPr>
-        <p:spPr>
-          <a:xfrm>
-            <a:off x="9147175" y="5419344"/>
-            <a:ext cx="2625725" cy="189229"/>
-          </a:xfrm>
-          <a:prstGeom prst="rect">
-            <a:avLst/>
-          </a:prstGeom>
-          <a:noFill/>
-        </p:spPr>
-        <p:txBody>
-          <a:bodyPr wrap="square" lIns="0" rIns="0" tIns="0" bIns="0"/>
-          <a:lstStyle/>
-          <a:p>
-            <a:pPr algn="l">
-              <a:lnSpc>
-                <a:spcPts val="1010"/>
-              </a:lnSpc>
-              <a:spcBef>
-                <a:spcPts val="0"/>
-              </a:spcBef>
-              <a:spcAft>
-                <a:spcPts val="0"/>
-              </a:spcAft>
-            </a:pPr>
-            <a:r>
-              <a:rPr sz="800" b="0" i="0">
-                <a:solidFill>
-                  <a:srgbClr val="3A4048"/>
-                </a:solidFill>
-                <a:latin typeface="Times New Roman"/>
-                <a:cs typeface="Times New Roman"/>
-              </a:rPr>
-              <a:t>Context-dependent. Not intended to generalise</a:t>
-            </a:r>
-          </a:p>
-        </p:txBody>
-      </p:sp>
-      <p:sp>
-        <p:nvSpPr>
-          <p:cNvPr id="101" name="Rounded Rectangle 100"/>
-          <p:cNvSpPr/>
-          <p:nvPr/>
-        </p:nvSpPr>
-        <p:spPr>
-          <a:xfrm>
-            <a:off x="9045575" y="5650230"/>
-            <a:ext cx="40640" cy="40640"/>
-          </a:xfrm>
-          <a:prstGeom prst="roundRect">
-            <a:avLst>
-              <a:gd name="adj" fmla="val 50000"/>
-            </a:avLst>
-          </a:prstGeom>
-          <a:solidFill>
-            <a:srgbClr val="8C3A1B"/>
-          </a:solidFill>
-          <a:ln>
-            <a:noFill/>
-          </a:ln>
-          <a:effectLst/>
-        </p:spPr>
-        <p:txBody>
-          <a:bodyPr rtlCol="0" anchor="ctr"/>
-          <a:lstStyle/>
-          <a:p>
-            <a:pPr algn="ctr"/>
-          </a:p>
-        </p:txBody>
-      </p:sp>
-      <p:sp>
-        <p:nvSpPr>
-          <p:cNvPr id="102" name="TextBox 101"/>
-          <p:cNvSpPr txBox="1"/>
-          <p:nvPr/>
-        </p:nvSpPr>
-        <p:spPr>
-          <a:xfrm>
-            <a:off x="9147175" y="5585714"/>
-            <a:ext cx="2625725" cy="189229"/>
-          </a:xfrm>
-          <a:prstGeom prst="rect">
-            <a:avLst/>
-          </a:prstGeom>
-          <a:noFill/>
-        </p:spPr>
-        <p:txBody>
-          <a:bodyPr wrap="square" lIns="0" rIns="0" tIns="0" bIns="0"/>
-          <a:lstStyle/>
-          <a:p>
-            <a:pPr algn="l">
-              <a:lnSpc>
-                <a:spcPts val="1010"/>
-              </a:lnSpc>
-              <a:spcBef>
-                <a:spcPts val="0"/>
-              </a:spcBef>
-              <a:spcAft>
-                <a:spcPts val="0"/>
-              </a:spcAft>
-            </a:pPr>
-            <a:r>
-              <a:rPr sz="800" b="0" i="0">
-                <a:solidFill>
-                  <a:srgbClr val="3A4048"/>
-                </a:solidFill>
-                <a:latin typeface="Times New Roman"/>
-                <a:cs typeface="Times New Roman"/>
-              </a:rPr>
-              <a:t>One national standards environment, small purposive sample</a:t>
-            </a:r>
-          </a:p>
-        </p:txBody>
-      </p:sp>
-      <p:sp>
-        <p:nvSpPr>
-          <p:cNvPr id="103" name="Rounded Rectangle 102"/>
-          <p:cNvSpPr/>
-          <p:nvPr/>
-        </p:nvSpPr>
-        <p:spPr>
-          <a:xfrm>
-            <a:off x="431800" y="5791200"/>
-            <a:ext cx="11328400" cy="304800"/>
-          </a:xfrm>
-          <a:prstGeom prst="roundRect">
-            <a:avLst>
-              <a:gd name="adj" fmla="val 12500"/>
+              <a:gd name="adj" fmla="val 11538"/>
             </a:avLst>
           </a:prstGeom>
           <a:solidFill>
@@ -8299,14 +7507,14 @@
       </p:sp>
       <p:sp>
         <p:nvSpPr>
-          <p:cNvPr id="104" name="TextBox 103"/>
+          <p:cNvPr id="93" name="TextBox 92"/>
           <p:cNvSpPr txBox="1"/>
           <p:nvPr/>
         </p:nvSpPr>
         <p:spPr>
           <a:xfrm>
-            <a:off x="558800" y="5856325"/>
-            <a:ext cx="618744" cy="137160"/>
+            <a:off x="558800" y="5818225"/>
+            <a:ext cx="969264" cy="137160"/>
           </a:xfrm>
           <a:prstGeom prst="rect">
             <a:avLst/>
@@ -8336,21 +7544,21 @@
                 <a:latin typeface="Consolas"/>
                 <a:cs typeface="Consolas"/>
               </a:rPr>
-              <a:t>TIMELINE</a:t>
-            </a:r>
-          </a:p>
-        </p:txBody>
-      </p:sp>
-      <p:sp>
-        <p:nvSpPr>
-          <p:cNvPr id="105" name="TextBox 104"/>
+              <a:t>AI DISCLOSURE</a:t>
+            </a:r>
+          </a:p>
+        </p:txBody>
+      </p:sp>
+      <p:sp>
+        <p:nvSpPr>
+          <p:cNvPr id="94" name="TextBox 93"/>
           <p:cNvSpPr txBox="1"/>
           <p:nvPr/>
         </p:nvSpPr>
         <p:spPr>
           <a:xfrm>
-            <a:off x="1320800" y="5806186"/>
-            <a:ext cx="189230" cy="133350"/>
+            <a:off x="1600200" y="5780125"/>
+            <a:ext cx="9817100" cy="166624"/>
           </a:xfrm>
           <a:prstGeom prst="rect">
             <a:avLst/>
@@ -8358,432 +7566,36 @@
           <a:noFill/>
         </p:spPr>
         <p:txBody>
-          <a:bodyPr wrap="none" lIns="0" rIns="0" tIns="0" bIns="0"/>
-          <a:lstStyle/>
-          <a:p>
-            <a:pPr algn="l">
-              <a:lnSpc>
-                <a:spcPct val="100000"/>
-              </a:lnSpc>
-              <a:spcBef>
-                <a:spcPts val="0"/>
-              </a:spcBef>
-              <a:spcAft>
-                <a:spcPts val="0"/>
-              </a:spcAft>
-            </a:pPr>
-            <a:r>
-              <a:rPr sz="700" b="1" i="0" spc="90">
-                <a:solidFill>
-                  <a:srgbClr val="B6862C"/>
-                </a:solidFill>
-                <a:latin typeface="Consolas"/>
-                <a:cs typeface="Consolas"/>
-              </a:rPr>
-              <a:t>M1</a:t>
-            </a:r>
-          </a:p>
-        </p:txBody>
-      </p:sp>
-      <p:sp>
-        <p:nvSpPr>
-          <p:cNvPr id="106" name="TextBox 105"/>
-          <p:cNvSpPr txBox="1"/>
-          <p:nvPr/>
-        </p:nvSpPr>
-        <p:spPr>
-          <a:xfrm>
-            <a:off x="1320800" y="5918504"/>
-            <a:ext cx="1369522" cy="144779"/>
-          </a:xfrm>
-          <a:prstGeom prst="rect">
-            <a:avLst/>
-          </a:prstGeom>
-          <a:noFill/>
-        </p:spPr>
-        <p:txBody>
-          <a:bodyPr wrap="none" lIns="0" rIns="0" tIns="0" bIns="0"/>
-          <a:lstStyle/>
-          <a:p>
-            <a:pPr algn="l">
-              <a:lnSpc>
-                <a:spcPct val="100000"/>
-              </a:lnSpc>
-              <a:spcBef>
-                <a:spcPts val="0"/>
-              </a:spcBef>
-              <a:spcAft>
-                <a:spcPts val="0"/>
-              </a:spcAft>
-            </a:pPr>
-            <a:r>
-              <a:rPr sz="760" b="0" i="0">
+          <a:bodyPr wrap="square" lIns="0" rIns="0" tIns="0" bIns="0"/>
+          <a:lstStyle/>
+          <a:p>
+            <a:pPr algn="l">
+              <a:lnSpc>
+                <a:spcPts val="880"/>
+              </a:lnSpc>
+              <a:spcBef>
+                <a:spcPts val="0"/>
+              </a:spcBef>
+              <a:spcAft>
+                <a:spcPts val="0"/>
+              </a:spcAft>
+            </a:pPr>
+            <a:r>
+              <a:rPr sz="720" b="0" i="0">
                 <a:solidFill>
                   <a:srgbClr val="3A4048"/>
                 </a:solidFill>
                 <a:latin typeface="Times New Roman"/>
                 <a:cs typeface="Times New Roman"/>
               </a:rPr>
-              <a:t>IRB determination, protocol pilot</a:t>
-            </a:r>
-          </a:p>
-        </p:txBody>
-      </p:sp>
-      <p:sp>
-        <p:nvSpPr>
-          <p:cNvPr id="107" name="TextBox 106"/>
-          <p:cNvSpPr txBox="1"/>
-          <p:nvPr/>
-        </p:nvSpPr>
-        <p:spPr>
-          <a:xfrm>
-            <a:off x="3383279" y="5806186"/>
-            <a:ext cx="189230" cy="133350"/>
-          </a:xfrm>
-          <a:prstGeom prst="rect">
-            <a:avLst/>
-          </a:prstGeom>
-          <a:noFill/>
-        </p:spPr>
-        <p:txBody>
-          <a:bodyPr wrap="none" lIns="0" rIns="0" tIns="0" bIns="0"/>
-          <a:lstStyle/>
-          <a:p>
-            <a:pPr algn="l">
-              <a:lnSpc>
-                <a:spcPct val="100000"/>
-              </a:lnSpc>
-              <a:spcBef>
-                <a:spcPts val="0"/>
-              </a:spcBef>
-              <a:spcAft>
-                <a:spcPts val="0"/>
-              </a:spcAft>
-            </a:pPr>
-            <a:r>
-              <a:rPr sz="700" b="1" i="0" spc="90">
-                <a:solidFill>
-                  <a:srgbClr val="B6862C"/>
-                </a:solidFill>
-                <a:latin typeface="Consolas"/>
-                <a:cs typeface="Consolas"/>
-              </a:rPr>
-              <a:t>M2</a:t>
-            </a:r>
-          </a:p>
-        </p:txBody>
-      </p:sp>
-      <p:sp>
-        <p:nvSpPr>
-          <p:cNvPr id="108" name="TextBox 107"/>
-          <p:cNvSpPr txBox="1"/>
-          <p:nvPr/>
-        </p:nvSpPr>
-        <p:spPr>
-          <a:xfrm>
-            <a:off x="3383279" y="5918504"/>
-            <a:ext cx="1036914" cy="144779"/>
-          </a:xfrm>
-          <a:prstGeom prst="rect">
-            <a:avLst/>
-          </a:prstGeom>
-          <a:noFill/>
-        </p:spPr>
-        <p:txBody>
-          <a:bodyPr wrap="none" lIns="0" rIns="0" tIns="0" bIns="0"/>
-          <a:lstStyle/>
-          <a:p>
-            <a:pPr algn="l">
-              <a:lnSpc>
-                <a:spcPct val="100000"/>
-              </a:lnSpc>
-              <a:spcBef>
-                <a:spcPts val="0"/>
-              </a:spcBef>
-              <a:spcAft>
-                <a:spcPts val="0"/>
-              </a:spcAft>
-            </a:pPr>
-            <a:r>
-              <a:rPr sz="760" b="0" i="0">
-                <a:solidFill>
-                  <a:srgbClr val="3A4048"/>
-                </a:solidFill>
-                <a:latin typeface="Times New Roman"/>
-                <a:cs typeface="Times New Roman"/>
-              </a:rPr>
-              <a:t>Recruitment and consent</a:t>
-            </a:r>
-          </a:p>
-        </p:txBody>
-      </p:sp>
-      <p:sp>
-        <p:nvSpPr>
-          <p:cNvPr id="109" name="TextBox 108"/>
-          <p:cNvSpPr txBox="1"/>
-          <p:nvPr/>
-        </p:nvSpPr>
-        <p:spPr>
-          <a:xfrm>
-            <a:off x="5445759" y="5806186"/>
-            <a:ext cx="577850" cy="133350"/>
-          </a:xfrm>
-          <a:prstGeom prst="rect">
-            <a:avLst/>
-          </a:prstGeom>
-          <a:noFill/>
-        </p:spPr>
-        <p:txBody>
-          <a:bodyPr wrap="none" lIns="0" rIns="0" tIns="0" bIns="0"/>
-          <a:lstStyle/>
-          <a:p>
-            <a:pPr algn="l">
-              <a:lnSpc>
-                <a:spcPct val="100000"/>
-              </a:lnSpc>
-              <a:spcBef>
-                <a:spcPts val="0"/>
-              </a:spcBef>
-              <a:spcAft>
-                <a:spcPts val="0"/>
-              </a:spcAft>
-            </a:pPr>
-            <a:r>
-              <a:rPr sz="700" b="1" i="0" spc="90">
-                <a:solidFill>
-                  <a:srgbClr val="B6862C"/>
-                </a:solidFill>
-                <a:latin typeface="Consolas"/>
-                <a:cs typeface="Consolas"/>
-              </a:rPr>
-              <a:t>M3 to M5</a:t>
-            </a:r>
-          </a:p>
-        </p:txBody>
-      </p:sp>
-      <p:sp>
-        <p:nvSpPr>
-          <p:cNvPr id="110" name="TextBox 109"/>
-          <p:cNvSpPr txBox="1"/>
-          <p:nvPr/>
-        </p:nvSpPr>
-        <p:spPr>
-          <a:xfrm>
-            <a:off x="5445759" y="5918504"/>
-            <a:ext cx="1433708" cy="144779"/>
-          </a:xfrm>
-          <a:prstGeom prst="rect">
-            <a:avLst/>
-          </a:prstGeom>
-          <a:noFill/>
-        </p:spPr>
-        <p:txBody>
-          <a:bodyPr wrap="none" lIns="0" rIns="0" tIns="0" bIns="0"/>
-          <a:lstStyle/>
-          <a:p>
-            <a:pPr algn="l">
-              <a:lnSpc>
-                <a:spcPct val="100000"/>
-              </a:lnSpc>
-              <a:spcBef>
-                <a:spcPts val="0"/>
-              </a:spcBef>
-              <a:spcAft>
-                <a:spcPts val="0"/>
-              </a:spcAft>
-            </a:pPr>
-            <a:r>
-              <a:rPr sz="760" b="0" i="0">
-                <a:solidFill>
-                  <a:srgbClr val="3A4048"/>
-                </a:solidFill>
-                <a:latin typeface="Times New Roman"/>
-                <a:cs typeface="Times New Roman"/>
-              </a:rPr>
-              <a:t>Interviews, transcription, memoing</a:t>
-            </a:r>
-          </a:p>
-        </p:txBody>
-      </p:sp>
-      <p:sp>
-        <p:nvSpPr>
-          <p:cNvPr id="111" name="TextBox 110"/>
-          <p:cNvSpPr txBox="1"/>
-          <p:nvPr/>
-        </p:nvSpPr>
-        <p:spPr>
-          <a:xfrm>
-            <a:off x="7508239" y="5806186"/>
-            <a:ext cx="577850" cy="133350"/>
-          </a:xfrm>
-          <a:prstGeom prst="rect">
-            <a:avLst/>
-          </a:prstGeom>
-          <a:noFill/>
-        </p:spPr>
-        <p:txBody>
-          <a:bodyPr wrap="none" lIns="0" rIns="0" tIns="0" bIns="0"/>
-          <a:lstStyle/>
-          <a:p>
-            <a:pPr algn="l">
-              <a:lnSpc>
-                <a:spcPct val="100000"/>
-              </a:lnSpc>
-              <a:spcBef>
-                <a:spcPts val="0"/>
-              </a:spcBef>
-              <a:spcAft>
-                <a:spcPts val="0"/>
-              </a:spcAft>
-            </a:pPr>
-            <a:r>
-              <a:rPr sz="700" b="1" i="0" spc="90">
-                <a:solidFill>
-                  <a:srgbClr val="B6862C"/>
-                </a:solidFill>
-                <a:latin typeface="Consolas"/>
-                <a:cs typeface="Consolas"/>
-              </a:rPr>
-              <a:t>M5 to M7</a:t>
-            </a:r>
-          </a:p>
-        </p:txBody>
-      </p:sp>
-      <p:sp>
-        <p:nvSpPr>
-          <p:cNvPr id="112" name="TextBox 111"/>
-          <p:cNvSpPr txBox="1"/>
-          <p:nvPr/>
-        </p:nvSpPr>
-        <p:spPr>
-          <a:xfrm>
-            <a:off x="7508239" y="5918504"/>
-            <a:ext cx="1235455" cy="144779"/>
-          </a:xfrm>
-          <a:prstGeom prst="rect">
-            <a:avLst/>
-          </a:prstGeom>
-          <a:noFill/>
-        </p:spPr>
-        <p:txBody>
-          <a:bodyPr wrap="none" lIns="0" rIns="0" tIns="0" bIns="0"/>
-          <a:lstStyle/>
-          <a:p>
-            <a:pPr algn="l">
-              <a:lnSpc>
-                <a:spcPct val="100000"/>
-              </a:lnSpc>
-              <a:spcBef>
-                <a:spcPts val="0"/>
-              </a:spcBef>
-              <a:spcAft>
-                <a:spcPts val="0"/>
-              </a:spcAft>
-            </a:pPr>
-            <a:r>
-              <a:rPr sz="760" b="0" i="0">
-                <a:solidFill>
-                  <a:srgbClr val="3A4048"/>
-                </a:solidFill>
-                <a:latin typeface="Times New Roman"/>
-                <a:cs typeface="Times New Roman"/>
-              </a:rPr>
-              <a:t>Coding, clustering, composite</a:t>
-            </a:r>
-          </a:p>
-        </p:txBody>
-      </p:sp>
-      <p:sp>
-        <p:nvSpPr>
-          <p:cNvPr id="113" name="TextBox 112"/>
-          <p:cNvSpPr txBox="1"/>
-          <p:nvPr/>
-        </p:nvSpPr>
-        <p:spPr>
-          <a:xfrm>
-            <a:off x="9570719" y="5806186"/>
-            <a:ext cx="189230" cy="133350"/>
-          </a:xfrm>
-          <a:prstGeom prst="rect">
-            <a:avLst/>
-          </a:prstGeom>
-          <a:noFill/>
-        </p:spPr>
-        <p:txBody>
-          <a:bodyPr wrap="none" lIns="0" rIns="0" tIns="0" bIns="0"/>
-          <a:lstStyle/>
-          <a:p>
-            <a:pPr algn="l">
-              <a:lnSpc>
-                <a:spcPct val="100000"/>
-              </a:lnSpc>
-              <a:spcBef>
-                <a:spcPts val="0"/>
-              </a:spcBef>
-              <a:spcAft>
-                <a:spcPts val="0"/>
-              </a:spcAft>
-            </a:pPr>
-            <a:r>
-              <a:rPr sz="700" b="1" i="0" spc="90">
-                <a:solidFill>
-                  <a:srgbClr val="B6862C"/>
-                </a:solidFill>
-                <a:latin typeface="Consolas"/>
-                <a:cs typeface="Consolas"/>
-              </a:rPr>
-              <a:t>M8</a:t>
-            </a:r>
-          </a:p>
-        </p:txBody>
-      </p:sp>
-      <p:sp>
-        <p:nvSpPr>
-          <p:cNvPr id="114" name="TextBox 113"/>
-          <p:cNvSpPr txBox="1"/>
-          <p:nvPr/>
-        </p:nvSpPr>
-        <p:spPr>
-          <a:xfrm>
-            <a:off x="9570719" y="5918504"/>
-            <a:ext cx="1291437" cy="144779"/>
-          </a:xfrm>
-          <a:prstGeom prst="rect">
-            <a:avLst/>
-          </a:prstGeom>
-          <a:noFill/>
-        </p:spPr>
-        <p:txBody>
-          <a:bodyPr wrap="none" lIns="0" rIns="0" tIns="0" bIns="0"/>
-          <a:lstStyle/>
-          <a:p>
-            <a:pPr algn="l">
-              <a:lnSpc>
-                <a:spcPct val="100000"/>
-              </a:lnSpc>
-              <a:spcBef>
-                <a:spcPts val="0"/>
-              </a:spcBef>
-              <a:spcAft>
-                <a:spcPts val="0"/>
-              </a:spcAft>
-            </a:pPr>
-            <a:r>
-              <a:rPr sz="760" b="0" i="0">
-                <a:solidFill>
-                  <a:srgbClr val="3A4048"/>
-                </a:solidFill>
-                <a:latin typeface="Times New Roman"/>
-                <a:cs typeface="Times New Roman"/>
-              </a:rPr>
-              <a:t>Member checking and write-up</a:t>
+              <a:t>Generative AI (Claude, Anthropic) helped draft and lay out this poster from the author's proposal and protocol, and checked clarity. The research question, design decisions and interpretations are the author's (FIU Graduate School AI policy).</a:t>
             </a:r>
           </a:p>
         </p:txBody>
       </p:sp>
       <p:cxnSp>
         <p:nvCxnSpPr>
-          <p:cNvPr id="115" name="Connector 114"/>
+          <p:cNvPr id="95" name="Connector 94"/>
           <p:cNvCxnSpPr/>
           <p:nvPr/>
         </p:nvCxnSpPr>
@@ -8819,7 +7631,7 @@
       </p:cxnSp>
       <p:sp>
         <p:nvSpPr>
-          <p:cNvPr id="116" name="TextBox 115"/>
+          <p:cNvPr id="96" name="TextBox 95"/>
           <p:cNvSpPr txBox="1"/>
           <p:nvPr/>
         </p:nvSpPr>
@@ -8863,7 +7675,7 @@
       </p:sp>
       <p:sp>
         <p:nvSpPr>
-          <p:cNvPr id="117" name="TextBox 116"/>
+          <p:cNvPr id="97" name="TextBox 96"/>
           <p:cNvSpPr txBox="1"/>
           <p:nvPr/>
         </p:nvSpPr>
@@ -8907,7 +7719,7 @@
       </p:sp>
       <p:sp>
         <p:nvSpPr>
-          <p:cNvPr id="118" name="TextBox 117"/>
+          <p:cNvPr id="98" name="TextBox 97"/>
           <p:cNvSpPr txBox="1"/>
           <p:nvPr/>
         </p:nvSpPr>
@@ -8997,7 +7809,7 @@
       </p:sp>
       <p:sp>
         <p:nvSpPr>
-          <p:cNvPr id="119" name="TextBox 118"/>
+          <p:cNvPr id="99" name="TextBox 98"/>
           <p:cNvSpPr txBox="1"/>
           <p:nvPr/>
         </p:nvSpPr>
@@ -9064,7 +7876,7 @@
       </p:sp>
       <p:sp>
         <p:nvSpPr>
-          <p:cNvPr id="120" name="TextBox 119"/>
+          <p:cNvPr id="100" name="TextBox 99"/>
           <p:cNvSpPr txBox="1"/>
           <p:nvPr/>
         </p:nvSpPr>
@@ -9131,7 +7943,7 @@
       </p:sp>
       <p:sp>
         <p:nvSpPr>
-          <p:cNvPr id="121" name="TextBox 120"/>
+          <p:cNvPr id="101" name="TextBox 100"/>
           <p:cNvSpPr txBox="1"/>
           <p:nvPr/>
         </p:nvSpPr>
@@ -9198,7 +8010,7 @@
       </p:sp>
       <p:sp>
         <p:nvSpPr>
-          <p:cNvPr id="122" name="TextBox 121"/>
+          <p:cNvPr id="102" name="TextBox 101"/>
           <p:cNvSpPr txBox="1"/>
           <p:nvPr/>
         </p:nvSpPr>
@@ -9288,7 +8100,7 @@
       </p:sp>
       <p:sp>
         <p:nvSpPr>
-          <p:cNvPr id="123" name="TextBox 122"/>
+          <p:cNvPr id="103" name="TextBox 102"/>
           <p:cNvSpPr txBox="1"/>
           <p:nvPr/>
         </p:nvSpPr>
@@ -9355,7 +8167,7 @@
       </p:sp>
       <p:sp>
         <p:nvSpPr>
-          <p:cNvPr id="124" name="TextBox 123"/>
+          <p:cNvPr id="104" name="TextBox 103"/>
           <p:cNvSpPr txBox="1"/>
           <p:nvPr/>
         </p:nvSpPr>
@@ -9422,7 +8234,7 @@
       </p:sp>
       <p:sp>
         <p:nvSpPr>
-          <p:cNvPr id="125" name="TextBox 124"/>
+          <p:cNvPr id="105" name="TextBox 104"/>
           <p:cNvSpPr txBox="1"/>
           <p:nvPr/>
         </p:nvSpPr>

--- a/dba/coursework/GEB7911_Qualitative_Research_Methods/Malik_GEB7911_ProposalPoster_DRAFT.pptx
+++ b/dba/coursework/GEB7911_Qualitative_Research_Methods/Malik_GEB7911_ProposalPoster_DRAFT.pptx
@@ -3445,7 +3445,7 @@
                 <a:latin typeface="Consolas"/>
                 <a:cs typeface="Consolas"/>
               </a:rPr>
-              <a:t>DRAFT FOR FEEDBACK  ·  29 SEP 2026</a:t>
+              <a:t>WEEK 8 PRESENTATION  ·  6 OCT 2026</a:t>
             </a:r>
           </a:p>
         </p:txBody>

--- a/dba/coursework/GEB7911_Qualitative_Research_Methods/Malik_GEB7911_ProposalPoster_DRAFT.pptx
+++ b/dba/coursework/GEB7911_Qualitative_Research_Methods/Malik_GEB7911_ProposalPoster_DRAFT.pptx
@@ -3876,7 +3876,7 @@
                 <a:latin typeface="Times New Roman"/>
                 <a:cs typeface="Times New Roman"/>
               </a:rPr>
-              <a:t>already formed remains unexplored.</a:t>
+              <a:t>already formed has received much less attention.</a:t>
             </a:r>
           </a:p>
         </p:txBody>
@@ -7883,7 +7883,7 @@
         <p:spPr>
           <a:xfrm>
             <a:off x="6604000" y="6203188"/>
-            <a:ext cx="2489200" cy="205740"/>
+            <a:ext cx="2489200" cy="285750"/>
           </a:xfrm>
           <a:prstGeom prst="rect">
             <a:avLst/>
@@ -7913,7 +7913,7 @@
                 <a:latin typeface="Times New Roman"/>
                 <a:cs typeface="Times New Roman"/>
               </a:rPr>
-              <a:t>Fotoh, L. E., &amp; Mugwira, T. (2025). Exploring the impact of generative AI on</a:t>
+              <a:t>Fotoh, L. E., &amp; Mugwira, T. (2025). Exploring large language models in</a:t>
             </a:r>
           </a:p>
           <a:p>
@@ -7936,7 +7936,30 @@
                 <a:latin typeface="Times New Roman"/>
                 <a:cs typeface="Times New Roman"/>
               </a:rPr>
-              <a:t>professional skepticism in auditing.</a:t>
+              <a:t>external audits: Implications and ethical considerations. International Journal of</a:t>
+            </a:r>
+          </a:p>
+          <a:p>
+            <a:pPr algn="l">
+              <a:lnSpc>
+                <a:spcPts val="630"/>
+              </a:lnSpc>
+              <a:spcBef>
+                <a:spcPts val="0"/>
+              </a:spcBef>
+              <a:spcAft>
+                <a:spcPts val="0"/>
+              </a:spcAft>
+            </a:pPr>
+            <a:r>
+              <a:rPr sz="600" b="0" i="0">
+                <a:solidFill>
+                  <a:srgbClr val="767D86"/>
+                </a:solidFill>
+                <a:latin typeface="Times New Roman"/>
+                <a:cs typeface="Times New Roman"/>
+              </a:rPr>
+              <a:t>Accounting Information Systems, 56, 100748.</a:t>
             </a:r>
           </a:p>
         </p:txBody>
@@ -7950,7 +7973,7 @@
         <p:spPr>
           <a:xfrm>
             <a:off x="9182100" y="6203188"/>
-            <a:ext cx="2489200" cy="205740"/>
+            <a:ext cx="2489200" cy="285750"/>
           </a:xfrm>
           <a:prstGeom prst="rect">
             <a:avLst/>
@@ -8003,7 +8026,30 @@
                 <a:latin typeface="Times New Roman"/>
                 <a:cs typeface="Times New Roman"/>
               </a:rPr>
-              <a:t>perceptual, emotional and social judgements.</a:t>
+              <a:t>perceptual, emotional and social judgements. Nature Human Behaviour, 9(2),</a:t>
+            </a:r>
+          </a:p>
+          <a:p>
+            <a:pPr algn="l">
+              <a:lnSpc>
+                <a:spcPts val="630"/>
+              </a:lnSpc>
+              <a:spcBef>
+                <a:spcPts val="0"/>
+              </a:spcBef>
+              <a:spcAft>
+                <a:spcPts val="0"/>
+              </a:spcAft>
+            </a:pPr>
+            <a:r>
+              <a:rPr sz="600" b="0" i="0">
+                <a:solidFill>
+                  <a:srgbClr val="767D86"/>
+                </a:solidFill>
+                <a:latin typeface="Times New Roman"/>
+                <a:cs typeface="Times New Roman"/>
+              </a:rPr>
+              <a:t>345-359.</a:t>
             </a:r>
           </a:p>
         </p:txBody>
@@ -8160,7 +8206,7 @@
                 <a:latin typeface="Times New Roman"/>
                 <a:cs typeface="Times New Roman"/>
               </a:rPr>
-              <a:t>systems applied in auditing: A systematic review.</a:t>
+              <a:t>systems applied in auditing: A systematic review. Scientific African, 25, e02281.</a:t>
             </a:r>
           </a:p>
         </p:txBody>
